--- a/week4-siglip/김가은/SigLIP_4주차_발표.pptx
+++ b/week4-siglip/김가은/SigLIP_4주차_발표.pptx
@@ -29,10 +29,9 @@
     <p:sldId id="277" r:id="rId23"/>
     <p:sldId id="278" r:id="rId24"/>
     <p:sldId id="279" r:id="rId25"/>
-    <p:sldId id="280" r:id="rId26"/>
   </p:sldIdLst>
   <p:notesMasterIdLst>
-    <p:notesMasterId r:id="rId27"/>
+    <p:notesMasterId r:id="rId26"/>
   </p:notesMasterIdLst>
   <p:sldSz cx="12192000" cy="6858000"/>
   <p:notesSz cx="6858000" cy="12192000"/>
@@ -131,14 +130,14 @@
   <p:extLst>
     <p:ext uri="{521415D9-36F7-43E2-AB2F-B90AF26B5E84}">
       <p14:sectionLst xmlns:p14="http://schemas.microsoft.com/office/powerpoint/2010/main">
-        <p14:section name="도입" id="{66d7bb91-e077-53dc-009a-e27b82dc5770}">
+        <p14:section name="도입" id="{39ae13d3-5ce1-8b69-2a31-19c9b2a9c01e}">
           <p14:sldIdLst>
             <p14:sldId id="256"/>
             <p14:sldId id="257"/>
             <p14:sldId id="258"/>
           </p14:sldIdLst>
         </p14:section>
-        <p14:section name="배경: 대조학습" id="{632925f8-90ee-9c1c-ae42-2ec9fe09836e}">
+        <p14:section name="배경: 대조학습" id="{a4631b60-7256-86fd-fb77-9d30f9f396b2}">
           <p14:sldIdLst>
             <p14:sldId id="259"/>
             <p14:sldId id="260"/>
@@ -146,7 +145,7 @@
             <p14:sldId id="262"/>
           </p14:sldIdLst>
         </p14:section>
-        <p14:section name="SigLIP 핵심" id="{8f9f5457-d901-7bb3-00d2-8e42b7b5303d}">
+        <p14:section name="SigLIP 핵심" id="{44ae4f9e-b9b8-591a-524f-c993ba4ab386}">
           <p14:sldIdLst>
             <p14:sldId id="263"/>
             <p14:sldId id="264"/>
@@ -157,31 +156,26 @@
             <p14:sldId id="269"/>
           </p14:sldIdLst>
         </p14:section>
-        <p14:section name="검색에 적합한 이유" id="{13fa9c31-5883-bc09-8953-0edef20ce565}">
+        <p14:section name="검색에 적합한 이유" id="{d7eaa629-3c75-4863-eab6-9e371012d33f}">
           <p14:sldIdLst>
             <p14:sldId id="270"/>
             <p14:sldId id="271"/>
           </p14:sldIdLst>
         </p14:section>
-        <p14:section name="실습" id="{99141386-fccc-0b6b-c4db-66b7478c197e}">
+        <p14:section name="실습" id="{1e873515-e7a1-f1ce-f320-4fd73ba0bfc6}">
           <p14:sldIdLst>
             <p14:sldId id="272"/>
             <p14:sldId id="273"/>
             <p14:sldId id="274"/>
             <p14:sldId id="275"/>
             <p14:sldId id="276"/>
+            <p14:sldId id="277"/>
           </p14:sldIdLst>
         </p14:section>
-        <p14:section name="마무리" id="{44b2818d-b548-c220-111d-a09075de5dd9}">
+        <p14:section name="마무리" id="{fea26faf-d0bc-3f19-8d5c-23b857d722f7}">
           <p14:sldIdLst>
-            <p14:sldId id="277"/>
             <p14:sldId id="278"/>
             <p14:sldId id="279"/>
-          </p14:sldIdLst>
-        </p14:section>
-        <p14:section name="부록" id="{99e415ad-b092-9d9c-f13a-618b4b24bfbd}">
-          <p14:sldIdLst>
-            <p14:sldId id="280"/>
           </p14:sldIdLst>
         </p14:section>
       </p14:sectionLst>
@@ -1253,7 +1247,9 @@
           <a:p>
             <a:r>
               <a:rPr lang="en-US" dirty="0"/>
-              <a:t>4주차 발표를 시작하겠습니다. 이번 주 주제는 SigLIP으로, 이미지와 텍스트를 같은 벡터 공간에 넣어주는 비전-언어 임베딩 모델입니다. 발표 내내 동그란 사진은 이미지, 주황색 말풍선은 텍스트를 뜻합니다.</a:t>
+              <a:t>안녕하세요, 4주차 발표를 맡은 김가은입니다. 오늘 주제는 SigLIP입니다.
+제목 그대로 Sigmoid Loss로 학습한 비전-언어 임베딩 모델인데요, 쉽게 말하면 사진과 문장을 같은 숫자 공간에 넣어 주는 모델입니다.
+발표 내내 동그란 사진은 이미지, 주황색 말풍선은 텍스트라고 보시면 됩니다.</a:t>
             </a:r>
             <a:endParaRPr lang="en-US" dirty="0"/>
           </a:p>
@@ -1341,7 +1337,10 @@
           <a:p>
             <a:r>
               <a:rPr lang="en-US" dirty="0"/>
-              <a:t>Vision Transformer는 사진을 퍼즐 조각처럼 잘라서 읽습니다. 224x224 사진을 16x16 픽셀 조각으로 자르면 14x14, 196조각이 나옵니다. 조각 하나를 단어 하나처럼 토큰으로 보고 Transformer에 넣고, 마지막에 MAP(Multihead Attention Pooling)으로 하나의 벡터로 요약합니다. 모델 이름의 patch16, 224가 바로 이 숫자입니다. so400m은 계산 효율에 맞춰 모양을 최적화한 약 4억 파라미터 ViT입니다.</a:t>
+              <a:t>이미지 인코더인 ViT는 사진을 퍼즐 조각처럼 잘라서 읽습니다.
+224×224 사진을 16×16 픽셀 조각으로 자르면 가로세로 14개씩, 모두 196조각이 나와요.
+이 조각 하나를 문장의 단어 하나처럼 토큰으로 보고 Transformer에 넣은 다음, 마지막에 하나의 벡터로 요약합니다.
+모델 이름에 붙은 patch16, 224가 바로 이 숫자예요. 이따 실습에서 쓰는 모델이 siglip-base-patch16-224라서, 이름만 봐도 어떤 모델인지 알 수 있습니다.</a:t>
             </a:r>
             <a:endParaRPr lang="en-US" dirty="0"/>
           </a:p>
@@ -1429,7 +1428,10 @@
           <a:p>
             <a:r>
               <a:rPr lang="en-US" dirty="0"/>
-              <a:t>모든 사진 i와 문장 j 쌍에 대해, 짝이면 확률을 1 쪽으로, 아니면 0 쪽으로 미는 로지스틱 회귀를 더한 것입니다. CLIP과 비교하면 분모에 배치 전체 합이 없다는 게 핵심 차이입니다. 예를 들어 점수가 T1 5.0, T2 4.8이면 Softmax는 0.55와 0.45로 나눠 갖지만 Sigmoid는 둘 다 0.99로 따로 판정합니다. 그래서 T2가 짝이 아니라면 T2를 직접 낮추는 신호가 들어갑니다.</a:t>
+              <a:t>이제 수식을 한 줄로 보겠습니다. 어려워 보이지만 아까 O/X 퀴즈를 그대로 쓴 거예요.
+사진 i와 문장 j의 유사도에 온도 t를 곱하고 b를 더한 다음, 짝이면 +1, 아니면 −1인 z를 곱해서 시그모이드에 넣습니다. 그리고 이걸 모든 쌍에 대해 더합니다.
+CLIP 수식과 비교하면 분모에 배치 전체 합이 없다는 게 가장 큰 차이입니다.
+그래서 짝이 아닌데 점수가 높은 캡션이 있으면, 그 캡션의 점수를 직접 낮추는 신호가 들어갑니다.</a:t>
             </a:r>
             <a:endParaRPr lang="en-US" dirty="0"/>
           </a:p>
@@ -1517,7 +1519,10 @@
           <a:p>
             <a:r>
               <a:rPr lang="en-US" dirty="0"/>
-              <a:t>배치가 32k면 진짜 짝 하나당 가짜 짝이 3만 2천 개입니다. 그냥 시작하면 가짜 짝들의 손실이 너무 커서 학습이 흔들립니다. 그래서 바이어스 b를 -10에서 시작합니다. 그래프를 보면 b가 0이면 유사도가 0만 넘어도 확률이 절반을 넘지만, b가 -10이면 유사도가 거의 1인 쌍만 확률이 올라갑니다. '처음엔 거의 다 짝이 아니다'에서 출발하는 셈입니다. 온도 t는 t' = log 10, 즉 t = 10에서 시작합니다.</a:t>
+              <a:t>그런데 왜 바이어스 b가 따로 필요할까요? 아까 가짜 짝이 B제곱으로 늘어난다고 했죠.
+배치가 3만 2천이면 진짜 짝 하나당 가짜 짝이 3만 2천 개입니다. 아무 조치 없이 시작하면 처음에 가짜 짝들의 손실이 너무 커서 학습이 흔들려요.
+그래서 b를 −10에서 시작합니다. 그래프를 보시면, 회색 선인 b = 0일 때는 유사도가 0만 넘어도 짝일 확률이 절반을 넘는데, 보라색 선인 b = −10일 때는 유사도가 거의 1인 쌍만 확률이 올라갑니다.
+즉 '처음엔 거의 다 짝이 아니다'에서 출발하는 거예요. 덤으로 출력이 실제 짝일 확률처럼 보정되는 효과도 있습니다.</a:t>
             </a:r>
             <a:endParaRPr lang="en-US" dirty="0"/>
           </a:p>
@@ -1605,7 +1610,10 @@
           <a:p>
             <a:r>
               <a:rPr lang="en-US" dirty="0"/>
-              <a:t>Sigmoid는 칸끼리 독립이라 큰 표를 한 번에 만들 필요가 없습니다. GPU 세 대라면 1단계에서 각자 자기 블록을 계산하고, 텍스트 벡터를 옆 GPU로 넘겨 다음 블록을 계산하고, 한 번 더 넘기면 표 전체를 계산한 셈입니다. 손실만 더하면 끝입니다. 그래서 GPU 한 대가 들고 있는 메모리가 전체 배치 제곱이 아니라 자기 몫 배치 제곱에 비례합니다. 논문은 이를 chunked 구현이라고 부르고, 이미지 인코더를 고정한 SigLiT로 TPUv4 4개, 2일 만에 ImageNet zero-shot 84.5%를 달성했으며, 배치를 100만까지 늘려 실험했습니다.</a:t>
+              <a:t>이렇게 바꾸면 무엇이 좋아지는지 보겠습니다. Sigmoid는 칸끼리 독립이라서 큰 표를 한 번에 만들 필요가 없어요.
+GPU가 세 대라면 먼저 각자 자기 블록, 1번 칸들을 계산합니다. 그다음 텍스트 벡터를 옆 GPU로 넘겨서 2번 칸들을, 한 번 더 넘겨서 3번 칸까지 계산하면 표 전체를 계산한 셈이 돼요. 마지막에 손실만 더하면 끝입니다.
+그래서 GPU 한 대가 들고 있어야 하는 메모리가 훨씬 작습니다.
+논문에서는 이미지 인코더를 고정한 설정으로 TPU 4개, 이틀 만에 ImageNet zero-shot 84.5%를 냈고, 배치를 100만까지 늘려서 실험할 수 있었다고 합니다.</a:t>
             </a:r>
             <a:endParaRPr lang="en-US" dirty="0"/>
           </a:p>
@@ -1693,7 +1701,10 @@
           <a:p>
             <a:r>
               <a:rPr lang="en-US" dirty="0"/>
-              <a:t>지금까지 내용을 한 표로 정리했습니다. 위의 세 줄은 손실 함수 구조의 차이이고, 가운데 세 줄은 논문의 배치 크기 실험 결과입니다. 작은 배치에서는 Sigmoid가 확실히 좋고, 배치를 키우면 차이가 줄어 32k 근처에서 포화되며, 엉뚱한 캡션이 섞인 노이즈 데이터에서도 성능이 덜 떨어졌습니다. '무조건 큰 배치'가 답이 아니라는 뜻입니다.</a:t>
+              <a:t>지금까지 내용을 한 표로 정리했습니다.
+위쪽 세 줄은 방금 본 구조 차이입니다. 객관식과 O/X, 배치 전체 정규화가 필요한지, 메모리를 어떻게 쓰는지.
+아래쪽은 논문의 실험 결과입니다. 4천에서 1만 6천 정도의 작은 배치에서는 SigLIP이 확실히 좋았고, 배치를 키우면 둘 다 3만 2천 근처에서 성능이 거의 멈췄어요. 엉뚱한 캡션이 섞인 노이즈 데이터에서도 SigLIP이 덜 떨어졌습니다.
+무조건 큰 배치가 답은 아니라는 뜻입니다.</a:t>
             </a:r>
             <a:endParaRPr lang="en-US" dirty="0"/>
           </a:p>
@@ -1781,7 +1792,10 @@
           <a:p>
             <a:r>
               <a:rPr lang="en-US" dirty="0"/>
-              <a:t>검색에 적합한 첫 번째 이유는 듀얼 인코더 구조입니다. 사진 벡터는 미리 한 번만 계산해서 벡터DB에 넣어 둡니다. 질문이 들어오면 문장 하나만 인코딩하고 가장 가까운 사진 벡터를 찾습니다. smol-vision 노트북도 이 흐름을 오프라인 인덱싱과 온라인 추론으로 나눠 설명합니다. 3주차 용어로는 SigLIP이 bi-encoder입니다. 질문과 사진을 함께 넣는 cross-encoder는 정확하지만 질문마다 모든 사진을 다시 계산해야 해서 재정렬 단계에 씁니다.</a:t>
+              <a:t>이제 이게 왜 검색에 잘 맞는지 보겠습니다. 첫 번째 이유는 아까 말씀드린 듀얼 인코더 구조예요.
+사진 벡터는 미리 한 번만 계산해서 FAISS나 Chroma 같은 벡터DB에 넣어 둡니다. 질문이 들어오면 문장 하나만 텍스트 인코더로 바꾸고, 벡터DB에서 가장 가까운 사진을 찾으면 돼요.
+사진이 수십만 장이어도 질문마다 다시 계산할 필요가 없습니다.
+3주차 용어로 말하면 SigLIP은 bi-encoder고, 질문과 문서를 같이 넣는 cross-encoder는 재정렬할 때 쓰는 쪽입니다.</a:t>
             </a:r>
             <a:endParaRPr lang="en-US" dirty="0"/>
           </a:p>
@@ -1869,7 +1883,9 @@
           <a:p>
             <a:r>
               <a:rPr lang="en-US" dirty="0"/>
-              <a:t>두 번째 이유는 점수 해석입니다. SigLIP 점수는 쌍마다 독립된 '짝일 확률'이라 0.5 이상만 보여주자는 식의 임계값 필터링이 자연스럽습니다. Softmax 확률은 후보 집합에 따라 값이 달라져 기준을 잡기 어렵습니다. 순위만 필요하면 코사인 유사도만으로 충분합니다. 이 밖에 같은 공간이라 이미지→텍스트, 이미지→이미지 검색도 되고, base부터 다국어까지 공개 체크포인트가 다양하다는 것도 장점입니다. 그래프 값은 개념 설명용 예시입니다.</a:t>
+              <a:t>두 번째 이유는 점수를 확률처럼 읽을 수 있다는 점입니다.
+SigLIP 점수는 쌍마다 독립된 '짝일 확률'이라서, 예를 들어 0.5 넘는 사진만 보여주자 같은 기준을 세우기 쉬워요. Softmax는 후보가 바뀌면 값이 같이 바뀌어서 이런 기준을 잡기 어렵습니다.
+다만 화면 숫자는 예시이고, 실제 값은 바로 다음 실습에서 보시겠지만 생각보다 낮게 나옵니다.</a:t>
             </a:r>
             <a:endParaRPr lang="en-US" dirty="0"/>
           </a:p>
@@ -1957,7 +1973,9 @@
           <a:p>
             <a:r>
               <a:rPr lang="en-US" dirty="0"/>
-              <a:t>이번 주 실습 자료 네 가지입니다. 메인은 Niels Rogge의 'Inference with (multilingual) SigLIP' Colab 노트북으로, 이미지와 텍스트의 유사도를 계산하고 다국어 모델도 다룹니다. 공식 코드는 Transformers 문서의 get_image_features와 get_text_features 예제입니다. smol-vision의 이미지 검색 노트북은 MetaCLIP2로 되어 있는데 모델만 SigLIP으로 바꾸면 5주차 과제가 됩니다. big_vision 데모는 논문 저자들의 JAX 코드라 참고만 하면 됩니다.</a:t>
+              <a:t>여기부터는 실습입니다.
+이번 주 메인 실습은 'Inference with multilingual SigLIP' 노트북이고, 공식 문서, 5주차 미리보기용 smol-vision 노트북, 논문 저자의 big_vision 데모도 같이 정리해 두었습니다.
+저는 메인 노트북을 직접 실행했고, 다음 슬라이드부터 그 코드와 실제 결과를 보여드리겠습니다.</a:t>
             </a:r>
             <a:endParaRPr lang="en-US" dirty="0"/>
           </a:p>
@@ -2045,7 +2063,10 @@
           <a:p>
             <a:r>
               <a:rPr lang="en-US" dirty="0"/>
-              <a:t>Transformers 공식 문서의 SiglipModel 예제입니다. get_image_features는 사진 벡터를, get_text_features는 문장 벡터를 돌려줍니다. 텍스트에는 꼭 padding='max_length'를 넣습니다. 공식 get_text_features 예제는 tokenizer를 쓰는데, 여기서는 processor 하나로 통일했습니다. 주의할 점: 최신 transformers 5.x에서는 get_image_features가 텐서가 아니라 출력 객체를 돌려주고, 임베딩은 .pooler_output에 들어 있습니다. 4.x에서는 바로 텐서입니다. getattr 한 줄을 넣으면 두 버전 모두에서 동작합니다. 이 동작은 transformers 5.18에서 확인했습니다.</a:t>
+              <a:t>먼저 모델을 불러옵니다.
+원래 노트북은 가장 성능이 좋은 so400m 모델을 쓰는데, 저는 가볍게 돌리려고 base-patch16-224로 바꿔서 실행했습니다.
+아까 이름 읽는 법을 봤으니까 base 크기에 16픽셀 조각, 224 해상도라는 걸 바로 아실 거예요.
+AutoProcessor와 AutoModel 두 줄이면 모델과 전처리기가 같이 준비됩니다. 프로세서가 사진 크기 조절과 문장 토큰화를 한 번에 해 줍니다.</a:t>
             </a:r>
             <a:endParaRPr lang="en-US" dirty="0"/>
           </a:p>
@@ -2133,7 +2154,9 @@
           <a:p>
             <a:r>
               <a:rPr lang="en-US" dirty="0"/>
-              <a:t>메인 노트북의 코드입니다. 고양이 두 마리 COCO 사진에 캡션 세 개를 넣고 짝일 확률을 계산합니다. CLIP 코드 습관대로 쓰면 틀리는 곳이 두 군데입니다. 텍스트는 padding='max_length'로 넣어야 하고, 확률은 softmax가 아니라 sigmoid로 계산합니다. 노트북 실행 결과 정답 캡션이 40.5%로 나오는데, 노트북 설명대로 SigLIP 확률은 쌍마다 독립적으로 해석해야 하고 CLIP보다 값이 평평합니다. 그래서 절대값보다 다른 캡션과의 비교로 읽는 게 좋습니다.</a:t>
+              <a:t>다음은 입력 준비입니다. 사진은 COCO 데이터셋의 고양이 두 마리 사진이고, 캡션은 고양이 두 마리, 햄버거 두 개, 강아지 두 마리, 이렇게 세 개를 줬습니다.
+여기서 꼭 보셔야 할 게 padding="max_length"예요. SigLIP은 학습할 때 문장을 항상 64토큰 길이로 맞췄기 때문에 쓸 때도 똑같이 맞춰야 합니다.
+출력된 크기를 보면 input_ids가 3×64, 문장 3개가 64토큰씩이고, pixel_values는 1×3×224×224, 사진 1장이 224 크기로 바뀐 걸 확인할 수 있습니다. ViT 슬라이드에서 본 224가 여기서 나옵니다.</a:t>
             </a:r>
             <a:endParaRPr lang="en-US" dirty="0"/>
           </a:p>
@@ -2221,7 +2244,9 @@
           <a:p>
             <a:r>
               <a:rPr lang="en-US" dirty="0"/>
-              <a:t>'밤에 발사되는 로켓'이라는 문장으로 사진 네 장 중 로켓 사진을 찾으려면 어떻게 해야 할까요? 사진 파일에는 '로켓'이라는 글자가 없습니다. 그래서 단어가 아니라 의미로 비교해야 하고, 이걸 가능하게 해주는 게 SigLIP 같은 비전-언어 임베딩 모델입니다.</a:t>
+              <a:t>질문 하나로 시작하겠습니다. 여기 사진이 네 장 있고, '밤에 발사되는 로켓'이라는 문장으로 로켓 사진을 찾고 싶다고 해 볼게요.
+1~3주차에 한 텍스트 검색이라면 문서 안에 '로켓'이라는 단어가 있었겠지만, 사진 파일 안에는 글자가 하나도 없습니다.
+그래서 단어를 맞춰 보는 게 아니라 의미를 비교해야 하고, 오늘 배울 SigLIP이 바로 이걸 가능하게 해 주는 모델입니다.</a:t>
             </a:r>
             <a:endParaRPr lang="en-US" dirty="0"/>
           </a:p>
@@ -2309,7 +2334,10 @@
           <a:p>
             <a:r>
               <a:rPr lang="en-US" dirty="0"/>
-              <a:t>메인 노트북의 다국어 예제를 한국어로 바꿔 봤습니다. Google이 공개한 다국어 체크포인트 siglip-base-patch16-256-multilingual, 논문에서 mSigLIP이라고 부르는 모델은 영어로 거르지 않은 WebLI 데이터로 학습했고 텍스트 어휘가 25만 토큰입니다. 주의할 점이 하나 있습니다. 노트북의 다국어 셀은 설명에는 multilingual 체크포인트를 소개하지만 코드에서는 so400m 영어 모델을 다시 불러옵니다. 그대로 실행하면 다국어 모델이 아니니 체크포인트 이름을 바꿔서 실행하세요. 한국어 결과는 각자 돌려보고 세션에서 비교해 봅시다.</a:t>
+              <a:t>이제 모델에 넣고 결과를 봅니다. 여기서 CLIP과 다른 점이 하나 있는데, 확률을 softmax가 아니라 sigmoid로 계산합니다. 오늘 배운 O/X 퀴즈 그대로예요.
+제가 돌린 결과는 고양이 두 마리가 32%, 햄버거와 강아지는 0%였습니다.
+정답인데 32%면 낮아 보이죠? 노트북 설명에도 나오는데, SigLIP 확률은 쌍마다 따로 해석해야 하고 CLIP보다 값이 평평하게 나옵니다.
+그래서 절대값보다는 다른 캡션과 비교해서 읽는 게 맞아요. 정답 캡션만 높고 나머지는 0이니까 제대로 구분한 겁니다.</a:t>
             </a:r>
             <a:endParaRPr lang="en-US" dirty="0"/>
           </a:p>
@@ -2397,7 +2425,10 @@
           <a:p>
             <a:r>
               <a:rPr lang="en-US" dirty="0"/>
-              <a:t>마지막은 5주차로 이어지는 코드입니다. smol-vision의 이미지 검색 노트북은 MetaCLIP2를 쓰는데, 같은 구조에서 모델만 SigLIP으로 바꿨습니다. 바꾼 곳은 네 군데입니다. 차원을 768로, 텍스트에 padding='max_length'를 추가, 인덱스를 IndexFlatIP로 해서 정규화한 벡터의 내적이 코사인 유사도가 되게 했고, transformers 5.x 대응으로 pooler_output을 꺼냅니다. 원본은 IndexFlatL2를 쓰는데, 정규화한 벡터에서는 L2 거리와 코사인 순위가 같으므로 어느 쪽이든 결과 순서는 같습니다. 이 인덱스가 그대로 5주차 검색 데모의 출발점입니다. 이 흐름은 작은 테스트 모델로 transformers 5.18 + faiss-cpu에서 실행해 확인했습니다.</a:t>
+              <a:t>다음은 다국어 예제입니다. 프랑스어, 네덜란드어, 독일어 문장을 넣어 봤고, 프랑스어 '고양이 두 마리 사진'이 29.5%, 나머지는 0%가 나왔습니다.
+그런데 짚을 점이 하나 있어요. 노트북의 다국어 셀에서 모델을 새로 불러오는 부분이 주석 처리되어 있어서, 이 결과는 다국어 모델이 아니라 앞에서 불러온 영어 base 모델로 나온 겁니다.
+영어 모델인데도 프랑스어 문장을 어느 정도 맞힌 셈이에요.
+제대로 비교하려면 google/siglip-base-patch16-256-multilingual을 불러와서 다시 돌려야 하고, 한국어 질문도 이 모델로 실험해 보면 5주차에 바로 쓸 수 있습니다.</a:t>
             </a:r>
             <a:endParaRPr lang="en-US" dirty="0"/>
           </a:p>
@@ -2485,7 +2516,10 @@
           <a:p>
             <a:r>
               <a:rPr lang="en-US" dirty="0"/>
-              <a:t>세 줄로 정리하면 이렇습니다. SigLIP은 CLIP 구조에서 객관식을 O/X 퀴즈로, Softmax를 Sigmoid로 바꾼 모델이고, 그래서 배치 전체를 모을 필요가 사라져 효율과 성능이 좋아졌으며, 듀얼 인코더 구조라 사진을 미리 인덱싱하는 대규모 검색에 적합합니다.</a:t>
+              <a:t>마지막으로 Pipeline API입니다. 전처리, 모델 실행, 후처리를 한 번에 묶어 주는 방식이에요. zero-shot-image-classification 태스크로 만들고 후보 라벨만 주면 됩니다.
+결과는 '2 cats'가 0.1983, 리모컨과 비행기는 0이었습니다.
+앞에서 직접 계산한 32%와 값이 다른데, 문장 형식이 달라서 그렇습니다. 공식 문서에 따르면 pipeline은 라벨을 'This is a photo of 라벨.' 형식의 문장으로 바꿔서 넣기 때문에, 직접 계산과 같은 값을 얻으려면 같은 형식을 써야 합니다.
+이렇게 SigLIP 점수는 문장 표현에 따라 달라지니까, 5주차 검색에서도 질문 형식을 맞춰 주는 게 좋습니다. 그리고 사진에 리모컨이 실제로 있는데도 0이 나온 점은 같이 이야기해 보면 재미있을 것 같습니다.</a:t>
             </a:r>
             <a:endParaRPr lang="en-US" dirty="0"/>
           </a:p>
@@ -2573,7 +2607,11 @@
           <a:p>
             <a:r>
               <a:rPr lang="en-US" dirty="0"/>
-              <a:t>발표 후 함께 이야기해 볼 질문입니다. 1번과 2번은 각자 실습한 결과를 비교하면서 이야기하면 좋겠습니다. 둘 다 5주차 검색 데모를 만들 때 바로 부딪힐 문제입니다.</a:t>
+              <a:t>정리하겠습니다.
+첫째, SigLIP은 CLIP 구조에서 객관식을 O/X 퀴즈로, Softmax를 Sigmoid로 바꾼 모델입니다.
+둘째, 그 덕분에 배치 전체를 모을 필요가 없어져서 메모리가 줄고, 작은 배치와 노이즈에도 강해졌습니다.
+셋째, 듀얼 인코더와 공동 임베딩 공간 덕분에 사진은 미리 계산하고 질문만 그때그때 계산하는 대규모 검색에 잘 맞습니다.
+5주차에는 오늘 뽑은 임베딩을 벡터DB에 넣어서 실제로 텍스트로 이미지를 찾는 검색을 만들겠습니다.</a:t>
             </a:r>
             <a:endParaRPr lang="en-US" dirty="0"/>
           </a:p>
@@ -2661,7 +2699,7 @@
           <a:p>
             <a:r>
               <a:rPr lang="en-US" dirty="0"/>
-              <a:t>발표와 실습에 사용한 자료입니다. 실습 코드는 위 네 자료에서 가져왔고, 슬라이드에 출처를 표시했습니다.</a:t>
+              <a:t>참고한 자료와 실습 링크는 이 슬라이드에 정리해 두었습니다. 이상으로 발표를 마치겠습니다. 감사합니다.</a:t>
             </a:r>
             <a:endParaRPr lang="en-US" dirty="0"/>
           </a:p>
@@ -2685,94 +2723,6 @@
             <a:fld id="{F7021451-1387-4CA6-816F-3879F97B5CBC}" type="slidenum">
               <a:rPr lang="en-US"/>
               <a:t>24</a:t>
-            </a:fld>
-            <a:endParaRPr lang="en-US"/>
-          </a:p>
-        </p:txBody>
-      </p:sp>
-    </p:spTree>
-    <p:extLst>
-      <p:ext uri="{BB962C8B-B14F-4D97-AF65-F5344CB8AC3E}">
-        <p14:creationId xmlns:p14="http://schemas.microsoft.com/office/powerpoint/2010/main" val="1024086991"/>
-      </p:ext>
-    </p:extLst>
-  </p:cSld>
-  <p:clrMapOvr>
-    <a:masterClrMapping/>
-  </p:clrMapOvr>
-</p:notes>
-</file>
-
-<file path=ppt/notesSlides/notesSlide25.xml><?xml version="1.0" encoding="utf-8"?>
-<p:notes xmlns:a="http://schemas.openxmlformats.org/drawingml/2006/main" xmlns:r="http://schemas.openxmlformats.org/officeDocument/2006/relationships" xmlns:p="http://schemas.openxmlformats.org/presentationml/2006/main">
-  <p:cSld>
-    <p:spTree>
-      <p:nvGrpSpPr>
-        <p:cNvPr id="1" name=""/>
-        <p:cNvGrpSpPr/>
-        <p:nvPr/>
-      </p:nvGrpSpPr>
-      <p:grpSpPr>
-        <a:xfrm>
-          <a:off x="0" y="0"/>
-          <a:ext cx="0" cy="0"/>
-          <a:chOff x="0" y="0"/>
-          <a:chExt cx="0" cy="0"/>
-        </a:xfrm>
-      </p:grpSpPr>
-      <p:sp>
-        <p:nvSpPr>
-          <p:cNvPr id="2" name="Slide Image Placeholder 1"/>
-          <p:cNvSpPr>
-            <a:spLocks noGrp="1" noRot="1" noChangeAspect="1"/>
-          </p:cNvSpPr>
-          <p:nvPr>
-            <p:ph type="sldImg"/>
-          </p:nvPr>
-        </p:nvSpPr>
-        <p:spPr/>
-      </p:sp>
-      <p:sp>
-        <p:nvSpPr>
-          <p:cNvPr id="3" name="Notes Placeholder 2"/>
-          <p:cNvSpPr>
-            <a:spLocks noGrp="1"/>
-          </p:cNvSpPr>
-          <p:nvPr>
-            <p:ph type="body" idx="1"/>
-          </p:nvPr>
-        </p:nvSpPr>
-        <p:spPr/>
-        <p:txBody>
-          <a:bodyPr/>
-          <a:lstStyle/>
-          <a:p>
-            <a:r>
-              <a:rPr lang="en-US" dirty="0"/>
-              <a:t>질의응답 대비용 부록입니다. 하나 더: 캡션을 만들어 텍스트로 검색하는 방식과 비교하면, 캡션 생성 단계에서 정보가 빠지고 비용이 크지만 SigLIP은 사진 자체를 임베딩해 캡션에 없는 색·구도·분위기도 반영합니다. 6주차에 둘을 결합하는 것도 가능합니다.</a:t>
-            </a:r>
-            <a:endParaRPr lang="en-US" dirty="0"/>
-          </a:p>
-        </p:txBody>
-      </p:sp>
-      <p:sp>
-        <p:nvSpPr>
-          <p:cNvPr id="4" name="Slide Number Placeholder 3"/>
-          <p:cNvSpPr>
-            <a:spLocks noGrp="1"/>
-          </p:cNvSpPr>
-          <p:nvPr>
-            <p:ph type="sldNum" sz="quarter" idx="10"/>
-          </p:nvPr>
-        </p:nvSpPr>
-        <p:spPr/>
-        <p:txBody>
-          <a:bodyPr/>
-          <a:lstStyle/>
-          <a:p>
-            <a:fld id="{F7021451-1387-4CA6-816F-3879F97B5CBC}" type="slidenum">
-              <a:rPr lang="en-US"/>
-              <a:t>25</a:t>
             </a:fld>
             <a:endParaRPr lang="en-US"/>
           </a:p>
@@ -2837,7 +2787,10 @@
           <a:p>
             <a:r>
               <a:rPr lang="en-US" dirty="0"/>
-              <a:t>지금까지 RAG 파이프라인에서 임베딩 모델 칸은 텍스트 전용이었습니다. 이번 주는 그 칸을 이미지도 다루는 SigLIP으로 바꾸는 준비 단계입니다. 목표는 세 가지입니다. 구조와 학습 방식, 검색에 적합한 이유, 그리고 5주차에 그대로 이어 쓸 수 있는 임베딩 추출 코드입니다.</a:t>
+              <a:t>이번 주가 전체 흐름에서 어디쯤인지 짚고 가겠습니다.
+1주차부터 3주차까지는 텍스트 RAG를 만들었고, 5주차에는 텍스트로 이미지를 찾는 검색을 만듭니다.
+오늘은 그 사이에서 RAG 파이프라인의 '임베딩 모델' 칸을 이미지도 다룰 수 있는 모델로 바꾸는 준비를 합니다.
+목표는 세 가지입니다. SigLIP의 구조와 학습 방식, 이게 왜 검색에 잘 맞는지, 그리고 노트북을 직접 돌려서 결과를 확인하는 것입니다.</a:t>
             </a:r>
             <a:endParaRPr lang="en-US" dirty="0"/>
           </a:p>
@@ -2925,7 +2878,11 @@
           <a:p>
             <a:r>
               <a:rPr lang="en-US" dirty="0"/>
-              <a:t>1주차 텍스트 임베딩에서 의미가 비슷한 문장은 가까운 벡터였죠. 여기서는 사진과 문장이 같은 지도 위에 놓입니다. 이 거리를 코사인 유사도로 재기 때문에 문장 하나로 가장 가까운 사진을 찾을 수 있습니다. 참고로 이런 임베딩형 모델(CLIP, SigLIP)과 달리 LLaVA, PaliGemma 같은 생성형 VLM은 사진을 보고 글로 답하는데, 생성형 VLM 다수가 이미지를 읽는 '눈'으로 SigLIP을 씁니다. (그림은 개념 설명용 배치입니다.)</a:t>
+              <a:t>먼저 기본 개념인 공동 임베딩 공간입니다.
+1주차에 텍스트 임베딩을 배울 때 뜻이 비슷한 문장은 가까운 벡터가 된다고 했죠. 여기서는 그 공간에 사진도 같이 들어갑니다.
+고양이 사진과 'a photo of a cat'이라는 문장은 가까이, 고양이 사진과 'a rocket at night'은 멀리 놓이도록 만드는 거예요.
+거리는 1주차와 똑같이 코사인 유사도로 잽니다. 그래서 문장 하나를 벡터로 바꾸면 가장 가까운 사진을 찾을 수 있습니다.
+참고로, 이렇게 벡터를 만드는 모델 말고 사진을 보고 글로 대답하는 생성형 VLM도 있는데, 그런 모델들도 사진을 읽는 '눈'으로 SigLIP을 많이 씁니다.</a:t>
             </a:r>
             <a:endParaRPr lang="en-US" dirty="0"/>
           </a:p>
@@ -3013,7 +2970,11 @@
           <a:p>
             <a:r>
               <a:rPr lang="en-US" dirty="0"/>
-              <a:t>학습 재료는 웹에 있는 사진과 캡션 쌍입니다. 사람이 라벨을 달지 않고 원래 같이 있던 쌍을 그대로 씁니다. 배치 안에 사진 4장과 캡션 4개가 있으면 4x4 표가 생기고, 대각선은 진짜 짝, 나머지는 가짜 짝입니다. 진짜 짝은 유사도를 높이고 가짜 짝은 낮추도록 학습합니다. 가짜 짝의 수가 배치 크기의 제곱으로 늘어난다는 점은 뒤에서 다시 나옵니다.</a:t>
+              <a:t>그럼 이런 공간을 어떻게 학습할까요? 대조학습을 씁니다.
+재료는 웹에서 모은 사진과 캡션 쌍인데, 사람이 따로 라벨을 붙이지 않고 원래 같이 있던 쌍을 그대로 씁니다.
+학습할 때는 사진 여러 장과 캡션 여러 개를 한 배치로 묶어서 표를 만듭니다. 사진 4장, 캡션 4개면 4×4 표가 되고, 대각선의 초록 칸이 진짜 짝, 나머지 빨간 칸이 가짜 짝입니다.
+진짜 짝은 유사도를 높이고 가짜 짝은 낮추도록 학습해요.
+하나 기억해 주실 게 있는데, 배치가 B개면 진짜 짝은 B개지만 가짜 짝은 B제곱 빼기 B개라서, 배치가 커질수록 가짜 짝이 훨씬 빠르게 늘어납니다. 이건 뒤에서 다시 나옵니다.</a:t>
             </a:r>
             <a:endParaRPr lang="en-US" dirty="0"/>
           </a:p>
@@ -3101,7 +3062,10 @@
           <a:p>
             <a:r>
               <a:rPr lang="en-US" dirty="0"/>
-              <a:t>CLIP의 학습 방식은 객관식 문제와 같습니다. 사진 하나를 주고 배치 안의 캡션 B개 중 정답을 고르게 합니다. Softmax를 쓰기 때문에 확률의 합이 항상 1이고 보기들이 확률을 나눠 가집니다. 실제 CLIP은 보기가 32,000개쯤 되는 큰 객관식이고, 이미지→텍스트, 텍스트→이미지 두 방향으로 이 문제를 풉니다. 막대 값은 개념 설명용 예시입니다.</a:t>
+              <a:t>같은 대조학습이라도 CLIP과 SigLIP은 채점 방식이 다릅니다.
+CLIP은 객관식 문제처럼 학습합니다. 고양이 사진을 하나 주고, 배치 안의 캡션들을 보기로 줘서 '이 중에 정답이 뭐야?'라고 묻는 거예요.
+Softmax를 쓰기 때문에 확률을 다 더하면 항상 1이 되고, 보기들이 확률을 나눠 가집니다.
+화면의 숫자는 이해를 돕기 위한 예시이고, 실제 CLIP은 보기가 3만 2천 개쯤 되는 아주 큰 객관식을 이미지 쪽, 텍스트 쪽 두 방향으로 풉니다.</a:t>
             </a:r>
             <a:endParaRPr lang="en-US" dirty="0"/>
           </a:p>
@@ -3189,7 +3153,10 @@
           <a:p>
             <a:r>
               <a:rPr lang="en-US" dirty="0"/>
-              <a:t>CLIP 손실을 말로 풀면 '정답 점수를 배치 전체 점수의 합으로 나눈 값'입니다. 문제는 분모입니다. 칸 하나의 확률을 계산하려 해도 같은 줄의 모든 보기가 필요합니다. 그래서 GPU 여러 대로 학습할 때 모든 임베딩을 한곳에 모아야 하고, 보기를 충분히 주려면 배치가 아주 커야 하며, 메모리와 통신 비용이 커집니다. 정확한 수식은 L = −(1/2B) Σᵢ [log softmax(이미지→텍스트) + log softmax(텍스트→이미지)] 입니다.</a:t>
+              <a:t>이 객관식 방식에는 약점이 있습니다.
+손실을 말로 풀면 '정답 점수를 배치 전체 점수의 합으로 나눈 값'인데, 문제는 이 분모예요. 칸 하나를 계산하려 해도 배치 전체가 필요합니다.
+그래서 첫째, GPU 여러 대로 나눠 학습해도 모든 임베딩을 한곳에 모아 큰 표를 만들어야 합니다.
+둘째, 보기가 많아야 잘 배우기 때문에 배치를 아주 크게 잡아야 하고, 셋째, 그만큼 메모리와 통신 부담이 커집니다.</a:t>
             </a:r>
             <a:endParaRPr lang="en-US" dirty="0"/>
           </a:p>
@@ -3277,7 +3244,10 @@
           <a:p>
             <a:r>
               <a:rPr lang="en-US" dirty="0"/>
-              <a:t>SigLIP은 Google DeepMind가 2023년 ICCV에 발표한 모델입니다. 아이디어는 하나, 객관식을 O/X 퀴즈로 바꾼 것입니다. 캡션 하나하나에 대해 '이 사진과 짝인가?'를 따로 판정하고 각각 0~1 확률을 냅니다. 나눠 가지지 않으니 합이 1일 필요가 없습니다. 모델 구조는 CLIP과 거의 같고 손실만 바꿨는데 효율과 성능이 좋아졌다는 게 논문의 메시지입니다. 막대 값은 개념 설명용 예시입니다.</a:t>
+              <a:t>SigLIP은 이 문제를 아주 단순하게 풉니다. 객관식을 O/X 퀴즈로 바꾼 거예요.
+캡션 하나하나에 대해 '이 사진이랑 짝이야, 아니야?'를 따로 판정합니다. 그래서 각 캡션이 0에서 1 사이 확률을 따로 갖고, 다 더해도 1일 필요가 없습니다.
+2023년에 Google DeepMind가 ICCV에 발표한 논문인데, 재미있는 건 모델 구조는 CLIP과 거의 같고 손실 함수만 바꿨다는 점이에요.
+그런데도 효율과 성능이 좋아졌다는 게 이 논문의 핵심 메시지입니다. 여기 숫자도 예시입니다.</a:t>
             </a:r>
             <a:endParaRPr lang="en-US" dirty="0"/>
           </a:p>
@@ -3365,7 +3335,10 @@
           <a:p>
             <a:r>
               <a:rPr lang="en-US" dirty="0"/>
-              <a:t>구조는 탑 두 개로 된 듀얼 인코더입니다. 사진은 ViT 이미지 인코더로, 문장은 Transformer 텍스트 인코더로 각각 벡터를 만들고, 같은 차원으로 투영해 L2 정규화한 뒤 유사도를 계산합니다. 여기에 온도 t와 바이어스 b를 적용해 Sigmoid로 짝일 확률을 냅니다. 두 탑이 분리되어 있어서 사진만 따로 미리 계산해 둘 수 있다는 점이 검색과 연결됩니다. 텍스트 인코더는 최대 64토큰을 받습니다.</a:t>
+              <a:t>구조를 보겠습니다. SigLIP은 탑 두 개로 된 듀얼 인코더입니다.
+사진은 ViT라는 이미지 인코더로, 문장은 Transformer 텍스트 인코더로 각각 벡터를 만들어요.
+두 벡터를 같은 차원으로 맞추고 정규화한 다음 유사도를 계산하고, 여기에 온도 t와 바이어스 b를 적용해서 Sigmoid로 짝일 확률을 냅니다.
+중요한 건 두 인코더가 완전히 분리되어 있다는 점입니다. 사진은 사진대로, 문장은 문장대로 따로 계산할 수 있어서, 나중에 검색할 때 사진을 미리 계산해 둘 수 있습니다.</a:t>
             </a:r>
             <a:endParaRPr lang="en-US" dirty="0"/>
           </a:p>
@@ -11418,7 +11391,7 @@
                   <a:schemeClr val="tx2"/>
                 </a:solidFill>
               </a:rPr>
-              <a:t>이름을 클릭하면 링크로 이동 · 다음 슬라이드의 코드는 이 자료들에서 가져왔음</a:t>
+              <a:t>이름을 클릭하면 링크로 이동 · 다음 슬라이드부터는 메인 노트북을 직접 실행한 코드와 결과</a:t>
             </a:r>
             <a:endParaRPr lang="en-US" sz="1200" dirty="0"/>
           </a:p>
@@ -11526,7 +11499,7 @@
                   <a:schemeClr val="tx1"/>
                 </a:solidFill>
               </a:rPr>
-              <a:t>실습 ① 이미지·텍스트 임베딩 뽑기 (공식 예제)</a:t>
+              <a:t>실습 ① 모델 불러오기</a:t>
             </a:r>
             <a:endParaRPr lang="en-US" sz="3000" dirty="0"/>
           </a:p>
@@ -11540,12 +11513,12 @@
         </p:nvSpPr>
         <p:spPr>
           <a:xfrm>
-            <a:off x="640080" y="1280160"/>
-            <a:ext cx="7498080" cy="4663440"/>
+            <a:off x="640080" y="1325880"/>
+            <a:ext cx="7498080" cy="2103120"/>
           </a:xfrm>
           <a:prstGeom prst="roundRect">
             <a:avLst>
-              <a:gd name="adj" fmla="val 2353"/>
+              <a:gd name="adj" fmla="val 5217"/>
             </a:avLst>
           </a:prstGeom>
           <a:solidFill>
@@ -11562,8 +11535,8 @@
         </p:nvSpPr>
         <p:spPr>
           <a:xfrm>
-            <a:off x="914400" y="1508760"/>
-            <a:ext cx="6949440" cy="4206240"/>
+            <a:off x="914400" y="1554480"/>
+            <a:ext cx="6949440" cy="1645920"/>
           </a:xfrm>
           <a:prstGeom prst="rect">
             <a:avLst/>
@@ -11582,7 +11555,7 @@
               <a:buNone/>
             </a:pPr>
             <a:r>
-              <a:rPr lang="en-US" sz="1300" dirty="0">
+              <a:rPr lang="en-US" sz="1200" dirty="0">
                 <a:solidFill>
                   <a:schemeClr val="bg1"/>
                 </a:solidFill>
@@ -11590,9 +11563,9 @@
                 <a:ea typeface="Courier New" pitchFamily="34" charset="-122"/>
                 <a:cs typeface="Courier New" pitchFamily="34" charset="-120"/>
               </a:rPr>
-              <a:t>import torch</a:t>
-            </a:r>
-            <a:endParaRPr lang="en-US" sz="1300" dirty="0"/>
+              <a:t>from transformers import AutoProcessor, AutoModel</a:t>
+            </a:r>
+            <a:endParaRPr lang="en-US" sz="1200" dirty="0"/>
           </a:p>
           <a:p>
             <a:pPr indent="0" marL="0">
@@ -11602,7 +11575,7 @@
               <a:buNone/>
             </a:pPr>
             <a:r>
-              <a:rPr lang="en-US" sz="1300" dirty="0">
+              <a:rPr lang="en-US" sz="1200" dirty="0">
                 <a:solidFill>
                   <a:schemeClr val="bg1"/>
                 </a:solidFill>
@@ -11610,9 +11583,9 @@
                 <a:ea typeface="Courier New" pitchFamily="34" charset="-122"/>
                 <a:cs typeface="Courier New" pitchFamily="34" charset="-120"/>
               </a:rPr>
-              <a:t>from transformers import AutoProcessor, AutoModel</a:t>
-            </a:r>
-            <a:endParaRPr lang="en-US" sz="1300" dirty="0"/>
+              <a:t> </a:t>
+            </a:r>
+            <a:endParaRPr lang="en-US" sz="1200" dirty="0"/>
           </a:p>
           <a:p>
             <a:pPr indent="0" marL="0">
@@ -11622,7 +11595,7 @@
               <a:buNone/>
             </a:pPr>
             <a:r>
-              <a:rPr lang="en-US" sz="1300" dirty="0">
+              <a:rPr lang="en-US" sz="1200" dirty="0">
                 <a:solidFill>
                   <a:schemeClr val="bg1"/>
                 </a:solidFill>
@@ -11630,9 +11603,9 @@
                 <a:ea typeface="Courier New" pitchFamily="34" charset="-122"/>
                 <a:cs typeface="Courier New" pitchFamily="34" charset="-120"/>
               </a:rPr>
-              <a:t>from transformers.image_utils import load_image</a:t>
-            </a:r>
-            <a:endParaRPr lang="en-US" sz="1300" dirty="0"/>
+              <a:t>processor = AutoProcessor.from_pretrained("google/siglip-base-patch16-224")</a:t>
+            </a:r>
+            <a:endParaRPr lang="en-US" sz="1200" dirty="0"/>
           </a:p>
           <a:p>
             <a:pPr indent="0" marL="0">
@@ -11642,7 +11615,7 @@
               <a:buNone/>
             </a:pPr>
             <a:r>
-              <a:rPr lang="en-US" sz="1300" dirty="0">
+              <a:rPr lang="en-US" sz="1200" dirty="0">
                 <a:solidFill>
                   <a:schemeClr val="bg1"/>
                 </a:solidFill>
@@ -11650,321 +11623,60 @@
                 <a:ea typeface="Courier New" pitchFamily="34" charset="-122"/>
                 <a:cs typeface="Courier New" pitchFamily="34" charset="-120"/>
               </a:rPr>
-              <a:t> </a:t>
-            </a:r>
-            <a:endParaRPr lang="en-US" sz="1300" dirty="0"/>
-          </a:p>
-          <a:p>
-            <a:pPr indent="0" marL="0">
-              <a:lnSpc>
-                <a:spcPct val="110000"/>
-              </a:lnSpc>
-              <a:buNone/>
-            </a:pPr>
-            <a:r>
-              <a:rPr lang="en-US" sz="1300" dirty="0">
-                <a:solidFill>
-                  <a:schemeClr val="bg1"/>
+              <a:t>model = AutoModel.from_pretrained("google/siglip-base-patch16-224")</a:t>
+            </a:r>
+            <a:endParaRPr lang="en-US" sz="1200" dirty="0"/>
+          </a:p>
+        </p:txBody>
+      </p:sp>
+      <p:sp>
+        <p:nvSpPr>
+          <p:cNvPr id="5" name="text-368"/>
+          <p:cNvSpPr txBox="1"/>
+          <p:nvPr/>
+        </p:nvSpPr>
+        <p:spPr>
+          <a:xfrm>
+            <a:off x="640080" y="3520440"/>
+            <a:ext cx="7498080" cy="320040"/>
+          </a:xfrm>
+          <a:prstGeom prst="rect">
+            <a:avLst/>
+          </a:prstGeom>
+          <a:noFill/>
+          <a:ln/>
+        </p:spPr>
+        <p:txBody>
+          <a:bodyPr wrap="square" lIns="0" tIns="0" rIns="0" bIns="0" rtlCol="0" anchor="t"/>
+          <a:lstStyle/>
+          <a:p>
+            <a:pPr indent="0" marL="0">
+              <a:buNone/>
+            </a:pPr>
+            <a:r>
+              <a:rPr lang="en-US" sz="1100" dirty="0">
+                <a:solidFill>
+                  <a:schemeClr val="tx2"/>
                 </a:solidFill>
                 <a:latin typeface="Courier New" pitchFamily="34" charset="0"/>
                 <a:ea typeface="Courier New" pitchFamily="34" charset="-122"/>
                 <a:cs typeface="Courier New" pitchFamily="34" charset="-120"/>
               </a:rPr>
-              <a:t>ckpt = "google/siglip-base-patch16-224"</a:t>
-            </a:r>
-            <a:endParaRPr lang="en-US" sz="1300" dirty="0"/>
-          </a:p>
-          <a:p>
-            <a:pPr indent="0" marL="0">
-              <a:lnSpc>
-                <a:spcPct val="110000"/>
-              </a:lnSpc>
-              <a:buNone/>
-            </a:pPr>
-            <a:r>
-              <a:rPr lang="en-US" sz="1300" dirty="0">
-                <a:solidFill>
-                  <a:schemeClr val="bg1"/>
-                </a:solidFill>
-                <a:latin typeface="Courier New" pitchFamily="34" charset="0"/>
-                <a:ea typeface="Courier New" pitchFamily="34" charset="-122"/>
-                <a:cs typeface="Courier New" pitchFamily="34" charset="-120"/>
-              </a:rPr>
-              <a:t>model = AutoModel.from_pretrained(ckpt)</a:t>
-            </a:r>
-            <a:endParaRPr lang="en-US" sz="1300" dirty="0"/>
-          </a:p>
-          <a:p>
-            <a:pPr indent="0" marL="0">
-              <a:lnSpc>
-                <a:spcPct val="110000"/>
-              </a:lnSpc>
-              <a:buNone/>
-            </a:pPr>
-            <a:r>
-              <a:rPr lang="en-US" sz="1300" dirty="0">
-                <a:solidFill>
-                  <a:schemeClr val="bg1"/>
-                </a:solidFill>
-                <a:latin typeface="Courier New" pitchFamily="34" charset="0"/>
-                <a:ea typeface="Courier New" pitchFamily="34" charset="-122"/>
-                <a:cs typeface="Courier New" pitchFamily="34" charset="-120"/>
-              </a:rPr>
-              <a:t>processor = AutoProcessor.from_pretrained(ckpt)</a:t>
-            </a:r>
-            <a:endParaRPr lang="en-US" sz="1300" dirty="0"/>
-          </a:p>
-          <a:p>
-            <a:pPr indent="0" marL="0">
-              <a:lnSpc>
-                <a:spcPct val="110000"/>
-              </a:lnSpc>
-              <a:buNone/>
-            </a:pPr>
-            <a:r>
-              <a:rPr lang="en-US" sz="1300" dirty="0">
-                <a:solidFill>
-                  <a:schemeClr val="bg1"/>
-                </a:solidFill>
-                <a:latin typeface="Courier New" pitchFamily="34" charset="0"/>
-                <a:ea typeface="Courier New" pitchFamily="34" charset="-122"/>
-                <a:cs typeface="Courier New" pitchFamily="34" charset="-120"/>
-              </a:rPr>
-              <a:t> </a:t>
-            </a:r>
-            <a:endParaRPr lang="en-US" sz="1300" dirty="0"/>
-          </a:p>
-          <a:p>
-            <a:pPr indent="0" marL="0">
-              <a:lnSpc>
-                <a:spcPct val="110000"/>
-              </a:lnSpc>
-              <a:buNone/>
-            </a:pPr>
-            <a:r>
-              <a:rPr lang="en-US" sz="1300" dirty="0">
-                <a:solidFill>
-                  <a:schemeClr val="bg1"/>
-                </a:solidFill>
-                <a:latin typeface="Courier New" pitchFamily="34" charset="0"/>
-                <a:ea typeface="Courier New" pitchFamily="34" charset="-122"/>
-                <a:cs typeface="Courier New" pitchFamily="34" charset="-120"/>
-              </a:rPr>
-              <a:t>url = "http://images.cocodataset.org/val2017/000000039769.jpg"</a:t>
-            </a:r>
-            <a:endParaRPr lang="en-US" sz="1300" dirty="0"/>
-          </a:p>
-          <a:p>
-            <a:pPr indent="0" marL="0">
-              <a:lnSpc>
-                <a:spcPct val="110000"/>
-              </a:lnSpc>
-              <a:buNone/>
-            </a:pPr>
-            <a:r>
-              <a:rPr lang="en-US" sz="1300" dirty="0">
-                <a:solidFill>
-                  <a:schemeClr val="bg1"/>
-                </a:solidFill>
-                <a:latin typeface="Courier New" pitchFamily="34" charset="0"/>
-                <a:ea typeface="Courier New" pitchFamily="34" charset="-122"/>
-                <a:cs typeface="Courier New" pitchFamily="34" charset="-120"/>
-              </a:rPr>
-              <a:t>image = load_image(url)</a:t>
-            </a:r>
-            <a:endParaRPr lang="en-US" sz="1300" dirty="0"/>
-          </a:p>
-          <a:p>
-            <a:pPr indent="0" marL="0">
-              <a:lnSpc>
-                <a:spcPct val="110000"/>
-              </a:lnSpc>
-              <a:buNone/>
-            </a:pPr>
-            <a:r>
-              <a:rPr lang="en-US" sz="1300" dirty="0">
-                <a:solidFill>
-                  <a:schemeClr val="bg1"/>
-                </a:solidFill>
-                <a:latin typeface="Courier New" pitchFamily="34" charset="0"/>
-                <a:ea typeface="Courier New" pitchFamily="34" charset="-122"/>
-                <a:cs typeface="Courier New" pitchFamily="34" charset="-120"/>
-              </a:rPr>
-              <a:t>inputs = processor(images=image, return_tensors="pt")</a:t>
-            </a:r>
-            <a:endParaRPr lang="en-US" sz="1300" dirty="0"/>
-          </a:p>
-          <a:p>
-            <a:pPr indent="0" marL="0">
-              <a:lnSpc>
-                <a:spcPct val="110000"/>
-              </a:lnSpc>
-              <a:buNone/>
-            </a:pPr>
-            <a:r>
-              <a:rPr lang="en-US" sz="1300" dirty="0">
-                <a:solidFill>
-                  <a:schemeClr val="bg1"/>
-                </a:solidFill>
-                <a:latin typeface="Courier New" pitchFamily="34" charset="0"/>
-                <a:ea typeface="Courier New" pitchFamily="34" charset="-122"/>
-                <a:cs typeface="Courier New" pitchFamily="34" charset="-120"/>
-              </a:rPr>
-              <a:t>with torch.no_grad():</a:t>
-            </a:r>
-            <a:endParaRPr lang="en-US" sz="1300" dirty="0"/>
-          </a:p>
-          <a:p>
-            <a:pPr indent="0" marL="0">
-              <a:lnSpc>
-                <a:spcPct val="110000"/>
-              </a:lnSpc>
-              <a:buNone/>
-            </a:pPr>
-            <a:r>
-              <a:rPr lang="en-US" sz="1300" dirty="0">
-                <a:solidFill>
-                  <a:schemeClr val="bg1"/>
-                </a:solidFill>
-                <a:latin typeface="Courier New" pitchFamily="34" charset="0"/>
-                <a:ea typeface="Courier New" pitchFamily="34" charset="-122"/>
-                <a:cs typeface="Courier New" pitchFamily="34" charset="-120"/>
-              </a:rPr>
-              <a:t>    image_features = model.get_image_features(**inputs)</a:t>
-            </a:r>
-            <a:endParaRPr lang="en-US" sz="1300" dirty="0"/>
-          </a:p>
-          <a:p>
-            <a:pPr indent="0" marL="0">
-              <a:lnSpc>
-                <a:spcPct val="110000"/>
-              </a:lnSpc>
-              <a:buNone/>
-            </a:pPr>
-            <a:r>
-              <a:rPr lang="en-US" sz="1300" dirty="0">
-                <a:solidFill>
-                  <a:schemeClr val="bg1"/>
-                </a:solidFill>
-                <a:latin typeface="Courier New" pitchFamily="34" charset="0"/>
-                <a:ea typeface="Courier New" pitchFamily="34" charset="-122"/>
-                <a:cs typeface="Courier New" pitchFamily="34" charset="-120"/>
-              </a:rPr>
-              <a:t> </a:t>
-            </a:r>
-            <a:endParaRPr lang="en-US" sz="1300" dirty="0"/>
-          </a:p>
-          <a:p>
-            <a:pPr indent="0" marL="0">
-              <a:lnSpc>
-                <a:spcPct val="110000"/>
-              </a:lnSpc>
-              <a:buNone/>
-            </a:pPr>
-            <a:r>
-              <a:rPr lang="en-US" sz="1300" dirty="0">
-                <a:solidFill>
-                  <a:srgbClr val="FBBF24"/>
-                </a:solidFill>
-                <a:latin typeface="Courier New" pitchFamily="34" charset="0"/>
-                <a:ea typeface="Courier New" pitchFamily="34" charset="-122"/>
-                <a:cs typeface="Courier New" pitchFamily="34" charset="-120"/>
-              </a:rPr>
-              <a:t># important: padding="max_length" (학습 때와 동일하게)</a:t>
-            </a:r>
-            <a:endParaRPr lang="en-US" sz="1300" dirty="0"/>
-          </a:p>
-          <a:p>
-            <a:pPr indent="0" marL="0">
-              <a:lnSpc>
-                <a:spcPct val="110000"/>
-              </a:lnSpc>
-              <a:buNone/>
-            </a:pPr>
-            <a:r>
-              <a:rPr lang="en-US" sz="1300" dirty="0">
-                <a:solidFill>
-                  <a:schemeClr val="bg1"/>
-                </a:solidFill>
-                <a:latin typeface="Courier New" pitchFamily="34" charset="0"/>
-                <a:ea typeface="Courier New" pitchFamily="34" charset="-122"/>
-                <a:cs typeface="Courier New" pitchFamily="34" charset="-120"/>
-              </a:rPr>
-              <a:t>inputs = processor(text=["a photo of a cat", "a photo of a dog"],</a:t>
-            </a:r>
-            <a:endParaRPr lang="en-US" sz="1300" dirty="0"/>
-          </a:p>
-          <a:p>
-            <a:pPr indent="0" marL="0">
-              <a:lnSpc>
-                <a:spcPct val="110000"/>
-              </a:lnSpc>
-              <a:buNone/>
-            </a:pPr>
-            <a:r>
-              <a:rPr lang="en-US" sz="1300" dirty="0">
-                <a:solidFill>
-                  <a:schemeClr val="bg1"/>
-                </a:solidFill>
-                <a:latin typeface="Courier New" pitchFamily="34" charset="0"/>
-                <a:ea typeface="Courier New" pitchFamily="34" charset="-122"/>
-                <a:cs typeface="Courier New" pitchFamily="34" charset="-120"/>
-              </a:rPr>
-              <a:t>                   padding="max_length", return_tensors="pt")</a:t>
-            </a:r>
-            <a:endParaRPr lang="en-US" sz="1300" dirty="0"/>
-          </a:p>
-          <a:p>
-            <a:pPr indent="0" marL="0">
-              <a:lnSpc>
-                <a:spcPct val="110000"/>
-              </a:lnSpc>
-              <a:buNone/>
-            </a:pPr>
-            <a:r>
-              <a:rPr lang="en-US" sz="1300" dirty="0">
-                <a:solidFill>
-                  <a:schemeClr val="bg1"/>
-                </a:solidFill>
-                <a:latin typeface="Courier New" pitchFamily="34" charset="0"/>
-                <a:ea typeface="Courier New" pitchFamily="34" charset="-122"/>
-                <a:cs typeface="Courier New" pitchFamily="34" charset="-120"/>
-              </a:rPr>
-              <a:t>with torch.no_grad():</a:t>
-            </a:r>
-            <a:endParaRPr lang="en-US" sz="1300" dirty="0"/>
-          </a:p>
-          <a:p>
-            <a:pPr indent="0" marL="0">
-              <a:lnSpc>
-                <a:spcPct val="110000"/>
-              </a:lnSpc>
-              <a:buNone/>
-            </a:pPr>
-            <a:r>
-              <a:rPr lang="en-US" sz="1300" dirty="0">
-                <a:solidFill>
-                  <a:schemeClr val="bg1"/>
-                </a:solidFill>
-                <a:latin typeface="Courier New" pitchFamily="34" charset="0"/>
-                <a:ea typeface="Courier New" pitchFamily="34" charset="-122"/>
-                <a:cs typeface="Courier New" pitchFamily="34" charset="-120"/>
-              </a:rPr>
-              <a:t>    text_features = model.get_text_features(**inputs)</a:t>
-            </a:r>
-            <a:endParaRPr lang="en-US" sz="1300" dirty="0"/>
-          </a:p>
-        </p:txBody>
-      </p:sp>
-      <p:sp>
-        <p:nvSpPr>
-          <p:cNvPr id="5" name="text-368"/>
+              <a:t>설치: !pip install --upgrade -q git+https://github.com/huggingface/transformers sentencepiece</a:t>
+            </a:r>
+            <a:endParaRPr lang="en-US" sz="1100" dirty="0"/>
+          </a:p>
+        </p:txBody>
+      </p:sp>
+      <p:sp>
+        <p:nvSpPr>
+          <p:cNvPr id="6" name="text-369"/>
           <p:cNvSpPr txBox="1"/>
           <p:nvPr/>
         </p:nvSpPr>
         <p:spPr>
           <a:xfrm>
-            <a:off x="640080" y="5989320"/>
+            <a:off x="640080" y="3931920"/>
             <a:ext cx="7315200" cy="292608"/>
           </a:xfrm>
           <a:prstGeom prst="rect">
@@ -12001,7 +11713,7 @@
                   </a:extLst>
                 </a:hlinkClick>
               </a:rPr>
-              <a:t>Transformers SiglipModel 공식 예제 (get_text_features는 processor로 통일)</a:t>
+              <a:t>Inference with (multilingual) SigLIP 노트북 · 직접 실행 (base-patch16-224)</a:t>
             </a:r>
             <a:endParaRPr lang="en-US" sz="1100" dirty="0"/>
           </a:p>
@@ -12009,14 +11721,212 @@
       </p:sp>
       <p:sp>
         <p:nvSpPr>
-          <p:cNvPr id="6" name="card-369"/>
+          <p:cNvPr id="7" name="card-370"/>
           <p:cNvSpPr/>
           <p:nvPr/>
         </p:nvSpPr>
         <p:spPr>
           <a:xfrm>
-            <a:off x="8412480" y="1280160"/>
-            <a:ext cx="3108960" cy="4663440"/>
+            <a:off x="640080" y="4663440"/>
+            <a:ext cx="3566160" cy="1371600"/>
+          </a:xfrm>
+          <a:prstGeom prst="roundRect">
+            <a:avLst>
+              <a:gd name="adj" fmla="val 9333"/>
+            </a:avLst>
+          </a:prstGeom>
+          <a:solidFill>
+            <a:schemeClr val="accent1">
+              <a:alpha val="10000"/>
+            </a:schemeClr>
+          </a:solidFill>
+          <a:ln/>
+        </p:spPr>
+      </p:sp>
+      <p:sp>
+        <p:nvSpPr>
+          <p:cNvPr id="8" name="text-371"/>
+          <p:cNvSpPr txBox="1"/>
+          <p:nvPr/>
+        </p:nvSpPr>
+        <p:spPr>
+          <a:xfrm>
+            <a:off x="868680" y="4800600"/>
+            <a:ext cx="3200400" cy="411480"/>
+          </a:xfrm>
+          <a:prstGeom prst="rect">
+            <a:avLst/>
+          </a:prstGeom>
+          <a:noFill/>
+          <a:ln/>
+        </p:spPr>
+        <p:txBody>
+          <a:bodyPr wrap="square" lIns="0" tIns="0" rIns="0" bIns="0" rtlCol="0" anchor="t"/>
+          <a:lstStyle/>
+          <a:p>
+            <a:pPr indent="0" marL="0">
+              <a:buNone/>
+            </a:pPr>
+            <a:r>
+              <a:rPr lang="en-US" sz="1600" b="1" dirty="0">
+                <a:solidFill>
+                  <a:schemeClr val="accent1"/>
+                </a:solidFill>
+                <a:latin typeface="Courier New" pitchFamily="34" charset="0"/>
+                <a:ea typeface="Courier New" pitchFamily="34" charset="-122"/>
+                <a:cs typeface="Courier New" pitchFamily="34" charset="-120"/>
+              </a:rPr>
+              <a:t>AutoProcessor</a:t>
+            </a:r>
+            <a:endParaRPr lang="en-US" sz="1600" dirty="0"/>
+          </a:p>
+        </p:txBody>
+      </p:sp>
+      <p:sp>
+        <p:nvSpPr>
+          <p:cNvPr id="9" name="text-372"/>
+          <p:cNvSpPr txBox="1"/>
+          <p:nvPr/>
+        </p:nvSpPr>
+        <p:spPr>
+          <a:xfrm>
+            <a:off x="868680" y="5257800"/>
+            <a:ext cx="3200400" cy="640080"/>
+          </a:xfrm>
+          <a:prstGeom prst="rect">
+            <a:avLst/>
+          </a:prstGeom>
+          <a:noFill/>
+          <a:ln/>
+        </p:spPr>
+        <p:txBody>
+          <a:bodyPr wrap="square" lIns="0" tIns="0" rIns="0" bIns="0" rtlCol="0" anchor="t"/>
+          <a:lstStyle/>
+          <a:p>
+            <a:pPr indent="0" marL="0">
+              <a:buNone/>
+            </a:pPr>
+            <a:r>
+              <a:rPr lang="en-US" sz="1500" dirty="0">
+                <a:solidFill>
+                  <a:schemeClr val="tx1"/>
+                </a:solidFill>
+              </a:rPr>
+              <a:t>사진 크기 조절 + 문장 토큰화를 한 번에</a:t>
+            </a:r>
+            <a:endParaRPr lang="en-US" sz="1500" dirty="0"/>
+          </a:p>
+        </p:txBody>
+      </p:sp>
+      <p:sp>
+        <p:nvSpPr>
+          <p:cNvPr id="10" name="card-373"/>
+          <p:cNvSpPr/>
+          <p:nvPr/>
+        </p:nvSpPr>
+        <p:spPr>
+          <a:xfrm>
+            <a:off x="4572000" y="4663440"/>
+            <a:ext cx="3566160" cy="1371600"/>
+          </a:xfrm>
+          <a:prstGeom prst="roundRect">
+            <a:avLst>
+              <a:gd name="adj" fmla="val 9333"/>
+            </a:avLst>
+          </a:prstGeom>
+          <a:solidFill>
+            <a:schemeClr val="accent3">
+              <a:alpha val="10000"/>
+            </a:schemeClr>
+          </a:solidFill>
+          <a:ln/>
+        </p:spPr>
+      </p:sp>
+      <p:sp>
+        <p:nvSpPr>
+          <p:cNvPr id="11" name="text-374"/>
+          <p:cNvSpPr txBox="1"/>
+          <p:nvPr/>
+        </p:nvSpPr>
+        <p:spPr>
+          <a:xfrm>
+            <a:off x="4800600" y="4800600"/>
+            <a:ext cx="3200400" cy="411480"/>
+          </a:xfrm>
+          <a:prstGeom prst="rect">
+            <a:avLst/>
+          </a:prstGeom>
+          <a:noFill/>
+          <a:ln/>
+        </p:spPr>
+        <p:txBody>
+          <a:bodyPr wrap="square" lIns="0" tIns="0" rIns="0" bIns="0" rtlCol="0" anchor="t"/>
+          <a:lstStyle/>
+          <a:p>
+            <a:pPr indent="0" marL="0">
+              <a:buNone/>
+            </a:pPr>
+            <a:r>
+              <a:rPr lang="en-US" sz="1600" b="1" dirty="0">
+                <a:solidFill>
+                  <a:schemeClr val="accent3"/>
+                </a:solidFill>
+                <a:latin typeface="Courier New" pitchFamily="34" charset="0"/>
+                <a:ea typeface="Courier New" pitchFamily="34" charset="-122"/>
+                <a:cs typeface="Courier New" pitchFamily="34" charset="-120"/>
+              </a:rPr>
+              <a:t>AutoModel</a:t>
+            </a:r>
+            <a:endParaRPr lang="en-US" sz="1600" dirty="0"/>
+          </a:p>
+        </p:txBody>
+      </p:sp>
+      <p:sp>
+        <p:nvSpPr>
+          <p:cNvPr id="12" name="text-375"/>
+          <p:cNvSpPr txBox="1"/>
+          <p:nvPr/>
+        </p:nvSpPr>
+        <p:spPr>
+          <a:xfrm>
+            <a:off x="4800600" y="5257800"/>
+            <a:ext cx="3200400" cy="640080"/>
+          </a:xfrm>
+          <a:prstGeom prst="rect">
+            <a:avLst/>
+          </a:prstGeom>
+          <a:noFill/>
+          <a:ln/>
+        </p:spPr>
+        <p:txBody>
+          <a:bodyPr wrap="square" lIns="0" tIns="0" rIns="0" bIns="0" rtlCol="0" anchor="t"/>
+          <a:lstStyle/>
+          <a:p>
+            <a:pPr indent="0" marL="0">
+              <a:buNone/>
+            </a:pPr>
+            <a:r>
+              <a:rPr lang="en-US" sz="1500" dirty="0">
+                <a:solidFill>
+                  <a:schemeClr val="tx1"/>
+                </a:solidFill>
+              </a:rPr>
+              <a:t>이미지 인코더 + 텍스트 인코더 (두 탑)</a:t>
+            </a:r>
+            <a:endParaRPr lang="en-US" sz="1500" dirty="0"/>
+          </a:p>
+        </p:txBody>
+      </p:sp>
+      <p:sp>
+        <p:nvSpPr>
+          <p:cNvPr id="13" name="card-376"/>
+          <p:cNvSpPr/>
+          <p:nvPr/>
+        </p:nvSpPr>
+        <p:spPr>
+          <a:xfrm>
+            <a:off x="8412480" y="1325880"/>
+            <a:ext cx="3108960" cy="4709160"/>
           </a:xfrm>
           <a:prstGeom prst="roundRect">
             <a:avLst>
@@ -12024,103 +11934,57 @@
             </a:avLst>
           </a:prstGeom>
           <a:solidFill>
-            <a:schemeClr val="accent4">
-              <a:alpha val="8000"/>
-            </a:schemeClr>
+            <a:schemeClr val="bg2"/>
           </a:solidFill>
           <a:ln/>
         </p:spPr>
       </p:sp>
       <p:sp>
         <p:nvSpPr>
-          <p:cNvPr id="7" name="circle-370"/>
-          <p:cNvSpPr/>
-          <p:nvPr/>
-        </p:nvSpPr>
-        <p:spPr>
-          <a:xfrm>
-            <a:off x="8641080" y="1508760"/>
-            <a:ext cx="640080" cy="640080"/>
-          </a:xfrm>
-          <a:prstGeom prst="ellipse">
-            <a:avLst/>
-          </a:prstGeom>
-          <a:solidFill>
-            <a:schemeClr val="accent4"/>
-          </a:solidFill>
-          <a:ln/>
-        </p:spPr>
-      </p:sp>
-      <p:pic>
-        <p:nvPicPr>
-          <p:cNvPr id="8" name="icon-FaExclamationTriangle-371" descr="FaExclamationTriangle">    </p:cNvPr>
-          <p:cNvPicPr>
-            <a:picLocks noChangeAspect="1"/>
-          </p:cNvPicPr>
-          <p:nvPr/>
-        </p:nvPicPr>
-        <p:blipFill>
-          <a:blip r:embed="rId2"/>
-          <a:stretch>
-            <a:fillRect/>
-          </a:stretch>
-        </p:blipFill>
-        <p:spPr>
-          <a:xfrm>
-            <a:off x="8807501" y="1675181"/>
-            <a:ext cx="307238" cy="307238"/>
-          </a:xfrm>
-          <a:prstGeom prst="rect">
-            <a:avLst/>
-          </a:prstGeom>
-        </p:spPr>
-      </p:pic>
-      <p:sp>
-        <p:nvSpPr>
-          <p:cNvPr id="9" name="text-372"/>
+          <p:cNvPr id="14" name="text-377"/>
           <p:cNvSpPr txBox="1"/>
           <p:nvPr/>
         </p:nvSpPr>
         <p:spPr>
           <a:xfrm>
-            <a:off x="9372600" y="1554480"/>
-            <a:ext cx="2103120" cy="548640"/>
-          </a:xfrm>
-          <a:prstGeom prst="rect">
-            <a:avLst/>
-          </a:prstGeom>
-          <a:noFill/>
-          <a:ln/>
-        </p:spPr>
-        <p:txBody>
-          <a:bodyPr wrap="square" lIns="0" tIns="0" rIns="0" bIns="0" rtlCol="0" anchor="ctr"/>
-          <a:lstStyle/>
-          <a:p>
-            <a:pPr indent="0" marL="0">
-              <a:buNone/>
-            </a:pPr>
-            <a:r>
-              <a:rPr lang="en-US" sz="1600" b="1" dirty="0">
-                <a:solidFill>
-                  <a:schemeClr val="accent4"/>
-                </a:solidFill>
-              </a:rPr>
-              <a:t>transformers 5.x 주의</a:t>
-            </a:r>
-            <a:endParaRPr lang="en-US" sz="1600" dirty="0"/>
-          </a:p>
-        </p:txBody>
-      </p:sp>
-      <p:sp>
-        <p:nvSpPr>
-          <p:cNvPr id="10" name="text-373"/>
+            <a:off x="8641080" y="1463040"/>
+            <a:ext cx="2743200" cy="411480"/>
+          </a:xfrm>
+          <a:prstGeom prst="rect">
+            <a:avLst/>
+          </a:prstGeom>
+          <a:noFill/>
+          <a:ln/>
+        </p:spPr>
+        <p:txBody>
+          <a:bodyPr wrap="square" lIns="0" tIns="0" rIns="0" bIns="0" rtlCol="0" anchor="t"/>
+          <a:lstStyle/>
+          <a:p>
+            <a:pPr indent="0" marL="0">
+              <a:buNone/>
+            </a:pPr>
+            <a:r>
+              <a:rPr lang="en-US" sz="1700" b="1" dirty="0">
+                <a:solidFill>
+                  <a:schemeClr val="accent3"/>
+                </a:solidFill>
+              </a:rPr>
+              <a:t>모델 바꿔서 실행</a:t>
+            </a:r>
+            <a:endParaRPr lang="en-US" sz="1700" dirty="0"/>
+          </a:p>
+        </p:txBody>
+      </p:sp>
+      <p:sp>
+        <p:nvSpPr>
+          <p:cNvPr id="15" name="text-378"/>
           <p:cNvSpPr txBox="1"/>
           <p:nvPr/>
         </p:nvSpPr>
         <p:spPr>
           <a:xfrm>
-            <a:off x="8641080" y="2331720"/>
-            <a:ext cx="2697480" cy="914400"/>
+            <a:off x="8641080" y="1965960"/>
+            <a:ext cx="2743200" cy="320040"/>
           </a:xfrm>
           <a:prstGeom prst="rect">
             <a:avLst/>
@@ -12136,88 +12000,90 @@
               <a:buNone/>
             </a:pPr>
             <a:r>
-              <a:rPr lang="en-US" sz="1500" dirty="0">
-                <a:solidFill>
-                  <a:schemeClr val="tx1"/>
-                </a:solidFill>
-              </a:rPr>
-              <a:t>결과가 텐서가 아니라 출력 객체로 바뀜. 벡터는 여기에:</a:t>
-            </a:r>
-            <a:endParaRPr lang="en-US" sz="1500" dirty="0"/>
-          </a:p>
-        </p:txBody>
-      </p:sp>
-      <p:sp>
-        <p:nvSpPr>
-          <p:cNvPr id="11" name="card-374"/>
-          <p:cNvSpPr/>
-          <p:nvPr/>
-        </p:nvSpPr>
-        <p:spPr>
-          <a:xfrm>
-            <a:off x="8641080" y="3291840"/>
-            <a:ext cx="2697480" cy="548640"/>
-          </a:xfrm>
-          <a:prstGeom prst="roundRect">
-            <a:avLst>
-              <a:gd name="adj" fmla="val 23333"/>
-            </a:avLst>
-          </a:prstGeom>
-          <a:solidFill>
-            <a:schemeClr val="tx1"/>
-          </a:solidFill>
-          <a:ln/>
-        </p:spPr>
-      </p:sp>
-      <p:sp>
-        <p:nvSpPr>
-          <p:cNvPr id="12" name="text-375"/>
+              <a:rPr lang="en-US" sz="1300" dirty="0">
+                <a:solidFill>
+                  <a:schemeClr val="tx2"/>
+                </a:solidFill>
+              </a:rPr>
+              <a:t>원본 노트북</a:t>
+            </a:r>
+            <a:endParaRPr lang="en-US" sz="1300" dirty="0"/>
+          </a:p>
+        </p:txBody>
+      </p:sp>
+      <p:sp>
+        <p:nvSpPr>
+          <p:cNvPr id="16" name="text-379"/>
           <p:cNvSpPr txBox="1"/>
           <p:nvPr/>
         </p:nvSpPr>
         <p:spPr>
           <a:xfrm>
-            <a:off x="8732520" y="3291840"/>
-            <a:ext cx="2514600" cy="548640"/>
-          </a:xfrm>
-          <a:prstGeom prst="rect">
-            <a:avLst/>
-          </a:prstGeom>
-          <a:noFill/>
-          <a:ln/>
-        </p:spPr>
-        <p:txBody>
-          <a:bodyPr wrap="square" lIns="0" tIns="0" rIns="0" bIns="0" rtlCol="0" anchor="ctr"/>
-          <a:lstStyle/>
-          <a:p>
-            <a:pPr algn="ctr" indent="0" marL="0">
-              <a:buNone/>
-            </a:pPr>
-            <a:r>
-              <a:rPr lang="en-US" sz="1500" b="1" dirty="0">
-                <a:solidFill>
-                  <a:srgbClr val="FBBF24"/>
+            <a:off x="8641080" y="2286000"/>
+            <a:ext cx="2743200" cy="365760"/>
+          </a:xfrm>
+          <a:prstGeom prst="rect">
+            <a:avLst/>
+          </a:prstGeom>
+          <a:noFill/>
+          <a:ln/>
+        </p:spPr>
+        <p:txBody>
+          <a:bodyPr wrap="square" lIns="0" tIns="0" rIns="0" bIns="0" rtlCol="0" anchor="t"/>
+          <a:lstStyle/>
+          <a:p>
+            <a:pPr indent="0" marL="0">
+              <a:buNone/>
+            </a:pPr>
+            <a:r>
+              <a:rPr lang="en-US" sz="1300" dirty="0">
+                <a:solidFill>
+                  <a:schemeClr val="tx2"/>
                 </a:solidFill>
                 <a:latin typeface="Courier New" pitchFamily="34" charset="0"/>
                 <a:ea typeface="Courier New" pitchFamily="34" charset="-122"/>
                 <a:cs typeface="Courier New" pitchFamily="34" charset="-120"/>
               </a:rPr>
-              <a:t>.pooler_output</a:t>
-            </a:r>
-            <a:endParaRPr lang="en-US" sz="1500" dirty="0"/>
-          </a:p>
-        </p:txBody>
-      </p:sp>
-      <p:sp>
-        <p:nvSpPr>
-          <p:cNvPr id="13" name="text-376"/>
+              <a:t>siglip-so400m-patch14-384</a:t>
+            </a:r>
+            <a:endParaRPr lang="en-US" sz="1300" dirty="0"/>
+          </a:p>
+        </p:txBody>
+      </p:sp>
+      <p:sp>
+        <p:nvSpPr>
+          <p:cNvPr id="17" name="arrow-380"/>
+          <p:cNvSpPr/>
+          <p:nvPr/>
+        </p:nvSpPr>
+        <p:spPr>
+          <a:xfrm>
+            <a:off x="9966960" y="2743200"/>
+            <a:ext cx="0" cy="411480"/>
+          </a:xfrm>
+          <a:prstGeom prst="line">
+            <a:avLst/>
+          </a:prstGeom>
+          <a:noFill/>
+          <a:ln w="31750">
+            <a:solidFill>
+              <a:schemeClr val="accent3"/>
+            </a:solidFill>
+            <a:prstDash val="solid"/>
+            <a:tailEnd type="triangle"/>
+          </a:ln>
+        </p:spPr>
+      </p:sp>
+      <p:sp>
+        <p:nvSpPr>
+          <p:cNvPr id="18" name="text-381"/>
           <p:cNvSpPr txBox="1"/>
           <p:nvPr/>
         </p:nvSpPr>
         <p:spPr>
           <a:xfrm>
-            <a:off x="8641080" y="4023360"/>
-            <a:ext cx="2697480" cy="365760"/>
+            <a:off x="8641080" y="3246120"/>
+            <a:ext cx="2743200" cy="320040"/>
           </a:xfrm>
           <a:prstGeom prst="rect">
             <a:avLst/>
@@ -12233,27 +12099,27 @@
               <a:buNone/>
             </a:pPr>
             <a:r>
-              <a:rPr lang="en-US" sz="1400" b="1" dirty="0">
-                <a:solidFill>
-                  <a:schemeClr val="tx1"/>
-                </a:solidFill>
-              </a:rPr>
-              <a:t>4.x와 5.x 모두 되게:</a:t>
-            </a:r>
-            <a:endParaRPr lang="en-US" sz="1400" dirty="0"/>
-          </a:p>
-        </p:txBody>
-      </p:sp>
-      <p:sp>
-        <p:nvSpPr>
-          <p:cNvPr id="14" name="text-377"/>
+              <a:rPr lang="en-US" sz="1300" b="1" dirty="0">
+                <a:solidFill>
+                  <a:schemeClr val="accent3"/>
+                </a:solidFill>
+              </a:rPr>
+              <a:t>직접 실행</a:t>
+            </a:r>
+            <a:endParaRPr lang="en-US" sz="1300" dirty="0"/>
+          </a:p>
+        </p:txBody>
+      </p:sp>
+      <p:sp>
+        <p:nvSpPr>
+          <p:cNvPr id="19" name="text-382"/>
           <p:cNvSpPr txBox="1"/>
           <p:nvPr/>
         </p:nvSpPr>
         <p:spPr>
           <a:xfrm>
-            <a:off x="8641080" y="4389120"/>
-            <a:ext cx="2697480" cy="822960"/>
+            <a:off x="8641080" y="3566160"/>
+            <a:ext cx="2743200" cy="365760"/>
           </a:xfrm>
           <a:prstGeom prst="rect">
             <a:avLst/>
@@ -12269,7 +12135,7 @@
               <a:buNone/>
             </a:pPr>
             <a:r>
-              <a:rPr lang="en-US" sz="1200" dirty="0">
+              <a:rPr lang="en-US" sz="1300" b="1" dirty="0">
                 <a:solidFill>
                   <a:schemeClr val="tx1"/>
                 </a:solidFill>
@@ -12277,22 +12143,22 @@
                 <a:ea typeface="Courier New" pitchFamily="34" charset="-122"/>
                 <a:cs typeface="Courier New" pitchFamily="34" charset="-120"/>
               </a:rPr>
-              <a:t>f = getattr(f, "pooler_output", f)</a:t>
-            </a:r>
-            <a:endParaRPr lang="en-US" sz="1200" dirty="0"/>
-          </a:p>
-        </p:txBody>
-      </p:sp>
-      <p:sp>
-        <p:nvSpPr>
-          <p:cNvPr id="15" name="text-378"/>
+              <a:t>siglip-base-patch16-224</a:t>
+            </a:r>
+            <a:endParaRPr lang="en-US" sz="1300" dirty="0"/>
+          </a:p>
+        </p:txBody>
+      </p:sp>
+      <p:sp>
+        <p:nvSpPr>
+          <p:cNvPr id="20" name="text-383"/>
           <p:cNvSpPr txBox="1"/>
           <p:nvPr/>
         </p:nvSpPr>
         <p:spPr>
           <a:xfrm>
-            <a:off x="8641080" y="5257800"/>
-            <a:ext cx="2697480" cy="457200"/>
+            <a:off x="8641080" y="4114800"/>
+            <a:ext cx="2697480" cy="1280160"/>
           </a:xfrm>
           <a:prstGeom prst="rect">
             <a:avLst/>
@@ -12313,7 +12179,7 @@
                   <a:schemeClr val="tx2"/>
                 </a:solidFill>
               </a:rPr>
-              <a:t>base 기준 768차원</a:t>
+              <a:t>더 작고 가벼운 모델. 이름대로 base 크기 · 16px 조각 · 224 해상도</a:t>
             </a:r>
             <a:endParaRPr lang="en-US" sz="1400" dirty="0"/>
           </a:p>
@@ -12421,26 +12287,260 @@
                   <a:schemeClr val="tx1"/>
                 </a:solidFill>
               </a:rPr>
-              <a:t>실습 ② 사진과 문장 짝 확인하기 (메인 노트북)</a:t>
+              <a:t>실습 ② 사진과 문장 준비</a:t>
             </a:r>
             <a:endParaRPr lang="en-US" sz="3000" dirty="0"/>
           </a:p>
         </p:txBody>
       </p:sp>
-      <p:sp>
-        <p:nvSpPr>
-          <p:cNvPr id="3" name="codebg-379"/>
+      <p:pic>
+        <p:nvPicPr>
+          <p:cNvPr id="3" name="coco-cats" descr="COCO 고양이 두 마리 사진">    </p:cNvPr>
+          <p:cNvPicPr>
+            <a:picLocks noChangeAspect="1"/>
+          </p:cNvPicPr>
+          <p:nvPr/>
+        </p:nvPicPr>
+        <p:blipFill>
+          <a:blip r:embed="rId1"/>
+          <a:stretch>
+            <a:fillRect/>
+          </a:stretch>
+        </p:blipFill>
+        <p:spPr>
+          <a:xfrm>
+            <a:off x="640080" y="1325880"/>
+            <a:ext cx="4206240" cy="3154680"/>
+          </a:xfrm>
+          <a:prstGeom prst="rect">
+            <a:avLst/>
+          </a:prstGeom>
+        </p:spPr>
+      </p:pic>
+      <p:sp>
+        <p:nvSpPr>
+          <p:cNvPr id="4" name="text-384"/>
+          <p:cNvSpPr txBox="1"/>
+          <p:nvPr/>
+        </p:nvSpPr>
+        <p:spPr>
+          <a:xfrm>
+            <a:off x="640080" y="4526280"/>
+            <a:ext cx="4206240" cy="274320"/>
+          </a:xfrm>
+          <a:prstGeom prst="rect">
+            <a:avLst/>
+          </a:prstGeom>
+          <a:noFill/>
+          <a:ln/>
+        </p:spPr>
+        <p:txBody>
+          <a:bodyPr wrap="square" lIns="0" tIns="0" rIns="0" bIns="0" rtlCol="0" anchor="t"/>
+          <a:lstStyle/>
+          <a:p>
+            <a:pPr indent="0" marL="0">
+              <a:buNone/>
+            </a:pPr>
+            <a:r>
+              <a:rPr lang="en-US" sz="1100" dirty="0">
+                <a:solidFill>
+                  <a:schemeClr val="tx2"/>
+                </a:solidFill>
+              </a:rPr>
+              <a:t>COCO val2017 #39769</a:t>
+            </a:r>
+            <a:endParaRPr lang="en-US" sz="1100" dirty="0"/>
+          </a:p>
+        </p:txBody>
+      </p:sp>
+      <p:sp>
+        <p:nvSpPr>
+          <p:cNvPr id="5" name="pill-385"/>
           <p:cNvSpPr/>
           <p:nvPr/>
         </p:nvSpPr>
         <p:spPr>
           <a:xfrm>
-            <a:off x="640080" y="1280160"/>
-            <a:ext cx="7498080" cy="3977640"/>
+            <a:off x="640080" y="4846320"/>
+            <a:ext cx="2651760" cy="365760"/>
           </a:xfrm>
           <a:prstGeom prst="roundRect">
             <a:avLst>
-              <a:gd name="adj" fmla="val 2759"/>
+              <a:gd name="adj" fmla="val 50000"/>
+            </a:avLst>
+          </a:prstGeom>
+          <a:solidFill>
+            <a:schemeClr val="accent2"/>
+          </a:solidFill>
+          <a:ln/>
+        </p:spPr>
+      </p:sp>
+      <p:sp>
+        <p:nvSpPr>
+          <p:cNvPr id="6" name="text-386"/>
+          <p:cNvSpPr txBox="1"/>
+          <p:nvPr/>
+        </p:nvSpPr>
+        <p:spPr>
+          <a:xfrm>
+            <a:off x="640080" y="4846320"/>
+            <a:ext cx="2651760" cy="365760"/>
+          </a:xfrm>
+          <a:prstGeom prst="rect">
+            <a:avLst/>
+          </a:prstGeom>
+          <a:noFill/>
+          <a:ln/>
+        </p:spPr>
+        <p:txBody>
+          <a:bodyPr wrap="square" lIns="0" tIns="0" rIns="0" bIns="0" rtlCol="0" anchor="ctr"/>
+          <a:lstStyle/>
+          <a:p>
+            <a:pPr algn="ctr" indent="0" marL="0">
+              <a:buNone/>
+            </a:pPr>
+            <a:r>
+              <a:rPr lang="en-US" sz="1200" b="1" dirty="0">
+                <a:solidFill>
+                  <a:schemeClr val="bg1"/>
+                </a:solidFill>
+              </a:rPr>
+              <a:t>a photo of 2 cats</a:t>
+            </a:r>
+            <a:endParaRPr lang="en-US" sz="1200" dirty="0"/>
+          </a:p>
+        </p:txBody>
+      </p:sp>
+      <p:sp>
+        <p:nvSpPr>
+          <p:cNvPr id="7" name="pill-387"/>
+          <p:cNvSpPr/>
+          <p:nvPr/>
+        </p:nvSpPr>
+        <p:spPr>
+          <a:xfrm>
+            <a:off x="640080" y="5257800"/>
+            <a:ext cx="2651760" cy="365760"/>
+          </a:xfrm>
+          <a:prstGeom prst="roundRect">
+            <a:avLst>
+              <a:gd name="adj" fmla="val 50000"/>
+            </a:avLst>
+          </a:prstGeom>
+          <a:solidFill>
+            <a:schemeClr val="accent6"/>
+          </a:solidFill>
+          <a:ln/>
+        </p:spPr>
+      </p:sp>
+      <p:sp>
+        <p:nvSpPr>
+          <p:cNvPr id="8" name="text-388"/>
+          <p:cNvSpPr txBox="1"/>
+          <p:nvPr/>
+        </p:nvSpPr>
+        <p:spPr>
+          <a:xfrm>
+            <a:off x="640080" y="5257800"/>
+            <a:ext cx="2651760" cy="365760"/>
+          </a:xfrm>
+          <a:prstGeom prst="rect">
+            <a:avLst/>
+          </a:prstGeom>
+          <a:noFill/>
+          <a:ln/>
+        </p:spPr>
+        <p:txBody>
+          <a:bodyPr wrap="square" lIns="0" tIns="0" rIns="0" bIns="0" rtlCol="0" anchor="ctr"/>
+          <a:lstStyle/>
+          <a:p>
+            <a:pPr algn="ctr" indent="0" marL="0">
+              <a:buNone/>
+            </a:pPr>
+            <a:r>
+              <a:rPr lang="en-US" sz="1200" b="1" dirty="0">
+                <a:solidFill>
+                  <a:schemeClr val="bg1"/>
+                </a:solidFill>
+              </a:rPr>
+              <a:t>a photo of 2 hamburgers</a:t>
+            </a:r>
+            <a:endParaRPr lang="en-US" sz="1200" dirty="0"/>
+          </a:p>
+        </p:txBody>
+      </p:sp>
+      <p:sp>
+        <p:nvSpPr>
+          <p:cNvPr id="9" name="pill-389"/>
+          <p:cNvSpPr/>
+          <p:nvPr/>
+        </p:nvSpPr>
+        <p:spPr>
+          <a:xfrm>
+            <a:off x="640080" y="5669280"/>
+            <a:ext cx="2651760" cy="365760"/>
+          </a:xfrm>
+          <a:prstGeom prst="roundRect">
+            <a:avLst>
+              <a:gd name="adj" fmla="val 50000"/>
+            </a:avLst>
+          </a:prstGeom>
+          <a:solidFill>
+            <a:schemeClr val="accent6"/>
+          </a:solidFill>
+          <a:ln/>
+        </p:spPr>
+      </p:sp>
+      <p:sp>
+        <p:nvSpPr>
+          <p:cNvPr id="10" name="text-390"/>
+          <p:cNvSpPr txBox="1"/>
+          <p:nvPr/>
+        </p:nvSpPr>
+        <p:spPr>
+          <a:xfrm>
+            <a:off x="640080" y="5669280"/>
+            <a:ext cx="2651760" cy="365760"/>
+          </a:xfrm>
+          <a:prstGeom prst="rect">
+            <a:avLst/>
+          </a:prstGeom>
+          <a:noFill/>
+          <a:ln/>
+        </p:spPr>
+        <p:txBody>
+          <a:bodyPr wrap="square" lIns="0" tIns="0" rIns="0" bIns="0" rtlCol="0" anchor="ctr"/>
+          <a:lstStyle/>
+          <a:p>
+            <a:pPr algn="ctr" indent="0" marL="0">
+              <a:buNone/>
+            </a:pPr>
+            <a:r>
+              <a:rPr lang="en-US" sz="1200" b="1" dirty="0">
+                <a:solidFill>
+                  <a:schemeClr val="bg1"/>
+                </a:solidFill>
+              </a:rPr>
+              <a:t>a photo of 2 dogs</a:t>
+            </a:r>
+            <a:endParaRPr lang="en-US" sz="1200" dirty="0"/>
+          </a:p>
+        </p:txBody>
+      </p:sp>
+      <p:sp>
+        <p:nvSpPr>
+          <p:cNvPr id="11" name="codebg-391"/>
+          <p:cNvSpPr/>
+          <p:nvPr/>
+        </p:nvSpPr>
+        <p:spPr>
+          <a:xfrm>
+            <a:off x="5120640" y="1325880"/>
+            <a:ext cx="6400800" cy="3063240"/>
+          </a:xfrm>
+          <a:prstGeom prst="roundRect">
+            <a:avLst>
+              <a:gd name="adj" fmla="val 3582"/>
             </a:avLst>
           </a:prstGeom>
           <a:solidFill>
@@ -12451,14 +12551,14 @@
       </p:sp>
       <p:sp>
         <p:nvSpPr>
-          <p:cNvPr id="4" name="text-380"/>
+          <p:cNvPr id="12" name="text-392"/>
           <p:cNvSpPr txBox="1"/>
           <p:nvPr/>
         </p:nvSpPr>
         <p:spPr>
           <a:xfrm>
-            <a:off x="914400" y="1508760"/>
-            <a:ext cx="6949440" cy="3520440"/>
+            <a:off x="5394960" y="1554480"/>
+            <a:ext cx="5852160" cy="2606040"/>
           </a:xfrm>
           <a:prstGeom prst="rect">
             <a:avLst/>
@@ -12477,7 +12577,7 @@
               <a:buNone/>
             </a:pPr>
             <a:r>
-              <a:rPr lang="en-US" sz="1300" dirty="0">
+              <a:rPr lang="en-US" sz="1200" dirty="0">
                 <a:solidFill>
                   <a:schemeClr val="bg1"/>
                 </a:solidFill>
@@ -12485,9 +12585,9 @@
                 <a:ea typeface="Courier New" pitchFamily="34" charset="-122"/>
                 <a:cs typeface="Courier New" pitchFamily="34" charset="-120"/>
               </a:rPr>
-              <a:t>from transformers import AutoProcessor, AutoModel</a:t>
-            </a:r>
-            <a:endParaRPr lang="en-US" sz="1300" dirty="0"/>
+              <a:t>url = "http://images.cocodataset.org/val2017/000000039769.jpg"</a:t>
+            </a:r>
+            <a:endParaRPr lang="en-US" sz="1200" dirty="0"/>
           </a:p>
           <a:p>
             <a:pPr indent="0" marL="0">
@@ -12497,7 +12597,7 @@
               <a:buNone/>
             </a:pPr>
             <a:r>
-              <a:rPr lang="en-US" sz="1300" dirty="0">
+              <a:rPr lang="en-US" sz="1200" dirty="0">
                 <a:solidFill>
                   <a:schemeClr val="bg1"/>
                 </a:solidFill>
@@ -12505,9 +12605,9 @@
                 <a:ea typeface="Courier New" pitchFamily="34" charset="-122"/>
                 <a:cs typeface="Courier New" pitchFamily="34" charset="-120"/>
               </a:rPr>
-              <a:t>ckpt = "google/siglip-so400m-patch14-384"</a:t>
-            </a:r>
-            <a:endParaRPr lang="en-US" sz="1300" dirty="0"/>
+              <a:t>image = Image.open(requests.get(url, stream=True).raw)</a:t>
+            </a:r>
+            <a:endParaRPr lang="en-US" sz="1200" dirty="0"/>
           </a:p>
           <a:p>
             <a:pPr indent="0" marL="0">
@@ -12517,7 +12617,7 @@
               <a:buNone/>
             </a:pPr>
             <a:r>
-              <a:rPr lang="en-US" sz="1300" dirty="0">
+              <a:rPr lang="en-US" sz="1200" dirty="0">
                 <a:solidFill>
                   <a:schemeClr val="bg1"/>
                 </a:solidFill>
@@ -12525,9 +12625,9 @@
                 <a:ea typeface="Courier New" pitchFamily="34" charset="-122"/>
                 <a:cs typeface="Courier New" pitchFamily="34" charset="-120"/>
               </a:rPr>
-              <a:t>processor = AutoProcessor.from_pretrained(ckpt)</a:t>
-            </a:r>
-            <a:endParaRPr lang="en-US" sz="1300" dirty="0"/>
+              <a:t> </a:t>
+            </a:r>
+            <a:endParaRPr lang="en-US" sz="1200" dirty="0"/>
           </a:p>
           <a:p>
             <a:pPr indent="0" marL="0">
@@ -12537,7 +12637,7 @@
               <a:buNone/>
             </a:pPr>
             <a:r>
-              <a:rPr lang="en-US" sz="1300" dirty="0">
+              <a:rPr lang="en-US" sz="1200" dirty="0">
                 <a:solidFill>
                   <a:schemeClr val="bg1"/>
                 </a:solidFill>
@@ -12545,9 +12645,9 @@
                 <a:ea typeface="Courier New" pitchFamily="34" charset="-122"/>
                 <a:cs typeface="Courier New" pitchFamily="34" charset="-120"/>
               </a:rPr>
-              <a:t>model = AutoModel.from_pretrained(ckpt)</a:t>
-            </a:r>
-            <a:endParaRPr lang="en-US" sz="1300" dirty="0"/>
+              <a:t>texts = ["a photo of 2 cats", "a photo of 2 hamburgers",</a:t>
+            </a:r>
+            <a:endParaRPr lang="en-US" sz="1200" dirty="0"/>
           </a:p>
           <a:p>
             <a:pPr indent="0" marL="0">
@@ -12557,7 +12657,7 @@
               <a:buNone/>
             </a:pPr>
             <a:r>
-              <a:rPr lang="en-US" sz="1300" dirty="0">
+              <a:rPr lang="en-US" sz="1200" dirty="0">
                 <a:solidFill>
                   <a:schemeClr val="bg1"/>
                 </a:solidFill>
@@ -12565,9 +12665,9 @@
                 <a:ea typeface="Courier New" pitchFamily="34" charset="-122"/>
                 <a:cs typeface="Courier New" pitchFamily="34" charset="-120"/>
               </a:rPr>
-              <a:t> </a:t>
-            </a:r>
-            <a:endParaRPr lang="en-US" sz="1300" dirty="0"/>
+              <a:t>         "a photo of 2 dogs"]</a:t>
+            </a:r>
+            <a:endParaRPr lang="en-US" sz="1200" dirty="0"/>
           </a:p>
           <a:p>
             <a:pPr indent="0" marL="0">
@@ -12577,17 +12677,17 @@
               <a:buNone/>
             </a:pPr>
             <a:r>
-              <a:rPr lang="en-US" sz="1300" dirty="0">
-                <a:solidFill>
-                  <a:schemeClr val="bg1"/>
+              <a:rPr lang="en-US" sz="1200" dirty="0">
+                <a:solidFill>
+                  <a:srgbClr val="FBBF24"/>
                 </a:solidFill>
                 <a:latin typeface="Courier New" pitchFamily="34" charset="0"/>
                 <a:ea typeface="Courier New" pitchFamily="34" charset="-122"/>
                 <a:cs typeface="Courier New" pitchFamily="34" charset="-120"/>
               </a:rPr>
-              <a:t>texts = ["a photo of 2 cats", "a photo of 2 hamburgers",</a:t>
-            </a:r>
-            <a:endParaRPr lang="en-US" sz="1300" dirty="0"/>
+              <a:t># important: we pass padding="max_length"</a:t>
+            </a:r>
+            <a:endParaRPr lang="en-US" sz="1200" dirty="0"/>
           </a:p>
           <a:p>
             <a:pPr indent="0" marL="0">
@@ -12597,17 +12697,17 @@
               <a:buNone/>
             </a:pPr>
             <a:r>
-              <a:rPr lang="en-US" sz="1300" dirty="0">
-                <a:solidFill>
-                  <a:schemeClr val="bg1"/>
+              <a:rPr lang="en-US" sz="1200" dirty="0">
+                <a:solidFill>
+                  <a:srgbClr val="FBBF24"/>
                 </a:solidFill>
                 <a:latin typeface="Courier New" pitchFamily="34" charset="0"/>
                 <a:ea typeface="Courier New" pitchFamily="34" charset="-122"/>
                 <a:cs typeface="Courier New" pitchFamily="34" charset="-120"/>
               </a:rPr>
-              <a:t>         "a photo of 2 dogs"]</a:t>
-            </a:r>
-            <a:endParaRPr lang="en-US" sz="1300" dirty="0"/>
+              <a:t># as that's how the model was trained</a:t>
+            </a:r>
+            <a:endParaRPr lang="en-US" sz="1200" dirty="0"/>
           </a:p>
           <a:p>
             <a:pPr indent="0" marL="0">
@@ -12617,17 +12717,17 @@
               <a:buNone/>
             </a:pPr>
             <a:r>
-              <a:rPr lang="en-US" sz="1300" dirty="0">
-                <a:solidFill>
-                  <a:srgbClr val="FBBF24"/>
+              <a:rPr lang="en-US" sz="1200" dirty="0">
+                <a:solidFill>
+                  <a:schemeClr val="bg1"/>
                 </a:solidFill>
                 <a:latin typeface="Courier New" pitchFamily="34" charset="0"/>
                 <a:ea typeface="Courier New" pitchFamily="34" charset="-122"/>
                 <a:cs typeface="Courier New" pitchFamily="34" charset="-120"/>
               </a:rPr>
-              <a:t># important: we pass padding="max_length"</a:t>
-            </a:r>
-            <a:endParaRPr lang="en-US" sz="1300" dirty="0"/>
+              <a:t>inputs = processor(text=texts, images=image,</a:t>
+            </a:r>
+            <a:endParaRPr lang="en-US" sz="1200" dirty="0"/>
           </a:p>
           <a:p>
             <a:pPr indent="0" marL="0">
@@ -12637,7 +12737,7 @@
               <a:buNone/>
             </a:pPr>
             <a:r>
-              <a:rPr lang="en-US" sz="1300" dirty="0">
+              <a:rPr lang="en-US" sz="1200" dirty="0">
                 <a:solidFill>
                   <a:schemeClr val="bg1"/>
                 </a:solidFill>
@@ -12645,133 +12745,119 @@
                 <a:ea typeface="Courier New" pitchFamily="34" charset="-122"/>
                 <a:cs typeface="Courier New" pitchFamily="34" charset="-120"/>
               </a:rPr>
-              <a:t>inputs = processor(text=texts, images=image, padding="max_length",</a:t>
+              <a:t>                   padding="max_length", return_tensors="pt")</a:t>
+            </a:r>
+            <a:endParaRPr lang="en-US" sz="1200" dirty="0"/>
+          </a:p>
+        </p:txBody>
+      </p:sp>
+      <p:sp>
+        <p:nvSpPr>
+          <p:cNvPr id="13" name="outbg-393"/>
+          <p:cNvSpPr/>
+          <p:nvPr/>
+        </p:nvSpPr>
+        <p:spPr>
+          <a:xfrm>
+            <a:off x="5120640" y="4526280"/>
+            <a:ext cx="6400800" cy="914400"/>
+          </a:xfrm>
+          <a:prstGeom prst="roundRect">
+            <a:avLst>
+              <a:gd name="adj" fmla="val 8000"/>
+            </a:avLst>
+          </a:prstGeom>
+          <a:solidFill>
+            <a:schemeClr val="bg2"/>
+          </a:solidFill>
+          <a:ln w="12700">
+            <a:solidFill>
+              <a:schemeClr val="accent6"/>
+            </a:solidFill>
+            <a:prstDash val="solid"/>
+          </a:ln>
+        </p:spPr>
+      </p:sp>
+      <p:sp>
+        <p:nvSpPr>
+          <p:cNvPr id="14" name="text-394"/>
+          <p:cNvSpPr txBox="1"/>
+          <p:nvPr/>
+        </p:nvSpPr>
+        <p:spPr>
+          <a:xfrm>
+            <a:off x="5303520" y="4617720"/>
+            <a:ext cx="6035040" cy="731520"/>
+          </a:xfrm>
+          <a:prstGeom prst="rect">
+            <a:avLst/>
+          </a:prstGeom>
+          <a:noFill/>
+          <a:ln/>
+        </p:spPr>
+        <p:txBody>
+          <a:bodyPr wrap="square" lIns="0" tIns="0" rIns="0" bIns="0" rtlCol="0" anchor="ctr"/>
+          <a:lstStyle/>
+          <a:p>
+            <a:pPr indent="0" marL="0">
+              <a:buNone/>
+            </a:pPr>
+            <a:r>
+              <a:rPr lang="en-US" sz="1100" b="1" dirty="0">
+                <a:solidFill>
+                  <a:schemeClr val="tx2"/>
+                </a:solidFill>
+              </a:rPr>
+              <a:t>출력</a:t>
             </a:r>
             <a:endParaRPr lang="en-US" sz="1300" dirty="0"/>
           </a:p>
           <a:p>
             <a:pPr indent="0" marL="0">
-              <a:lnSpc>
-                <a:spcPct val="110000"/>
-              </a:lnSpc>
               <a:buNone/>
             </a:pPr>
             <a:r>
               <a:rPr lang="en-US" sz="1300" dirty="0">
                 <a:solidFill>
-                  <a:schemeClr val="bg1"/>
+                  <a:schemeClr val="tx1"/>
                 </a:solidFill>
                 <a:latin typeface="Courier New" pitchFamily="34" charset="0"/>
                 <a:ea typeface="Courier New" pitchFamily="34" charset="-122"/>
                 <a:cs typeface="Courier New" pitchFamily="34" charset="-120"/>
               </a:rPr>
-              <a:t>                   return_tensors="pt")</a:t>
+              <a:t>input_ids torch.Size([3, 64])</a:t>
             </a:r>
             <a:endParaRPr lang="en-US" sz="1300" dirty="0"/>
           </a:p>
           <a:p>
             <a:pPr indent="0" marL="0">
-              <a:lnSpc>
-                <a:spcPct val="110000"/>
-              </a:lnSpc>
               <a:buNone/>
             </a:pPr>
             <a:r>
               <a:rPr lang="en-US" sz="1300" dirty="0">
                 <a:solidFill>
-                  <a:schemeClr val="bg1"/>
+                  <a:schemeClr val="tx1"/>
                 </a:solidFill>
                 <a:latin typeface="Courier New" pitchFamily="34" charset="0"/>
                 <a:ea typeface="Courier New" pitchFamily="34" charset="-122"/>
                 <a:cs typeface="Courier New" pitchFamily="34" charset="-120"/>
               </a:rPr>
-              <a:t>with torch.no_grad():</a:t>
+              <a:t>pixel_values torch.Size([1, 3, 224, 224])</a:t>
             </a:r>
             <a:endParaRPr lang="en-US" sz="1300" dirty="0"/>
           </a:p>
-          <a:p>
-            <a:pPr indent="0" marL="0">
-              <a:lnSpc>
-                <a:spcPct val="110000"/>
-              </a:lnSpc>
-              <a:buNone/>
-            </a:pPr>
-            <a:r>
-              <a:rPr lang="en-US" sz="1300" dirty="0">
-                <a:solidFill>
-                  <a:schemeClr val="bg1"/>
-                </a:solidFill>
-                <a:latin typeface="Courier New" pitchFamily="34" charset="0"/>
-                <a:ea typeface="Courier New" pitchFamily="34" charset="-122"/>
-                <a:cs typeface="Courier New" pitchFamily="34" charset="-120"/>
-              </a:rPr>
-              <a:t>  outputs = model(**inputs)</a:t>
-            </a:r>
-            <a:endParaRPr lang="en-US" sz="1300" dirty="0"/>
-          </a:p>
-          <a:p>
-            <a:pPr indent="0" marL="0">
-              <a:lnSpc>
-                <a:spcPct val="110000"/>
-              </a:lnSpc>
-              <a:buNone/>
-            </a:pPr>
-            <a:r>
-              <a:rPr lang="en-US" sz="1300" dirty="0">
-                <a:solidFill>
-                  <a:schemeClr val="bg1"/>
-                </a:solidFill>
-                <a:latin typeface="Courier New" pitchFamily="34" charset="0"/>
-                <a:ea typeface="Courier New" pitchFamily="34" charset="-122"/>
-                <a:cs typeface="Courier New" pitchFamily="34" charset="-120"/>
-              </a:rPr>
-              <a:t> </a:t>
-            </a:r>
-            <a:endParaRPr lang="en-US" sz="1300" dirty="0"/>
-          </a:p>
-          <a:p>
-            <a:pPr indent="0" marL="0">
-              <a:lnSpc>
-                <a:spcPct val="110000"/>
-              </a:lnSpc>
-              <a:buNone/>
-            </a:pPr>
-            <a:r>
-              <a:rPr lang="en-US" sz="1300" dirty="0">
-                <a:solidFill>
-                  <a:schemeClr val="bg1"/>
-                </a:solidFill>
-                <a:latin typeface="Courier New" pitchFamily="34" charset="0"/>
-                <a:ea typeface="Courier New" pitchFamily="34" charset="-122"/>
-                <a:cs typeface="Courier New" pitchFamily="34" charset="-120"/>
-              </a:rPr>
-              <a:t>probs = torch.sigmoid(outputs.logits_per_image)</a:t>
-            </a:r>
-            <a:r>
-              <a:rPr lang="en-US" sz="1300" dirty="0">
-                <a:solidFill>
-                  <a:srgbClr val="FBBF24"/>
-                </a:solidFill>
-                <a:latin typeface="Courier New" pitchFamily="34" charset="0"/>
-                <a:ea typeface="Courier New" pitchFamily="34" charset="-122"/>
-                <a:cs typeface="Courier New" pitchFamily="34" charset="-120"/>
-              </a:rPr>
-              <a:t>  # probabilities</a:t>
-            </a:r>
-            <a:endParaRPr lang="en-US" sz="1300" dirty="0"/>
-          </a:p>
-        </p:txBody>
-      </p:sp>
-      <p:sp>
-        <p:nvSpPr>
-          <p:cNvPr id="5" name="text-381"/>
+        </p:txBody>
+      </p:sp>
+      <p:sp>
+        <p:nvSpPr>
+          <p:cNvPr id="15" name="text-395"/>
           <p:cNvSpPr txBox="1"/>
           <p:nvPr/>
         </p:nvSpPr>
         <p:spPr>
           <a:xfrm>
-            <a:off x="640080" y="5349240"/>
-            <a:ext cx="7315200" cy="292608"/>
+            <a:off x="5120640" y="5577840"/>
+            <a:ext cx="6400800" cy="411480"/>
           </a:xfrm>
           <a:prstGeom prst="rect">
             <a:avLst/>
@@ -12787,495 +12873,36 @@
               <a:buNone/>
             </a:pPr>
             <a:r>
-              <a:rPr lang="en-US" sz="1100" dirty="0">
-                <a:solidFill>
-                  <a:schemeClr val="tx2"/>
-                </a:solidFill>
-              </a:rPr>
-              <a:t>출처: </a:t>
-            </a:r>
-            <a:r>
-              <a:rPr lang="en-US" sz="1100" u="sng" dirty="0">
-                <a:solidFill>
-                  <a:schemeClr val="tx2"/>
-                </a:solidFill>
-                <a:hlinkClick r:id="rId1" invalidUrl="" action="" tgtFrame="" tooltip="" history="1" highlightClick="0" endSnd="0">
-                  <a:extLst>
-                    <a:ext uri="{A12FA001-AC4F-418D-AE19-62706E023703}">
-                      <ahyp:hlinkClr xmlns:ahyp="http://schemas.microsoft.com/office/drawing/2018/hyperlinkcolor" val="tx"/>
-                    </a:ext>
-                  </a:extLst>
-                </a:hlinkClick>
-              </a:rPr>
-              <a:t>Inference with (multilingual) SigLIP 노트북</a:t>
-            </a:r>
-            <a:endParaRPr lang="en-US" sz="1100" dirty="0"/>
-          </a:p>
-        </p:txBody>
-      </p:sp>
-      <p:sp>
-        <p:nvSpPr>
-          <p:cNvPr id="6" name="text-382"/>
-          <p:cNvSpPr txBox="1"/>
-          <p:nvPr/>
-        </p:nvSpPr>
-        <p:spPr>
-          <a:xfrm>
-            <a:off x="8412480" y="1280160"/>
-            <a:ext cx="3108960" cy="411480"/>
-          </a:xfrm>
-          <a:prstGeom prst="rect">
-            <a:avLst/>
-          </a:prstGeom>
-          <a:noFill/>
-          <a:ln/>
-        </p:spPr>
-        <p:txBody>
-          <a:bodyPr wrap="square" lIns="0" tIns="0" rIns="0" bIns="0" rtlCol="0" anchor="t"/>
-          <a:lstStyle/>
-          <a:p>
-            <a:pPr indent="0" marL="0">
-              <a:buNone/>
-            </a:pPr>
-            <a:r>
-              <a:rPr lang="en-US" sz="1700" b="1" dirty="0">
-                <a:solidFill>
-                  <a:schemeClr val="accent3"/>
-                </a:solidFill>
-              </a:rPr>
-              <a:t>노트북 실행 결과</a:t>
-            </a:r>
-            <a:endParaRPr lang="en-US" sz="1700" dirty="0"/>
-          </a:p>
-        </p:txBody>
-      </p:sp>
-      <p:sp>
-        <p:nvSpPr>
-          <p:cNvPr id="7" name="text-383"/>
-          <p:cNvSpPr txBox="1"/>
-          <p:nvPr/>
-        </p:nvSpPr>
-        <p:spPr>
-          <a:xfrm>
-            <a:off x="8412480" y="1783080"/>
-            <a:ext cx="3108960" cy="365760"/>
-          </a:xfrm>
-          <a:prstGeom prst="rect">
-            <a:avLst/>
-          </a:prstGeom>
-          <a:noFill/>
-          <a:ln/>
-        </p:spPr>
-        <p:txBody>
-          <a:bodyPr wrap="square" lIns="0" tIns="0" rIns="0" bIns="0" rtlCol="0" anchor="t"/>
-          <a:lstStyle/>
-          <a:p>
-            <a:pPr indent="0" marL="0">
-              <a:buNone/>
-            </a:pPr>
+              <a:rPr lang="en-US" sz="1500" b="1" dirty="0">
+                <a:solidFill>
+                  <a:schemeClr val="accent2"/>
+                </a:solidFill>
+              </a:rPr>
+              <a:t>64</a:t>
+            </a:r>
             <a:r>
               <a:rPr lang="en-US" sz="1500" dirty="0">
                 <a:solidFill>
                   <a:schemeClr val="tx1"/>
                 </a:solidFill>
               </a:rPr>
-              <a:t>2 cats</a:t>
-            </a:r>
-            <a:endParaRPr lang="en-US" sz="1500" dirty="0"/>
-          </a:p>
-        </p:txBody>
-      </p:sp>
-      <p:sp>
-        <p:nvSpPr>
-          <p:cNvPr id="8" name="bar-bg-384"/>
-          <p:cNvSpPr/>
-          <p:nvPr/>
-        </p:nvSpPr>
-        <p:spPr>
-          <a:xfrm>
-            <a:off x="8412480" y="2167128"/>
-            <a:ext cx="2286000" cy="274320"/>
-          </a:xfrm>
-          <a:prstGeom prst="rect">
-            <a:avLst/>
-          </a:prstGeom>
-          <a:solidFill>
-            <a:schemeClr val="bg2"/>
-          </a:solidFill>
-          <a:ln/>
-        </p:spPr>
-      </p:sp>
-      <p:sp>
-        <p:nvSpPr>
-          <p:cNvPr id="9" name="bar-385"/>
-          <p:cNvSpPr/>
-          <p:nvPr/>
-        </p:nvSpPr>
-        <p:spPr>
-          <a:xfrm>
-            <a:off x="8412480" y="2167128"/>
-            <a:ext cx="925830" cy="274320"/>
-          </a:xfrm>
-          <a:prstGeom prst="rect">
-            <a:avLst/>
-          </a:prstGeom>
-          <a:solidFill>
-            <a:schemeClr val="accent5"/>
-          </a:solidFill>
-          <a:ln/>
-        </p:spPr>
-      </p:sp>
-      <p:sp>
-        <p:nvSpPr>
-          <p:cNvPr id="10" name="text-386"/>
-          <p:cNvSpPr txBox="1"/>
-          <p:nvPr/>
-        </p:nvSpPr>
-        <p:spPr>
-          <a:xfrm>
-            <a:off x="10744200" y="2075688"/>
-            <a:ext cx="822960" cy="457200"/>
-          </a:xfrm>
-          <a:prstGeom prst="rect">
-            <a:avLst/>
-          </a:prstGeom>
-          <a:noFill/>
-          <a:ln/>
-        </p:spPr>
-        <p:txBody>
-          <a:bodyPr wrap="square" lIns="0" tIns="0" rIns="0" bIns="0" rtlCol="0" anchor="t"/>
-          <a:lstStyle/>
-          <a:p>
-            <a:pPr indent="0" marL="0">
-              <a:buNone/>
-            </a:pPr>
+              <a:t> = 문장마다 64토큰으로 패딩   </a:t>
+            </a:r>
             <a:r>
               <a:rPr lang="en-US" sz="1500" b="1" dirty="0">
                 <a:solidFill>
-                  <a:schemeClr val="accent5"/>
-                </a:solidFill>
-              </a:rPr>
-              <a:t>40.5%</a:t>
-            </a:r>
-            <a:endParaRPr lang="en-US" sz="1500" dirty="0"/>
-          </a:p>
-        </p:txBody>
-      </p:sp>
-      <p:sp>
-        <p:nvSpPr>
-          <p:cNvPr id="11" name="text-387"/>
-          <p:cNvSpPr txBox="1"/>
-          <p:nvPr/>
-        </p:nvSpPr>
-        <p:spPr>
-          <a:xfrm>
-            <a:off x="8412480" y="2651760"/>
-            <a:ext cx="3108960" cy="365760"/>
-          </a:xfrm>
-          <a:prstGeom prst="rect">
-            <a:avLst/>
-          </a:prstGeom>
-          <a:noFill/>
-          <a:ln/>
-        </p:spPr>
-        <p:txBody>
-          <a:bodyPr wrap="square" lIns="0" tIns="0" rIns="0" bIns="0" rtlCol="0" anchor="t"/>
-          <a:lstStyle/>
-          <a:p>
-            <a:pPr indent="0" marL="0">
-              <a:buNone/>
-            </a:pPr>
+                  <a:schemeClr val="accent1"/>
+                </a:solidFill>
+              </a:rPr>
+              <a:t>224</a:t>
+            </a:r>
             <a:r>
               <a:rPr lang="en-US" sz="1500" dirty="0">
                 <a:solidFill>
                   <a:schemeClr val="tx1"/>
                 </a:solidFill>
               </a:rPr>
-              <a:t>2 hamburgers</a:t>
-            </a:r>
-            <a:endParaRPr lang="en-US" sz="1500" dirty="0"/>
-          </a:p>
-        </p:txBody>
-      </p:sp>
-      <p:sp>
-        <p:nvSpPr>
-          <p:cNvPr id="12" name="bar-bg-388"/>
-          <p:cNvSpPr/>
-          <p:nvPr/>
-        </p:nvSpPr>
-        <p:spPr>
-          <a:xfrm>
-            <a:off x="8412480" y="3035808"/>
-            <a:ext cx="2286000" cy="274320"/>
-          </a:xfrm>
-          <a:prstGeom prst="rect">
-            <a:avLst/>
-          </a:prstGeom>
-          <a:solidFill>
-            <a:schemeClr val="bg2"/>
-          </a:solidFill>
-          <a:ln/>
-        </p:spPr>
-      </p:sp>
-      <p:sp>
-        <p:nvSpPr>
-          <p:cNvPr id="13" name="bar-389"/>
-          <p:cNvSpPr/>
-          <p:nvPr/>
-        </p:nvSpPr>
-        <p:spPr>
-          <a:xfrm>
-            <a:off x="8412480" y="3035808"/>
-            <a:ext cx="36576" cy="274320"/>
-          </a:xfrm>
-          <a:prstGeom prst="rect">
-            <a:avLst/>
-          </a:prstGeom>
-          <a:solidFill>
-            <a:schemeClr val="accent6"/>
-          </a:solidFill>
-          <a:ln/>
-        </p:spPr>
-      </p:sp>
-      <p:sp>
-        <p:nvSpPr>
-          <p:cNvPr id="14" name="text-390"/>
-          <p:cNvSpPr txBox="1"/>
-          <p:nvPr/>
-        </p:nvSpPr>
-        <p:spPr>
-          <a:xfrm>
-            <a:off x="10744200" y="2944368"/>
-            <a:ext cx="822960" cy="457200"/>
-          </a:xfrm>
-          <a:prstGeom prst="rect">
-            <a:avLst/>
-          </a:prstGeom>
-          <a:noFill/>
-          <a:ln/>
-        </p:spPr>
-        <p:txBody>
-          <a:bodyPr wrap="square" lIns="0" tIns="0" rIns="0" bIns="0" rtlCol="0" anchor="t"/>
-          <a:lstStyle/>
-          <a:p>
-            <a:pPr indent="0" marL="0">
-              <a:buNone/>
-            </a:pPr>
-            <a:r>
-              <a:rPr lang="en-US" sz="1500" b="1" dirty="0">
-                <a:solidFill>
-                  <a:schemeClr val="tx2"/>
-                </a:solidFill>
-              </a:rPr>
-              <a:t>0.0%</a:t>
-            </a:r>
-            <a:endParaRPr lang="en-US" sz="1500" dirty="0"/>
-          </a:p>
-        </p:txBody>
-      </p:sp>
-      <p:sp>
-        <p:nvSpPr>
-          <p:cNvPr id="15" name="text-391"/>
-          <p:cNvSpPr txBox="1"/>
-          <p:nvPr/>
-        </p:nvSpPr>
-        <p:spPr>
-          <a:xfrm>
-            <a:off x="8412480" y="3520440"/>
-            <a:ext cx="3108960" cy="365760"/>
-          </a:xfrm>
-          <a:prstGeom prst="rect">
-            <a:avLst/>
-          </a:prstGeom>
-          <a:noFill/>
-          <a:ln/>
-        </p:spPr>
-        <p:txBody>
-          <a:bodyPr wrap="square" lIns="0" tIns="0" rIns="0" bIns="0" rtlCol="0" anchor="t"/>
-          <a:lstStyle/>
-          <a:p>
-            <a:pPr indent="0" marL="0">
-              <a:buNone/>
-            </a:pPr>
-            <a:r>
-              <a:rPr lang="en-US" sz="1500" dirty="0">
-                <a:solidFill>
-                  <a:schemeClr val="tx1"/>
-                </a:solidFill>
-              </a:rPr>
-              <a:t>2 dogs</a:t>
-            </a:r>
-            <a:endParaRPr lang="en-US" sz="1500" dirty="0"/>
-          </a:p>
-        </p:txBody>
-      </p:sp>
-      <p:sp>
-        <p:nvSpPr>
-          <p:cNvPr id="16" name="bar-bg-392"/>
-          <p:cNvSpPr/>
-          <p:nvPr/>
-        </p:nvSpPr>
-        <p:spPr>
-          <a:xfrm>
-            <a:off x="8412480" y="3904488"/>
-            <a:ext cx="2286000" cy="274320"/>
-          </a:xfrm>
-          <a:prstGeom prst="rect">
-            <a:avLst/>
-          </a:prstGeom>
-          <a:solidFill>
-            <a:schemeClr val="bg2"/>
-          </a:solidFill>
-          <a:ln/>
-        </p:spPr>
-      </p:sp>
-      <p:sp>
-        <p:nvSpPr>
-          <p:cNvPr id="17" name="bar-393"/>
-          <p:cNvSpPr/>
-          <p:nvPr/>
-        </p:nvSpPr>
-        <p:spPr>
-          <a:xfrm>
-            <a:off x="8412480" y="3904488"/>
-            <a:ext cx="36576" cy="274320"/>
-          </a:xfrm>
-          <a:prstGeom prst="rect">
-            <a:avLst/>
-          </a:prstGeom>
-          <a:solidFill>
-            <a:schemeClr val="accent6"/>
-          </a:solidFill>
-          <a:ln/>
-        </p:spPr>
-      </p:sp>
-      <p:sp>
-        <p:nvSpPr>
-          <p:cNvPr id="18" name="text-394"/>
-          <p:cNvSpPr txBox="1"/>
-          <p:nvPr/>
-        </p:nvSpPr>
-        <p:spPr>
-          <a:xfrm>
-            <a:off x="10744200" y="3813048"/>
-            <a:ext cx="822960" cy="457200"/>
-          </a:xfrm>
-          <a:prstGeom prst="rect">
-            <a:avLst/>
-          </a:prstGeom>
-          <a:noFill/>
-          <a:ln/>
-        </p:spPr>
-        <p:txBody>
-          <a:bodyPr wrap="square" lIns="0" tIns="0" rIns="0" bIns="0" rtlCol="0" anchor="t"/>
-          <a:lstStyle/>
-          <a:p>
-            <a:pPr indent="0" marL="0">
-              <a:buNone/>
-            </a:pPr>
-            <a:r>
-              <a:rPr lang="en-US" sz="1500" b="1" dirty="0">
-                <a:solidFill>
-                  <a:schemeClr val="tx2"/>
-                </a:solidFill>
-              </a:rPr>
-              <a:t>0.0%</a:t>
-            </a:r>
-            <a:endParaRPr lang="en-US" sz="1500" dirty="0"/>
-          </a:p>
-        </p:txBody>
-      </p:sp>
-      <p:sp>
-        <p:nvSpPr>
-          <p:cNvPr id="19" name="card-395"/>
-          <p:cNvSpPr/>
-          <p:nvPr/>
-        </p:nvSpPr>
-        <p:spPr>
-          <a:xfrm>
-            <a:off x="8412480" y="4480560"/>
-            <a:ext cx="3108960" cy="1508760"/>
-          </a:xfrm>
-          <a:prstGeom prst="roundRect">
-            <a:avLst>
-              <a:gd name="adj" fmla="val 8485"/>
-            </a:avLst>
-          </a:prstGeom>
-          <a:solidFill>
-            <a:schemeClr val="accent3">
-              <a:alpha val="10000"/>
-            </a:schemeClr>
-          </a:solidFill>
-          <a:ln/>
-        </p:spPr>
-      </p:sp>
-      <p:sp>
-        <p:nvSpPr>
-          <p:cNvPr id="20" name="text-396"/>
-          <p:cNvSpPr txBox="1"/>
-          <p:nvPr/>
-        </p:nvSpPr>
-        <p:spPr>
-          <a:xfrm>
-            <a:off x="8595360" y="4526280"/>
-            <a:ext cx="2788920" cy="1417320"/>
-          </a:xfrm>
-          <a:prstGeom prst="rect">
-            <a:avLst/>
-          </a:prstGeom>
-          <a:noFill/>
-          <a:ln/>
-        </p:spPr>
-        <p:txBody>
-          <a:bodyPr wrap="square" lIns="0" tIns="0" rIns="0" bIns="0" rtlCol="0" anchor="ctr"/>
-          <a:lstStyle/>
-          <a:p>
-            <a:pPr indent="0" marL="0">
-              <a:buNone/>
-            </a:pPr>
-            <a:r>
-              <a:rPr lang="en-US" sz="1400" dirty="0">
-                <a:solidFill>
-                  <a:schemeClr val="tx1"/>
-                </a:solidFill>
-              </a:rPr>
-              <a:t>정답인데 40.5%? → 쌍마다 독립 확률이라 CLIP보다 값이 ‘평평’함. 순위·비교로 읽기</a:t>
-            </a:r>
-            <a:endParaRPr lang="en-US" sz="1400" dirty="0"/>
-          </a:p>
-        </p:txBody>
-      </p:sp>
-      <p:sp>
-        <p:nvSpPr>
-          <p:cNvPr id="21" name="text-397"/>
-          <p:cNvSpPr txBox="1"/>
-          <p:nvPr/>
-        </p:nvSpPr>
-        <p:spPr>
-          <a:xfrm>
-            <a:off x="640080" y="5669280"/>
-            <a:ext cx="7498080" cy="365760"/>
-          </a:xfrm>
-          <a:prstGeom prst="rect">
-            <a:avLst/>
-          </a:prstGeom>
-          <a:noFill/>
-          <a:ln/>
-        </p:spPr>
-        <p:txBody>
-          <a:bodyPr wrap="square" lIns="0" tIns="0" rIns="0" bIns="0" rtlCol="0" anchor="t"/>
-          <a:lstStyle/>
-          <a:p>
-            <a:pPr indent="0" marL="0">
-              <a:buNone/>
-            </a:pPr>
-            <a:r>
-              <a:rPr lang="en-US" sz="1500" b="1" dirty="0">
-                <a:solidFill>
-                  <a:schemeClr val="accent4"/>
-                </a:solidFill>
-              </a:rPr>
-              <a:t>CLIP 습관 주의: softmax ✗ → sigmoid ✓ · padding="max_length" 필수</a:t>
+              <a:t> = 사진을 224×224로 변환</a:t>
             </a:r>
             <a:endParaRPr lang="en-US" sz="1500" dirty="0"/>
           </a:p>
@@ -13886,7 +13513,7 @@
                   <a:schemeClr val="tx1"/>
                 </a:solidFill>
               </a:rPr>
-              <a:t>실습 ③ 한국어 문장으로 해보기 (다국어 모델)</a:t>
+              <a:t>실습 ③ Sigmoid로 짝 확인하기</a:t>
             </a:r>
             <a:endParaRPr lang="en-US" sz="3000" dirty="0"/>
           </a:p>
@@ -13894,18 +13521,18 @@
       </p:sp>
       <p:sp>
         <p:nvSpPr>
-          <p:cNvPr id="3" name="codebg-398"/>
+          <p:cNvPr id="3" name="codebg-396"/>
           <p:cNvSpPr/>
           <p:nvPr/>
         </p:nvSpPr>
         <p:spPr>
           <a:xfrm>
-            <a:off x="640080" y="1280160"/>
-            <a:ext cx="7498080" cy="3566160"/>
+            <a:off x="640080" y="1325880"/>
+            <a:ext cx="6949440" cy="2926080"/>
           </a:xfrm>
           <a:prstGeom prst="roundRect">
             <a:avLst>
-              <a:gd name="adj" fmla="val 3077"/>
+              <a:gd name="adj" fmla="val 3750"/>
             </a:avLst>
           </a:prstGeom>
           <a:solidFill>
@@ -13916,14 +13543,14 @@
       </p:sp>
       <p:sp>
         <p:nvSpPr>
-          <p:cNvPr id="4" name="text-399"/>
+          <p:cNvPr id="4" name="text-397"/>
           <p:cNvSpPr txBox="1"/>
           <p:nvPr/>
         </p:nvSpPr>
         <p:spPr>
           <a:xfrm>
-            <a:off x="914400" y="1508760"/>
-            <a:ext cx="6949440" cy="3108960"/>
+            <a:off x="914400" y="1554480"/>
+            <a:ext cx="6400800" cy="2468880"/>
           </a:xfrm>
           <a:prstGeom prst="rect">
             <a:avLst/>
@@ -13942,7 +13569,7 @@
               <a:buNone/>
             </a:pPr>
             <a:r>
-              <a:rPr lang="en-US" sz="1400" dirty="0">
+              <a:rPr lang="en-US" sz="1200" dirty="0">
                 <a:solidFill>
                   <a:schemeClr val="bg1"/>
                 </a:solidFill>
@@ -13950,9 +13577,9 @@
                 <a:ea typeface="Courier New" pitchFamily="34" charset="-122"/>
                 <a:cs typeface="Courier New" pitchFamily="34" charset="-120"/>
               </a:rPr>
-              <a:t>ckpt = "google/siglip-base-patch16-256-multilingual"</a:t>
-            </a:r>
-            <a:endParaRPr lang="en-US" sz="1400" dirty="0"/>
+              <a:t>import torch</a:t>
+            </a:r>
+            <a:endParaRPr lang="en-US" sz="1200" dirty="0"/>
           </a:p>
           <a:p>
             <a:pPr indent="0" marL="0">
@@ -13962,7 +13589,7 @@
               <a:buNone/>
             </a:pPr>
             <a:r>
-              <a:rPr lang="en-US" sz="1400" dirty="0">
+              <a:rPr lang="en-US" sz="1200" dirty="0">
                 <a:solidFill>
                   <a:schemeClr val="bg1"/>
                 </a:solidFill>
@@ -13970,9 +13597,9 @@
                 <a:ea typeface="Courier New" pitchFamily="34" charset="-122"/>
                 <a:cs typeface="Courier New" pitchFamily="34" charset="-120"/>
               </a:rPr>
-              <a:t>processor = AutoProcessor.from_pretrained(ckpt)</a:t>
-            </a:r>
-            <a:endParaRPr lang="en-US" sz="1400" dirty="0"/>
+              <a:t> </a:t>
+            </a:r>
+            <a:endParaRPr lang="en-US" sz="1200" dirty="0"/>
           </a:p>
           <a:p>
             <a:pPr indent="0" marL="0">
@@ -13982,7 +13609,7 @@
               <a:buNone/>
             </a:pPr>
             <a:r>
-              <a:rPr lang="en-US" sz="1400" dirty="0">
+              <a:rPr lang="en-US" sz="1200" dirty="0">
                 <a:solidFill>
                   <a:schemeClr val="bg1"/>
                 </a:solidFill>
@@ -13990,9 +13617,9 @@
                 <a:ea typeface="Courier New" pitchFamily="34" charset="-122"/>
                 <a:cs typeface="Courier New" pitchFamily="34" charset="-120"/>
               </a:rPr>
-              <a:t>model = AutoModel.from_pretrained(ckpt)</a:t>
-            </a:r>
-            <a:endParaRPr lang="en-US" sz="1400" dirty="0"/>
+              <a:t>with torch.no_grad():</a:t>
+            </a:r>
+            <a:endParaRPr lang="en-US" sz="1200" dirty="0"/>
           </a:p>
           <a:p>
             <a:pPr indent="0" marL="0">
@@ -14002,7 +13629,7 @@
               <a:buNone/>
             </a:pPr>
             <a:r>
-              <a:rPr lang="en-US" sz="1400" dirty="0">
+              <a:rPr lang="en-US" sz="1200" dirty="0">
                 <a:solidFill>
                   <a:schemeClr val="bg1"/>
                 </a:solidFill>
@@ -14010,9 +13637,9 @@
                 <a:ea typeface="Courier New" pitchFamily="34" charset="-122"/>
                 <a:cs typeface="Courier New" pitchFamily="34" charset="-120"/>
               </a:rPr>
-              <a:t> </a:t>
-            </a:r>
-            <a:endParaRPr lang="en-US" sz="1400" dirty="0"/>
+              <a:t>  outputs = model(**inputs)</a:t>
+            </a:r>
+            <a:endParaRPr lang="en-US" sz="1200" dirty="0"/>
           </a:p>
           <a:p>
             <a:pPr indent="0" marL="0">
@@ -14022,7 +13649,7 @@
               <a:buNone/>
             </a:pPr>
             <a:r>
-              <a:rPr lang="en-US" sz="1400" dirty="0">
+              <a:rPr lang="en-US" sz="1200" dirty="0">
                 <a:solidFill>
                   <a:schemeClr val="bg1"/>
                 </a:solidFill>
@@ -14030,9 +13657,9 @@
                 <a:ea typeface="Courier New" pitchFamily="34" charset="-122"/>
                 <a:cs typeface="Courier New" pitchFamily="34" charset="-120"/>
               </a:rPr>
-              <a:t>texts = ["고양이 두 마리 사진", "강아지 사진", "자동차 사진"]</a:t>
-            </a:r>
-            <a:endParaRPr lang="en-US" sz="1400" dirty="0"/>
+              <a:t> </a:t>
+            </a:r>
+            <a:endParaRPr lang="en-US" sz="1200" dirty="0"/>
           </a:p>
           <a:p>
             <a:pPr indent="0" marL="0">
@@ -14042,7 +13669,7 @@
               <a:buNone/>
             </a:pPr>
             <a:r>
-              <a:rPr lang="en-US" sz="1400" dirty="0">
+              <a:rPr lang="en-US" sz="1200" dirty="0">
                 <a:solidFill>
                   <a:schemeClr val="bg1"/>
                 </a:solidFill>
@@ -14050,9 +13677,9 @@
                 <a:ea typeface="Courier New" pitchFamily="34" charset="-122"/>
                 <a:cs typeface="Courier New" pitchFamily="34" charset="-120"/>
               </a:rPr>
-              <a:t>inputs = processor(text=texts, images=image, padding="max_length",</a:t>
-            </a:r>
-            <a:endParaRPr lang="en-US" sz="1400" dirty="0"/>
+              <a:t>logits_per_image = outputs.logits_per_image</a:t>
+            </a:r>
+            <a:endParaRPr lang="en-US" sz="1200" dirty="0"/>
           </a:p>
           <a:p>
             <a:pPr indent="0" marL="0">
@@ -14062,7 +13689,7 @@
               <a:buNone/>
             </a:pPr>
             <a:r>
-              <a:rPr lang="en-US" sz="1400" dirty="0">
+              <a:rPr lang="en-US" sz="1200" dirty="0">
                 <a:solidFill>
                   <a:schemeClr val="bg1"/>
                 </a:solidFill>
@@ -14070,9 +13697,9 @@
                 <a:ea typeface="Courier New" pitchFamily="34" charset="-122"/>
                 <a:cs typeface="Courier New" pitchFamily="34" charset="-120"/>
               </a:rPr>
-              <a:t>                   return_tensors="pt")</a:t>
-            </a:r>
-            <a:endParaRPr lang="en-US" sz="1400" dirty="0"/>
+              <a:t>probs = torch.sigmoid(logits_per_image) # these are the probabilities</a:t>
+            </a:r>
+            <a:endParaRPr lang="en-US" sz="1200" dirty="0"/>
           </a:p>
           <a:p>
             <a:pPr indent="0" marL="0">
@@ -14082,7 +13709,7 @@
               <a:buNone/>
             </a:pPr>
             <a:r>
-              <a:rPr lang="en-US" sz="1400" dirty="0">
+              <a:rPr lang="en-US" sz="1200" dirty="0">
                 <a:solidFill>
                   <a:schemeClr val="bg1"/>
                 </a:solidFill>
@@ -14090,61 +13717,135 @@
                 <a:ea typeface="Courier New" pitchFamily="34" charset="-122"/>
                 <a:cs typeface="Courier New" pitchFamily="34" charset="-120"/>
               </a:rPr>
-              <a:t>with torch.no_grad():</a:t>
-            </a:r>
-            <a:endParaRPr lang="en-US" sz="1400" dirty="0"/>
-          </a:p>
-          <a:p>
-            <a:pPr indent="0" marL="0">
-              <a:lnSpc>
-                <a:spcPct val="110000"/>
-              </a:lnSpc>
-              <a:buNone/>
-            </a:pPr>
-            <a:r>
-              <a:rPr lang="en-US" sz="1400" dirty="0">
-                <a:solidFill>
-                  <a:schemeClr val="bg1"/>
+              <a:t>print(f"{probs[0][0]:.1%} that image 0 is '{texts[0]}'")</a:t>
+            </a:r>
+            <a:endParaRPr lang="en-US" sz="1200" dirty="0"/>
+          </a:p>
+        </p:txBody>
+      </p:sp>
+      <p:sp>
+        <p:nvSpPr>
+          <p:cNvPr id="5" name="outbg-398"/>
+          <p:cNvSpPr/>
+          <p:nvPr/>
+        </p:nvSpPr>
+        <p:spPr>
+          <a:xfrm>
+            <a:off x="640080" y="4389120"/>
+            <a:ext cx="6949440" cy="1234440"/>
+          </a:xfrm>
+          <a:prstGeom prst="roundRect">
+            <a:avLst>
+              <a:gd name="adj" fmla="val 5926"/>
+            </a:avLst>
+          </a:prstGeom>
+          <a:solidFill>
+            <a:schemeClr val="bg2"/>
+          </a:solidFill>
+          <a:ln w="12700">
+            <a:solidFill>
+              <a:schemeClr val="accent6"/>
+            </a:solidFill>
+            <a:prstDash val="solid"/>
+          </a:ln>
+        </p:spPr>
+      </p:sp>
+      <p:sp>
+        <p:nvSpPr>
+          <p:cNvPr id="6" name="text-399"/>
+          <p:cNvSpPr txBox="1"/>
+          <p:nvPr/>
+        </p:nvSpPr>
+        <p:spPr>
+          <a:xfrm>
+            <a:off x="822960" y="4480560"/>
+            <a:ext cx="6583680" cy="1051560"/>
+          </a:xfrm>
+          <a:prstGeom prst="rect">
+            <a:avLst/>
+          </a:prstGeom>
+          <a:noFill/>
+          <a:ln/>
+        </p:spPr>
+        <p:txBody>
+          <a:bodyPr wrap="square" lIns="0" tIns="0" rIns="0" bIns="0" rtlCol="0" anchor="ctr"/>
+          <a:lstStyle/>
+          <a:p>
+            <a:pPr indent="0" marL="0">
+              <a:buNone/>
+            </a:pPr>
+            <a:r>
+              <a:rPr lang="en-US" sz="1100" b="1" dirty="0">
+                <a:solidFill>
+                  <a:schemeClr val="tx2"/>
+                </a:solidFill>
+              </a:rPr>
+              <a:t>출력</a:t>
+            </a:r>
+            <a:endParaRPr lang="en-US" sz="1300" dirty="0"/>
+          </a:p>
+          <a:p>
+            <a:pPr indent="0" marL="0">
+              <a:buNone/>
+            </a:pPr>
+            <a:r>
+              <a:rPr lang="en-US" sz="1300" dirty="0">
+                <a:solidFill>
+                  <a:schemeClr val="tx1"/>
                 </a:solidFill>
                 <a:latin typeface="Courier New" pitchFamily="34" charset="0"/>
                 <a:ea typeface="Courier New" pitchFamily="34" charset="-122"/>
                 <a:cs typeface="Courier New" pitchFamily="34" charset="-120"/>
               </a:rPr>
-              <a:t>  outputs = model(**inputs)</a:t>
-            </a:r>
-            <a:endParaRPr lang="en-US" sz="1400" dirty="0"/>
-          </a:p>
-          <a:p>
-            <a:pPr indent="0" marL="0">
-              <a:lnSpc>
-                <a:spcPct val="110000"/>
-              </a:lnSpc>
-              <a:buNone/>
-            </a:pPr>
-            <a:r>
-              <a:rPr lang="en-US" sz="1400" dirty="0">
-                <a:solidFill>
-                  <a:schemeClr val="bg1"/>
+              <a:t>32.0% that image 0 is 'a photo of 2 cats'</a:t>
+            </a:r>
+            <a:endParaRPr lang="en-US" sz="1300" dirty="0"/>
+          </a:p>
+          <a:p>
+            <a:pPr indent="0" marL="0">
+              <a:buNone/>
+            </a:pPr>
+            <a:r>
+              <a:rPr lang="en-US" sz="1300" dirty="0">
+                <a:solidFill>
+                  <a:schemeClr val="tx1"/>
                 </a:solidFill>
                 <a:latin typeface="Courier New" pitchFamily="34" charset="0"/>
                 <a:ea typeface="Courier New" pitchFamily="34" charset="-122"/>
                 <a:cs typeface="Courier New" pitchFamily="34" charset="-120"/>
               </a:rPr>
-              <a:t>probs = torch.sigmoid(outputs.logits_per_image)</a:t>
-            </a:r>
-            <a:endParaRPr lang="en-US" sz="1400" dirty="0"/>
-          </a:p>
-        </p:txBody>
-      </p:sp>
-      <p:sp>
-        <p:nvSpPr>
-          <p:cNvPr id="5" name="text-400"/>
+              <a:t>0.0% that image 0 is 'a photo of 2 hamburgers'</a:t>
+            </a:r>
+            <a:endParaRPr lang="en-US" sz="1300" dirty="0"/>
+          </a:p>
+          <a:p>
+            <a:pPr indent="0" marL="0">
+              <a:buNone/>
+            </a:pPr>
+            <a:r>
+              <a:rPr lang="en-US" sz="1300" dirty="0">
+                <a:solidFill>
+                  <a:schemeClr val="tx1"/>
+                </a:solidFill>
+                <a:latin typeface="Courier New" pitchFamily="34" charset="0"/>
+                <a:ea typeface="Courier New" pitchFamily="34" charset="-122"/>
+                <a:cs typeface="Courier New" pitchFamily="34" charset="-120"/>
+              </a:rPr>
+              <a:t>0.0% that image 0 is 'a photo of 2 dogs'</a:t>
+            </a:r>
+            <a:endParaRPr lang="en-US" sz="1300" dirty="0"/>
+          </a:p>
+        </p:txBody>
+      </p:sp>
+      <p:sp>
+        <p:nvSpPr>
+          <p:cNvPr id="7" name="text-400"/>
           <p:cNvSpPr txBox="1"/>
           <p:nvPr/>
         </p:nvSpPr>
         <p:spPr>
           <a:xfrm>
-            <a:off x="640080" y="4937760"/>
+            <a:off x="640080" y="5760720"/>
             <a:ext cx="7315200" cy="292608"/>
           </a:xfrm>
           <a:prstGeom prst="rect">
@@ -14181,117 +13882,15 @@
                   </a:extLst>
                 </a:hlinkClick>
               </a:rPr>
-              <a:t>메인 노트북의 mSigLIP 예제에서 문장만 한국어로 바꿈</a:t>
+              <a:t>Inference with (multilingual) SigLIP 노트북 · 직접 실행 (base-patch16-224)</a:t>
             </a:r>
             <a:endParaRPr lang="en-US" sz="1100" dirty="0"/>
           </a:p>
         </p:txBody>
-      </p:sp>
-      <p:sp>
-        <p:nvSpPr>
-          <p:cNvPr id="6" name="card-401"/>
-          <p:cNvSpPr/>
-          <p:nvPr/>
-        </p:nvSpPr>
-        <p:spPr>
-          <a:xfrm>
-            <a:off x="640080" y="5349240"/>
-            <a:ext cx="7498080" cy="731520"/>
-          </a:xfrm>
-          <a:prstGeom prst="roundRect">
-            <a:avLst>
-              <a:gd name="adj" fmla="val 17500"/>
-            </a:avLst>
-          </a:prstGeom>
-          <a:solidFill>
-            <a:schemeClr val="bg2"/>
-          </a:solidFill>
-          <a:ln/>
-        </p:spPr>
-      </p:sp>
-      <p:sp>
-        <p:nvSpPr>
-          <p:cNvPr id="7" name="text-402"/>
-          <p:cNvSpPr txBox="1"/>
-          <p:nvPr/>
-        </p:nvSpPr>
-        <p:spPr>
-          <a:xfrm>
-            <a:off x="868680" y="5349240"/>
-            <a:ext cx="7132320" cy="731520"/>
-          </a:xfrm>
-          <a:prstGeom prst="rect">
-            <a:avLst/>
-          </a:prstGeom>
-          <a:noFill/>
-          <a:ln/>
-        </p:spPr>
-        <p:txBody>
-          <a:bodyPr wrap="square" lIns="0" tIns="0" rIns="0" bIns="0" rtlCol="0" anchor="ctr"/>
-          <a:lstStyle/>
-          <a:p>
-            <a:pPr indent="0" marL="0">
-              <a:buNone/>
-            </a:pPr>
-            <a:r>
-              <a:rPr lang="en-US" sz="1400" dirty="0">
-                <a:solidFill>
-                  <a:schemeClr val="tx2"/>
-                </a:solidFill>
-              </a:rPr>
-              <a:t>노트북 원래 예시(프랑스어 “une photo de 2 chats”) 결과: 50.4% / 나머지 0.0%</a:t>
-            </a:r>
-            <a:endParaRPr lang="en-US" sz="1400" dirty="0"/>
-          </a:p>
-        </p:txBody>
-      </p:sp>
-      <p:sp>
-        <p:nvSpPr>
-          <p:cNvPr id="8" name="card-403"/>
-          <p:cNvSpPr/>
-          <p:nvPr/>
-        </p:nvSpPr>
-        <p:spPr>
-          <a:xfrm>
-            <a:off x="8412480" y="1280160"/>
-            <a:ext cx="3108960" cy="2194560"/>
-          </a:xfrm>
-          <a:prstGeom prst="roundRect">
-            <a:avLst>
-              <a:gd name="adj" fmla="val 5833"/>
-            </a:avLst>
-          </a:prstGeom>
-          <a:solidFill>
-            <a:schemeClr val="accent3">
-              <a:alpha val="10000"/>
-            </a:schemeClr>
-          </a:solidFill>
-          <a:ln/>
-        </p:spPr>
-      </p:sp>
-      <p:sp>
-        <p:nvSpPr>
-          <p:cNvPr id="9" name="circle-404"/>
-          <p:cNvSpPr/>
-          <p:nvPr/>
-        </p:nvSpPr>
-        <p:spPr>
-          <a:xfrm>
-            <a:off x="8641080" y="1463040"/>
-            <a:ext cx="640080" cy="640080"/>
-          </a:xfrm>
-          <a:prstGeom prst="ellipse">
-            <a:avLst/>
-          </a:prstGeom>
-          <a:solidFill>
-            <a:schemeClr val="accent3"/>
-          </a:solidFill>
-          <a:ln/>
-        </p:spPr>
       </p:sp>
       <p:pic>
         <p:nvPicPr>
-          <p:cNvPr id="10" name="icon-FaLanguage-405" descr="FaLanguage">    </p:cNvPr>
+          <p:cNvPr id="8" name="coco-small" descr="COCO 고양이 사진">    </p:cNvPr>
           <p:cNvPicPr>
             <a:picLocks noChangeAspect="1"/>
           </p:cNvPicPr>
@@ -14305,8 +13904,8 @@
         </p:blipFill>
         <p:spPr>
           <a:xfrm>
-            <a:off x="8807501" y="1629461"/>
-            <a:ext cx="307238" cy="307238"/>
+            <a:off x="7955280" y="1325880"/>
+            <a:ext cx="1463040" cy="1097280"/>
           </a:xfrm>
           <a:prstGeom prst="rect">
             <a:avLst/>
@@ -14315,14 +13914,14 @@
       </p:pic>
       <p:sp>
         <p:nvSpPr>
-          <p:cNvPr id="11" name="text-406"/>
+          <p:cNvPr id="9" name="text-401"/>
           <p:cNvSpPr txBox="1"/>
           <p:nvPr/>
         </p:nvSpPr>
         <p:spPr>
           <a:xfrm>
-            <a:off x="9418320" y="1463040"/>
-            <a:ext cx="2011680" cy="640080"/>
+            <a:off x="9555480" y="1463040"/>
+            <a:ext cx="2011680" cy="822960"/>
           </a:xfrm>
           <a:prstGeom prst="rect">
             <a:avLst/>
@@ -14338,27 +13937,27 @@
               <a:buNone/>
             </a:pPr>
             <a:r>
-              <a:rPr lang="en-US" sz="1800" b="1" dirty="0">
-                <a:solidFill>
-                  <a:schemeClr val="accent3"/>
-                </a:solidFill>
-              </a:rPr>
-              <a:t>mSigLIP</a:t>
-            </a:r>
-            <a:endParaRPr lang="en-US" sz="1800" dirty="0"/>
-          </a:p>
-        </p:txBody>
-      </p:sp>
-      <p:sp>
-        <p:nvSpPr>
-          <p:cNvPr id="12" name="text-407"/>
+              <a:rPr lang="en-US" sz="1500" b="1" dirty="0">
+                <a:solidFill>
+                  <a:schemeClr val="accent4"/>
+                </a:solidFill>
+              </a:rPr>
+              <a:t>softmax ✗ → sigmoid ✓</a:t>
+            </a:r>
+            <a:endParaRPr lang="en-US" sz="1500" dirty="0"/>
+          </a:p>
+        </p:txBody>
+      </p:sp>
+      <p:sp>
+        <p:nvSpPr>
+          <p:cNvPr id="10" name="text-402"/>
           <p:cNvSpPr txBox="1"/>
           <p:nvPr/>
         </p:nvSpPr>
         <p:spPr>
           <a:xfrm>
-            <a:off x="8641080" y="2240280"/>
-            <a:ext cx="2697480" cy="1097280"/>
+            <a:off x="7955280" y="2606040"/>
+            <a:ext cx="3566160" cy="347472"/>
           </a:xfrm>
           <a:prstGeom prst="rect">
             <a:avLst/>
@@ -14374,36 +13973,336 @@
               <a:buNone/>
             </a:pPr>
             <a:r>
-              <a:rPr lang="en-US" sz="1400" dirty="0">
+              <a:rPr lang="en-US" sz="1500" b="1" dirty="0">
                 <a:solidFill>
                   <a:schemeClr val="tx1"/>
                 </a:solidFill>
               </a:rPr>
-              <a:t>영어로 거르지 않은 WebLI 데이터로 학습, 어휘 25만 토큰</a:t>
-            </a:r>
-            <a:endParaRPr lang="en-US" sz="1400" dirty="0"/>
-          </a:p>
-        </p:txBody>
-      </p:sp>
-      <p:sp>
-        <p:nvSpPr>
-          <p:cNvPr id="13" name="card-408"/>
+              <a:t>2 cats</a:t>
+            </a:r>
+            <a:endParaRPr lang="en-US" sz="1500" dirty="0"/>
+          </a:p>
+        </p:txBody>
+      </p:sp>
+      <p:sp>
+        <p:nvSpPr>
+          <p:cNvPr id="11" name="bar-bg-403"/>
           <p:cNvSpPr/>
           <p:nvPr/>
         </p:nvSpPr>
         <p:spPr>
           <a:xfrm>
-            <a:off x="8412480" y="3657600"/>
-            <a:ext cx="3108960" cy="2423160"/>
+            <a:off x="7955280" y="2990088"/>
+            <a:ext cx="2651760" cy="274320"/>
+          </a:xfrm>
+          <a:prstGeom prst="rect">
+            <a:avLst/>
+          </a:prstGeom>
+          <a:solidFill>
+            <a:schemeClr val="bg2"/>
+          </a:solidFill>
+          <a:ln/>
+        </p:spPr>
+      </p:sp>
+      <p:sp>
+        <p:nvSpPr>
+          <p:cNvPr id="12" name="bar-404"/>
+          <p:cNvSpPr/>
+          <p:nvPr/>
+        </p:nvSpPr>
+        <p:spPr>
+          <a:xfrm>
+            <a:off x="7955280" y="2990088"/>
+            <a:ext cx="848563" cy="274320"/>
+          </a:xfrm>
+          <a:prstGeom prst="rect">
+            <a:avLst/>
+          </a:prstGeom>
+          <a:solidFill>
+            <a:schemeClr val="accent5"/>
+          </a:solidFill>
+          <a:ln/>
+        </p:spPr>
+      </p:sp>
+      <p:sp>
+        <p:nvSpPr>
+          <p:cNvPr id="13" name="text-405"/>
+          <p:cNvSpPr txBox="1"/>
+          <p:nvPr/>
+        </p:nvSpPr>
+        <p:spPr>
+          <a:xfrm>
+            <a:off x="10652760" y="2898648"/>
+            <a:ext cx="868680" cy="457200"/>
+          </a:xfrm>
+          <a:prstGeom prst="rect">
+            <a:avLst/>
+          </a:prstGeom>
+          <a:noFill/>
+          <a:ln/>
+        </p:spPr>
+        <p:txBody>
+          <a:bodyPr wrap="square" lIns="0" tIns="0" rIns="0" bIns="0" rtlCol="0" anchor="t"/>
+          <a:lstStyle/>
+          <a:p>
+            <a:pPr algn="r" indent="0" marL="0">
+              <a:buNone/>
+            </a:pPr>
+            <a:r>
+              <a:rPr lang="en-US" sz="1600" b="1" dirty="0">
+                <a:solidFill>
+                  <a:schemeClr val="accent5"/>
+                </a:solidFill>
+              </a:rPr>
+              <a:t>32.0%</a:t>
+            </a:r>
+            <a:endParaRPr lang="en-US" sz="1600" dirty="0"/>
+          </a:p>
+        </p:txBody>
+      </p:sp>
+      <p:sp>
+        <p:nvSpPr>
+          <p:cNvPr id="14" name="text-406"/>
+          <p:cNvSpPr txBox="1"/>
+          <p:nvPr/>
+        </p:nvSpPr>
+        <p:spPr>
+          <a:xfrm>
+            <a:off x="7955280" y="3337560"/>
+            <a:ext cx="3566160" cy="347472"/>
+          </a:xfrm>
+          <a:prstGeom prst="rect">
+            <a:avLst/>
+          </a:prstGeom>
+          <a:noFill/>
+          <a:ln/>
+        </p:spPr>
+        <p:txBody>
+          <a:bodyPr wrap="square" lIns="0" tIns="0" rIns="0" bIns="0" rtlCol="0" anchor="t"/>
+          <a:lstStyle/>
+          <a:p>
+            <a:pPr indent="0" marL="0">
+              <a:buNone/>
+            </a:pPr>
+            <a:r>
+              <a:rPr lang="en-US" sz="1500" dirty="0">
+                <a:solidFill>
+                  <a:schemeClr val="tx1"/>
+                </a:solidFill>
+              </a:rPr>
+              <a:t>2 hamburgers</a:t>
+            </a:r>
+            <a:endParaRPr lang="en-US" sz="1500" dirty="0"/>
+          </a:p>
+        </p:txBody>
+      </p:sp>
+      <p:sp>
+        <p:nvSpPr>
+          <p:cNvPr id="15" name="bar-bg-407"/>
+          <p:cNvSpPr/>
+          <p:nvPr/>
+        </p:nvSpPr>
+        <p:spPr>
+          <a:xfrm>
+            <a:off x="7955280" y="3721608"/>
+            <a:ext cx="2651760" cy="274320"/>
+          </a:xfrm>
+          <a:prstGeom prst="rect">
+            <a:avLst/>
+          </a:prstGeom>
+          <a:solidFill>
+            <a:schemeClr val="bg2"/>
+          </a:solidFill>
+          <a:ln/>
+        </p:spPr>
+      </p:sp>
+      <p:sp>
+        <p:nvSpPr>
+          <p:cNvPr id="16" name="bar-408"/>
+          <p:cNvSpPr/>
+          <p:nvPr/>
+        </p:nvSpPr>
+        <p:spPr>
+          <a:xfrm>
+            <a:off x="7955280" y="3721608"/>
+            <a:ext cx="36576" cy="274320"/>
+          </a:xfrm>
+          <a:prstGeom prst="rect">
+            <a:avLst/>
+          </a:prstGeom>
+          <a:solidFill>
+            <a:schemeClr val="accent6"/>
+          </a:solidFill>
+          <a:ln/>
+        </p:spPr>
+      </p:sp>
+      <p:sp>
+        <p:nvSpPr>
+          <p:cNvPr id="17" name="text-409"/>
+          <p:cNvSpPr txBox="1"/>
+          <p:nvPr/>
+        </p:nvSpPr>
+        <p:spPr>
+          <a:xfrm>
+            <a:off x="10652760" y="3630168"/>
+            <a:ext cx="868680" cy="457200"/>
+          </a:xfrm>
+          <a:prstGeom prst="rect">
+            <a:avLst/>
+          </a:prstGeom>
+          <a:noFill/>
+          <a:ln/>
+        </p:spPr>
+        <p:txBody>
+          <a:bodyPr wrap="square" lIns="0" tIns="0" rIns="0" bIns="0" rtlCol="0" anchor="t"/>
+          <a:lstStyle/>
+          <a:p>
+            <a:pPr algn="r" indent="0" marL="0">
+              <a:buNone/>
+            </a:pPr>
+            <a:r>
+              <a:rPr lang="en-US" sz="1600" b="1" dirty="0">
+                <a:solidFill>
+                  <a:schemeClr val="tx2"/>
+                </a:solidFill>
+              </a:rPr>
+              <a:t>0.0%</a:t>
+            </a:r>
+            <a:endParaRPr lang="en-US" sz="1600" dirty="0"/>
+          </a:p>
+        </p:txBody>
+      </p:sp>
+      <p:sp>
+        <p:nvSpPr>
+          <p:cNvPr id="18" name="text-410"/>
+          <p:cNvSpPr txBox="1"/>
+          <p:nvPr/>
+        </p:nvSpPr>
+        <p:spPr>
+          <a:xfrm>
+            <a:off x="7955280" y="4069080"/>
+            <a:ext cx="3566160" cy="347472"/>
+          </a:xfrm>
+          <a:prstGeom prst="rect">
+            <a:avLst/>
+          </a:prstGeom>
+          <a:noFill/>
+          <a:ln/>
+        </p:spPr>
+        <p:txBody>
+          <a:bodyPr wrap="square" lIns="0" tIns="0" rIns="0" bIns="0" rtlCol="0" anchor="t"/>
+          <a:lstStyle/>
+          <a:p>
+            <a:pPr indent="0" marL="0">
+              <a:buNone/>
+            </a:pPr>
+            <a:r>
+              <a:rPr lang="en-US" sz="1500" dirty="0">
+                <a:solidFill>
+                  <a:schemeClr val="tx1"/>
+                </a:solidFill>
+              </a:rPr>
+              <a:t>2 dogs</a:t>
+            </a:r>
+            <a:endParaRPr lang="en-US" sz="1500" dirty="0"/>
+          </a:p>
+        </p:txBody>
+      </p:sp>
+      <p:sp>
+        <p:nvSpPr>
+          <p:cNvPr id="19" name="bar-bg-411"/>
+          <p:cNvSpPr/>
+          <p:nvPr/>
+        </p:nvSpPr>
+        <p:spPr>
+          <a:xfrm>
+            <a:off x="7955280" y="4453128"/>
+            <a:ext cx="2651760" cy="274320"/>
+          </a:xfrm>
+          <a:prstGeom prst="rect">
+            <a:avLst/>
+          </a:prstGeom>
+          <a:solidFill>
+            <a:schemeClr val="bg2"/>
+          </a:solidFill>
+          <a:ln/>
+        </p:spPr>
+      </p:sp>
+      <p:sp>
+        <p:nvSpPr>
+          <p:cNvPr id="20" name="bar-412"/>
+          <p:cNvSpPr/>
+          <p:nvPr/>
+        </p:nvSpPr>
+        <p:spPr>
+          <a:xfrm>
+            <a:off x="7955280" y="4453128"/>
+            <a:ext cx="36576" cy="274320"/>
+          </a:xfrm>
+          <a:prstGeom prst="rect">
+            <a:avLst/>
+          </a:prstGeom>
+          <a:solidFill>
+            <a:schemeClr val="accent6"/>
+          </a:solidFill>
+          <a:ln/>
+        </p:spPr>
+      </p:sp>
+      <p:sp>
+        <p:nvSpPr>
+          <p:cNvPr id="21" name="text-413"/>
+          <p:cNvSpPr txBox="1"/>
+          <p:nvPr/>
+        </p:nvSpPr>
+        <p:spPr>
+          <a:xfrm>
+            <a:off x="10652760" y="4361688"/>
+            <a:ext cx="868680" cy="457200"/>
+          </a:xfrm>
+          <a:prstGeom prst="rect">
+            <a:avLst/>
+          </a:prstGeom>
+          <a:noFill/>
+          <a:ln/>
+        </p:spPr>
+        <p:txBody>
+          <a:bodyPr wrap="square" lIns="0" tIns="0" rIns="0" bIns="0" rtlCol="0" anchor="t"/>
+          <a:lstStyle/>
+          <a:p>
+            <a:pPr algn="r" indent="0" marL="0">
+              <a:buNone/>
+            </a:pPr>
+            <a:r>
+              <a:rPr lang="en-US" sz="1600" b="1" dirty="0">
+                <a:solidFill>
+                  <a:schemeClr val="tx2"/>
+                </a:solidFill>
+              </a:rPr>
+              <a:t>0.0%</a:t>
+            </a:r>
+            <a:endParaRPr lang="en-US" sz="1600" dirty="0"/>
+          </a:p>
+        </p:txBody>
+      </p:sp>
+      <p:sp>
+        <p:nvSpPr>
+          <p:cNvPr id="22" name="card-414"/>
+          <p:cNvSpPr/>
+          <p:nvPr/>
+        </p:nvSpPr>
+        <p:spPr>
+          <a:xfrm>
+            <a:off x="7955280" y="4846320"/>
+            <a:ext cx="3566160" cy="1188720"/>
           </a:xfrm>
           <a:prstGeom prst="roundRect">
             <a:avLst>
-              <a:gd name="adj" fmla="val 5283"/>
+              <a:gd name="adj" fmla="val 10769"/>
             </a:avLst>
           </a:prstGeom>
           <a:solidFill>
-            <a:schemeClr val="accent4">
-              <a:alpha val="8000"/>
+            <a:schemeClr val="accent3">
+              <a:alpha val="10000"/>
             </a:schemeClr>
           </a:solidFill>
           <a:ln/>
@@ -14411,58 +14310,14 @@
       </p:sp>
       <p:sp>
         <p:nvSpPr>
-          <p:cNvPr id="14" name="circle-409"/>
-          <p:cNvSpPr/>
-          <p:nvPr/>
-        </p:nvSpPr>
-        <p:spPr>
-          <a:xfrm>
-            <a:off x="8641080" y="3840480"/>
-            <a:ext cx="548640" cy="548640"/>
-          </a:xfrm>
-          <a:prstGeom prst="ellipse">
-            <a:avLst/>
-          </a:prstGeom>
-          <a:solidFill>
-            <a:schemeClr val="accent4"/>
-          </a:solidFill>
-          <a:ln/>
-        </p:spPr>
-      </p:sp>
-      <p:pic>
-        <p:nvPicPr>
-          <p:cNvPr id="15" name="icon-FaExclamationTriangle-410" descr="FaExclamationTriangle">    </p:cNvPr>
-          <p:cNvPicPr>
-            <a:picLocks noChangeAspect="1"/>
-          </p:cNvPicPr>
-          <p:nvPr/>
-        </p:nvPicPr>
-        <p:blipFill>
-          <a:blip r:embed="rId3"/>
-          <a:stretch>
-            <a:fillRect/>
-          </a:stretch>
-        </p:blipFill>
-        <p:spPr>
-          <a:xfrm>
-            <a:off x="8783726" y="3983126"/>
-            <a:ext cx="263347" cy="263347"/>
-          </a:xfrm>
-          <a:prstGeom prst="rect">
-            <a:avLst/>
-          </a:prstGeom>
-        </p:spPr>
-      </p:pic>
-      <p:sp>
-        <p:nvSpPr>
-          <p:cNvPr id="16" name="text-411"/>
+          <p:cNvPr id="23" name="text-415"/>
           <p:cNvSpPr txBox="1"/>
           <p:nvPr/>
         </p:nvSpPr>
         <p:spPr>
           <a:xfrm>
-            <a:off x="9326880" y="3840480"/>
-            <a:ext cx="2103120" cy="548640"/>
+            <a:off x="8138160" y="4846320"/>
+            <a:ext cx="3246120" cy="1188720"/>
           </a:xfrm>
           <a:prstGeom prst="rect">
             <a:avLst/>
@@ -14478,48 +14333,12 @@
               <a:buNone/>
             </a:pPr>
             <a:r>
-              <a:rPr lang="en-US" sz="1600" b="1" dirty="0">
-                <a:solidFill>
-                  <a:schemeClr val="accent4"/>
-                </a:solidFill>
-              </a:rPr>
-              <a:t>노트북 주의</a:t>
-            </a:r>
-            <a:endParaRPr lang="en-US" sz="1600" dirty="0"/>
-          </a:p>
-        </p:txBody>
-      </p:sp>
-      <p:sp>
-        <p:nvSpPr>
-          <p:cNvPr id="17" name="text-412"/>
-          <p:cNvSpPr txBox="1"/>
-          <p:nvPr/>
-        </p:nvSpPr>
-        <p:spPr>
-          <a:xfrm>
-            <a:off x="8641080" y="4480560"/>
-            <a:ext cx="2697480" cy="1463040"/>
-          </a:xfrm>
-          <a:prstGeom prst="rect">
-            <a:avLst/>
-          </a:prstGeom>
-          <a:noFill/>
-          <a:ln/>
-        </p:spPr>
-        <p:txBody>
-          <a:bodyPr wrap="square" lIns="0" tIns="0" rIns="0" bIns="0" rtlCol="0" anchor="t"/>
-          <a:lstStyle/>
-          <a:p>
-            <a:pPr indent="0" marL="0">
-              <a:buNone/>
-            </a:pPr>
-            <a:r>
               <a:rPr lang="en-US" sz="1400" dirty="0">
                 <a:solidFill>
                   <a:schemeClr val="tx1"/>
                 </a:solidFill>
               </a:rPr>
-              <a:t>다국어 셀이 so400m(영어) 모델을 다시 불러옴 → 이름을 multilingual로 바꿔서 실행</a:t>
+              <a:t>정답인데 32%? → 쌍마다 따로 해석하는 확률이라 CLIP보다 ‘평평’함. 다른 캡션과 비교해서 읽기</a:t>
             </a:r>
             <a:endParaRPr lang="en-US" sz="1400" dirty="0"/>
           </a:p>
@@ -14627,7 +14446,7 @@
                   <a:schemeClr val="tx1"/>
                 </a:solidFill>
               </a:rPr>
-              <a:t>실습 ④ 여러 장 저장 → 문장으로 찾기 (5주차 연결)</a:t>
+              <a:t>실습 ④ 다른 언어로 물어보기</a:t>
             </a:r>
             <a:endParaRPr lang="en-US" sz="3000" dirty="0"/>
           </a:p>
@@ -14635,18 +14454,18 @@
       </p:sp>
       <p:sp>
         <p:nvSpPr>
-          <p:cNvPr id="3" name="codebg-413"/>
+          <p:cNvPr id="3" name="codebg-416"/>
           <p:cNvSpPr/>
           <p:nvPr/>
         </p:nvSpPr>
         <p:spPr>
           <a:xfrm>
-            <a:off x="640080" y="1234440"/>
-            <a:ext cx="7498080" cy="4709160"/>
+            <a:off x="640080" y="1325880"/>
+            <a:ext cx="6949440" cy="3429000"/>
           </a:xfrm>
           <a:prstGeom prst="roundRect">
             <a:avLst>
-              <a:gd name="adj" fmla="val 2330"/>
+              <a:gd name="adj" fmla="val 3200"/>
             </a:avLst>
           </a:prstGeom>
           <a:solidFill>
@@ -14657,14 +14476,14 @@
       </p:sp>
       <p:sp>
         <p:nvSpPr>
-          <p:cNvPr id="4" name="text-414"/>
+          <p:cNvPr id="4" name="text-417"/>
           <p:cNvSpPr txBox="1"/>
           <p:nvPr/>
         </p:nvSpPr>
         <p:spPr>
           <a:xfrm>
-            <a:off x="914400" y="1463040"/>
-            <a:ext cx="6949440" cy="4251960"/>
+            <a:off x="914400" y="1554480"/>
+            <a:ext cx="6400800" cy="2971800"/>
           </a:xfrm>
           <a:prstGeom prst="rect">
             <a:avLst/>
@@ -14683,17 +14502,17 @@
               <a:buNone/>
             </a:pPr>
             <a:r>
-              <a:rPr lang="en-US" sz="1100" dirty="0">
-                <a:solidFill>
-                  <a:schemeClr val="bg1"/>
+              <a:rPr lang="en-US" sz="1200" dirty="0">
+                <a:solidFill>
+                  <a:srgbClr val="FBBF24"/>
                 </a:solidFill>
                 <a:latin typeface="Courier New" pitchFamily="34" charset="0"/>
                 <a:ea typeface="Courier New" pitchFamily="34" charset="-122"/>
                 <a:cs typeface="Courier New" pitchFamily="34" charset="-120"/>
               </a:rPr>
-              <a:t>import faiss, numpy as np</a:t>
-            </a:r>
-            <a:endParaRPr lang="en-US" sz="1100" dirty="0"/>
+              <a:t># from transformers import AutoProcessor, AutoModel</a:t>
+            </a:r>
+            <a:endParaRPr lang="en-US" sz="1200" dirty="0"/>
           </a:p>
           <a:p>
             <a:pPr indent="0" marL="0">
@@ -14703,17 +14522,17 @@
               <a:buNone/>
             </a:pPr>
             <a:r>
-              <a:rPr lang="en-US" sz="1100" dirty="0">
-                <a:solidFill>
-                  <a:schemeClr val="bg1"/>
+              <a:rPr lang="en-US" sz="1200" dirty="0">
+                <a:solidFill>
+                  <a:srgbClr val="FBBF24"/>
                 </a:solidFill>
                 <a:latin typeface="Courier New" pitchFamily="34" charset="0"/>
                 <a:ea typeface="Courier New" pitchFamily="34" charset="-122"/>
                 <a:cs typeface="Courier New" pitchFamily="34" charset="-120"/>
               </a:rPr>
-              <a:t> </a:t>
-            </a:r>
-            <a:endParaRPr lang="en-US" sz="1100" dirty="0"/>
+              <a:t># processor = AutoProcessor.from_pretrained(</a:t>
+            </a:r>
+            <a:endParaRPr lang="en-US" sz="1200" dirty="0"/>
           </a:p>
           <a:p>
             <a:pPr indent="0" marL="0">
@@ -14723,17 +14542,17 @@
               <a:buNone/>
             </a:pPr>
             <a:r>
-              <a:rPr lang="en-US" sz="1100" dirty="0">
-                <a:solidFill>
-                  <a:schemeClr val="bg1"/>
+              <a:rPr lang="en-US" sz="1200" dirty="0">
+                <a:solidFill>
+                  <a:srgbClr val="FBBF24"/>
                 </a:solidFill>
                 <a:latin typeface="Courier New" pitchFamily="34" charset="0"/>
                 <a:ea typeface="Courier New" pitchFamily="34" charset="-122"/>
                 <a:cs typeface="Courier New" pitchFamily="34" charset="-120"/>
               </a:rPr>
-              <a:t>def embed_siglip(image):</a:t>
-            </a:r>
-            <a:endParaRPr lang="en-US" sz="1100" dirty="0"/>
+              <a:t>#     "google/siglip-so400m-patch14-384")</a:t>
+            </a:r>
+            <a:endParaRPr lang="en-US" sz="1200" dirty="0"/>
           </a:p>
           <a:p>
             <a:pPr indent="0" marL="0">
@@ -14743,17 +14562,17 @@
               <a:buNone/>
             </a:pPr>
             <a:r>
-              <a:rPr lang="en-US" sz="1100" dirty="0">
-                <a:solidFill>
-                  <a:schemeClr val="bg1"/>
+              <a:rPr lang="en-US" sz="1200" dirty="0">
+                <a:solidFill>
+                  <a:srgbClr val="FBBF24"/>
                 </a:solidFill>
                 <a:latin typeface="Courier New" pitchFamily="34" charset="0"/>
                 <a:ea typeface="Courier New" pitchFamily="34" charset="-122"/>
                 <a:cs typeface="Courier New" pitchFamily="34" charset="-120"/>
               </a:rPr>
-              <a:t>    with torch.no_grad():</a:t>
-            </a:r>
-            <a:endParaRPr lang="en-US" sz="1100" dirty="0"/>
+              <a:t># model = AutoModel.from_pretrained(</a:t>
+            </a:r>
+            <a:endParaRPr lang="en-US" sz="1200" dirty="0"/>
           </a:p>
           <a:p>
             <a:pPr indent="0" marL="0">
@@ -14763,17 +14582,17 @@
               <a:buNone/>
             </a:pPr>
             <a:r>
-              <a:rPr lang="en-US" sz="1100" dirty="0">
-                <a:solidFill>
-                  <a:schemeClr val="bg1"/>
+              <a:rPr lang="en-US" sz="1200" dirty="0">
+                <a:solidFill>
+                  <a:srgbClr val="FBBF24"/>
                 </a:solidFill>
                 <a:latin typeface="Courier New" pitchFamily="34" charset="0"/>
                 <a:ea typeface="Courier New" pitchFamily="34" charset="-122"/>
                 <a:cs typeface="Courier New" pitchFamily="34" charset="-120"/>
               </a:rPr>
-              <a:t>        inputs = processor(images=image, return_tensors="pt")</a:t>
-            </a:r>
-            <a:endParaRPr lang="en-US" sz="1100" dirty="0"/>
+              <a:t>#     "google/siglip-so400m-patch14-384")</a:t>
+            </a:r>
+            <a:endParaRPr lang="en-US" sz="1200" dirty="0"/>
           </a:p>
           <a:p>
             <a:pPr indent="0" marL="0">
@@ -14783,7 +14602,7 @@
               <a:buNone/>
             </a:pPr>
             <a:r>
-              <a:rPr lang="en-US" sz="1100" dirty="0">
+              <a:rPr lang="en-US" sz="1200" dirty="0">
                 <a:solidFill>
                   <a:schemeClr val="bg1"/>
                 </a:solidFill>
@@ -14791,9 +14610,9 @@
                 <a:ea typeface="Courier New" pitchFamily="34" charset="-122"/>
                 <a:cs typeface="Courier New" pitchFamily="34" charset="-120"/>
               </a:rPr>
-              <a:t>        f = model.get_image_features(**inputs)</a:t>
-            </a:r>
-            <a:endParaRPr lang="en-US" sz="1100" dirty="0"/>
+              <a:t> </a:t>
+            </a:r>
+            <a:endParaRPr lang="en-US" sz="1200" dirty="0"/>
           </a:p>
           <a:p>
             <a:pPr indent="0" marL="0">
@@ -14803,7 +14622,7 @@
               <a:buNone/>
             </a:pPr>
             <a:r>
-              <a:rPr lang="en-US" sz="1100" dirty="0">
+              <a:rPr lang="en-US" sz="1200" dirty="0">
                 <a:solidFill>
                   <a:schemeClr val="bg1"/>
                 </a:solidFill>
@@ -14811,9 +14630,9 @@
                 <a:ea typeface="Courier New" pitchFamily="34" charset="-122"/>
                 <a:cs typeface="Courier New" pitchFamily="34" charset="-120"/>
               </a:rPr>
-              <a:t>    return getattr(f, "pooler_output", f)</a:t>
-            </a:r>
-            <a:endParaRPr lang="en-US" sz="1100" dirty="0"/>
+              <a:t>texts = ["une photo de 2 chats", "een foto met een hond",</a:t>
+            </a:r>
+            <a:endParaRPr lang="en-US" sz="1200" dirty="0"/>
           </a:p>
           <a:p>
             <a:pPr indent="0" marL="0">
@@ -14823,7 +14642,7 @@
               <a:buNone/>
             </a:pPr>
             <a:r>
-              <a:rPr lang="en-US" sz="1100" dirty="0">
+              <a:rPr lang="en-US" sz="1200" dirty="0">
                 <a:solidFill>
                   <a:schemeClr val="bg1"/>
                 </a:solidFill>
@@ -14831,9 +14650,9 @@
                 <a:ea typeface="Courier New" pitchFamily="34" charset="-122"/>
                 <a:cs typeface="Courier New" pitchFamily="34" charset="-120"/>
               </a:rPr>
-              <a:t> </a:t>
-            </a:r>
-            <a:endParaRPr lang="en-US" sz="1100" dirty="0"/>
+              <a:t>         "ein Bild von einem Auto"]</a:t>
+            </a:r>
+            <a:endParaRPr lang="en-US" sz="1200" dirty="0"/>
           </a:p>
           <a:p>
             <a:pPr indent="0" marL="0">
@@ -14843,7 +14662,7 @@
               <a:buNone/>
             </a:pPr>
             <a:r>
-              <a:rPr lang="en-US" sz="1100" dirty="0">
+              <a:rPr lang="en-US" sz="1200" dirty="0">
                 <a:solidFill>
                   <a:schemeClr val="bg1"/>
                 </a:solidFill>
@@ -14851,9 +14670,9 @@
                 <a:ea typeface="Courier New" pitchFamily="34" charset="-122"/>
                 <a:cs typeface="Courier New" pitchFamily="34" charset="-120"/>
               </a:rPr>
-              <a:t>def add_vector(embedding, index):</a:t>
-            </a:r>
-            <a:endParaRPr lang="en-US" sz="1100" dirty="0"/>
+              <a:t>inputs = processor(text=texts, images=image,</a:t>
+            </a:r>
+            <a:endParaRPr lang="en-US" sz="1200" dirty="0"/>
           </a:p>
           <a:p>
             <a:pPr indent="0" marL="0">
@@ -14863,7 +14682,7 @@
               <a:buNone/>
             </a:pPr>
             <a:r>
-              <a:rPr lang="en-US" sz="1100" dirty="0">
+              <a:rPr lang="en-US" sz="1200" dirty="0">
                 <a:solidFill>
                   <a:schemeClr val="bg1"/>
                 </a:solidFill>
@@ -14871,9 +14690,9 @@
                 <a:ea typeface="Courier New" pitchFamily="34" charset="-122"/>
                 <a:cs typeface="Courier New" pitchFamily="34" charset="-120"/>
               </a:rPr>
-              <a:t>    vector = np.float32(embedding.cpu().numpy())</a:t>
-            </a:r>
-            <a:endParaRPr lang="en-US" sz="1100" dirty="0"/>
+              <a:t>                   padding="max_length", return_tensors="pt")</a:t>
+            </a:r>
+            <a:endParaRPr lang="en-US" sz="1200" dirty="0"/>
           </a:p>
           <a:p>
             <a:pPr indent="0" marL="0">
@@ -14883,7 +14702,7 @@
               <a:buNone/>
             </a:pPr>
             <a:r>
-              <a:rPr lang="en-US" sz="1100" dirty="0">
+              <a:rPr lang="en-US" sz="1200" dirty="0">
                 <a:solidFill>
                   <a:schemeClr val="bg1"/>
                 </a:solidFill>
@@ -14891,9 +14710,9 @@
                 <a:ea typeface="Courier New" pitchFamily="34" charset="-122"/>
                 <a:cs typeface="Courier New" pitchFamily="34" charset="-120"/>
               </a:rPr>
-              <a:t>    faiss.normalize_L2(vector)</a:t>
-            </a:r>
-            <a:endParaRPr lang="en-US" sz="1100" dirty="0"/>
+              <a:t>with torch.no_grad():</a:t>
+            </a:r>
+            <a:endParaRPr lang="en-US" sz="1200" dirty="0"/>
           </a:p>
           <a:p>
             <a:pPr indent="0" marL="0">
@@ -14903,7 +14722,7 @@
               <a:buNone/>
             </a:pPr>
             <a:r>
-              <a:rPr lang="en-US" sz="1100" dirty="0">
+              <a:rPr lang="en-US" sz="1200" dirty="0">
                 <a:solidFill>
                   <a:schemeClr val="bg1"/>
                 </a:solidFill>
@@ -14911,9 +14730,9 @@
                 <a:ea typeface="Courier New" pitchFamily="34" charset="-122"/>
                 <a:cs typeface="Courier New" pitchFamily="34" charset="-120"/>
               </a:rPr>
-              <a:t>    index.add(vector)</a:t>
-            </a:r>
-            <a:endParaRPr lang="en-US" sz="1100" dirty="0"/>
+              <a:t>  outputs = model(**inputs)</a:t>
+            </a:r>
+            <a:endParaRPr lang="en-US" sz="1200" dirty="0"/>
           </a:p>
           <a:p>
             <a:pPr indent="0" marL="0">
@@ -14923,7 +14742,7 @@
               <a:buNone/>
             </a:pPr>
             <a:r>
-              <a:rPr lang="en-US" sz="1100" dirty="0">
+              <a:rPr lang="en-US" sz="1200" dirty="0">
                 <a:solidFill>
                   <a:schemeClr val="bg1"/>
                 </a:solidFill>
@@ -14931,252 +14750,21 @@
                 <a:ea typeface="Courier New" pitchFamily="34" charset="-122"/>
                 <a:cs typeface="Courier New" pitchFamily="34" charset="-120"/>
               </a:rPr>
-              <a:t> </a:t>
-            </a:r>
-            <a:endParaRPr lang="en-US" sz="1100" dirty="0"/>
-          </a:p>
-          <a:p>
-            <a:pPr indent="0" marL="0">
-              <a:lnSpc>
-                <a:spcPct val="110000"/>
-              </a:lnSpc>
-              <a:buNone/>
-            </a:pPr>
-            <a:r>
-              <a:rPr lang="en-US" sz="1100" dirty="0">
-                <a:solidFill>
-                  <a:schemeClr val="bg1"/>
-                </a:solidFill>
-                <a:latin typeface="Courier New" pitchFamily="34" charset="0"/>
-                <a:ea typeface="Courier New" pitchFamily="34" charset="-122"/>
-                <a:cs typeface="Courier New" pitchFamily="34" charset="-120"/>
-              </a:rPr>
-              <a:t>index = faiss.IndexFlatIP(768)</a:t>
-            </a:r>
-            <a:r>
-              <a:rPr lang="en-US" sz="1100" dirty="0">
-                <a:solidFill>
-                  <a:srgbClr val="FBBF24"/>
-                </a:solidFill>
-                <a:latin typeface="Courier New" pitchFamily="34" charset="0"/>
-                <a:ea typeface="Courier New" pitchFamily="34" charset="-122"/>
-                <a:cs typeface="Courier New" pitchFamily="34" charset="-120"/>
-              </a:rPr>
-              <a:t>  # base 모델 차원</a:t>
-            </a:r>
-            <a:endParaRPr lang="en-US" sz="1100" dirty="0"/>
-          </a:p>
-          <a:p>
-            <a:pPr indent="0" marL="0">
-              <a:lnSpc>
-                <a:spcPct val="110000"/>
-              </a:lnSpc>
-              <a:buNone/>
-            </a:pPr>
-            <a:r>
-              <a:rPr lang="en-US" sz="1100" dirty="0">
-                <a:solidFill>
-                  <a:schemeClr val="bg1"/>
-                </a:solidFill>
-                <a:latin typeface="Courier New" pitchFamily="34" charset="0"/>
-                <a:ea typeface="Courier New" pitchFamily="34" charset="-122"/>
-                <a:cs typeface="Courier New" pitchFamily="34" charset="-120"/>
-              </a:rPr>
-              <a:t>for image in images:</a:t>
-            </a:r>
-            <a:endParaRPr lang="en-US" sz="1100" dirty="0"/>
-          </a:p>
-          <a:p>
-            <a:pPr indent="0" marL="0">
-              <a:lnSpc>
-                <a:spcPct val="110000"/>
-              </a:lnSpc>
-              <a:buNone/>
-            </a:pPr>
-            <a:r>
-              <a:rPr lang="en-US" sz="1100" dirty="0">
-                <a:solidFill>
-                  <a:schemeClr val="bg1"/>
-                </a:solidFill>
-                <a:latin typeface="Courier New" pitchFamily="34" charset="0"/>
-                <a:ea typeface="Courier New" pitchFamily="34" charset="-122"/>
-                <a:cs typeface="Courier New" pitchFamily="34" charset="-120"/>
-              </a:rPr>
-              <a:t>    add_vector(embed_siglip(image), index)</a:t>
-            </a:r>
-            <a:endParaRPr lang="en-US" sz="1100" dirty="0"/>
-          </a:p>
-          <a:p>
-            <a:pPr indent="0" marL="0">
-              <a:lnSpc>
-                <a:spcPct val="110000"/>
-              </a:lnSpc>
-              <a:buNone/>
-            </a:pPr>
-            <a:r>
-              <a:rPr lang="en-US" sz="1100" dirty="0">
-                <a:solidFill>
-                  <a:schemeClr val="bg1"/>
-                </a:solidFill>
-                <a:latin typeface="Courier New" pitchFamily="34" charset="0"/>
-                <a:ea typeface="Courier New" pitchFamily="34" charset="-122"/>
-                <a:cs typeface="Courier New" pitchFamily="34" charset="-120"/>
-              </a:rPr>
-              <a:t> </a:t>
-            </a:r>
-            <a:endParaRPr lang="en-US" sz="1100" dirty="0"/>
-          </a:p>
-          <a:p>
-            <a:pPr indent="0" marL="0">
-              <a:lnSpc>
-                <a:spcPct val="110000"/>
-              </a:lnSpc>
-              <a:buNone/>
-            </a:pPr>
-            <a:r>
-              <a:rPr lang="en-US" sz="1100" dirty="0">
-                <a:solidFill>
-                  <a:schemeClr val="bg1"/>
-                </a:solidFill>
-                <a:latin typeface="Courier New" pitchFamily="34" charset="0"/>
-                <a:ea typeface="Courier New" pitchFamily="34" charset="-122"/>
-                <a:cs typeface="Courier New" pitchFamily="34" charset="-120"/>
-              </a:rPr>
-              <a:t>q = processor(text=["a rocket at night"], padding="max_length",</a:t>
-            </a:r>
-            <a:endParaRPr lang="en-US" sz="1100" dirty="0"/>
-          </a:p>
-          <a:p>
-            <a:pPr indent="0" marL="0">
-              <a:lnSpc>
-                <a:spcPct val="110000"/>
-              </a:lnSpc>
-              <a:buNone/>
-            </a:pPr>
-            <a:r>
-              <a:rPr lang="en-US" sz="1100" dirty="0">
-                <a:solidFill>
-                  <a:schemeClr val="bg1"/>
-                </a:solidFill>
-                <a:latin typeface="Courier New" pitchFamily="34" charset="0"/>
-                <a:ea typeface="Courier New" pitchFamily="34" charset="-122"/>
-                <a:cs typeface="Courier New" pitchFamily="34" charset="-120"/>
-              </a:rPr>
-              <a:t>              return_tensors="pt")</a:t>
-            </a:r>
-            <a:endParaRPr lang="en-US" sz="1100" dirty="0"/>
-          </a:p>
-          <a:p>
-            <a:pPr indent="0" marL="0">
-              <a:lnSpc>
-                <a:spcPct val="110000"/>
-              </a:lnSpc>
-              <a:buNone/>
-            </a:pPr>
-            <a:r>
-              <a:rPr lang="en-US" sz="1100" dirty="0">
-                <a:solidFill>
-                  <a:schemeClr val="bg1"/>
-                </a:solidFill>
-                <a:latin typeface="Courier New" pitchFamily="34" charset="0"/>
-                <a:ea typeface="Courier New" pitchFamily="34" charset="-122"/>
-                <a:cs typeface="Courier New" pitchFamily="34" charset="-120"/>
-              </a:rPr>
-              <a:t>with torch.no_grad():</a:t>
-            </a:r>
-            <a:endParaRPr lang="en-US" sz="1100" dirty="0"/>
-          </a:p>
-          <a:p>
-            <a:pPr indent="0" marL="0">
-              <a:lnSpc>
-                <a:spcPct val="110000"/>
-              </a:lnSpc>
-              <a:buNone/>
-            </a:pPr>
-            <a:r>
-              <a:rPr lang="en-US" sz="1100" dirty="0">
-                <a:solidFill>
-                  <a:schemeClr val="bg1"/>
-                </a:solidFill>
-                <a:latin typeface="Courier New" pitchFamily="34" charset="0"/>
-                <a:ea typeface="Courier New" pitchFamily="34" charset="-122"/>
-                <a:cs typeface="Courier New" pitchFamily="34" charset="-120"/>
-              </a:rPr>
-              <a:t>    t = model.get_text_features(**q)</a:t>
-            </a:r>
-            <a:endParaRPr lang="en-US" sz="1100" dirty="0"/>
-          </a:p>
-          <a:p>
-            <a:pPr indent="0" marL="0">
-              <a:lnSpc>
-                <a:spcPct val="110000"/>
-              </a:lnSpc>
-              <a:buNone/>
-            </a:pPr>
-            <a:r>
-              <a:rPr lang="en-US" sz="1100" dirty="0">
-                <a:solidFill>
-                  <a:schemeClr val="bg1"/>
-                </a:solidFill>
-                <a:latin typeface="Courier New" pitchFamily="34" charset="0"/>
-                <a:ea typeface="Courier New" pitchFamily="34" charset="-122"/>
-                <a:cs typeface="Courier New" pitchFamily="34" charset="-120"/>
-              </a:rPr>
-              <a:t>t = np.float32(getattr(t, "pooler_output", t).numpy())</a:t>
-            </a:r>
-            <a:endParaRPr lang="en-US" sz="1100" dirty="0"/>
-          </a:p>
-          <a:p>
-            <a:pPr indent="0" marL="0">
-              <a:lnSpc>
-                <a:spcPct val="110000"/>
-              </a:lnSpc>
-              <a:buNone/>
-            </a:pPr>
-            <a:r>
-              <a:rPr lang="en-US" sz="1100" dirty="0">
-                <a:solidFill>
-                  <a:schemeClr val="bg1"/>
-                </a:solidFill>
-                <a:latin typeface="Courier New" pitchFamily="34" charset="0"/>
-                <a:ea typeface="Courier New" pitchFamily="34" charset="-122"/>
-                <a:cs typeface="Courier New" pitchFamily="34" charset="-120"/>
-              </a:rPr>
-              <a:t>faiss.normalize_L2(t)</a:t>
-            </a:r>
-            <a:endParaRPr lang="en-US" sz="1100" dirty="0"/>
-          </a:p>
-          <a:p>
-            <a:pPr indent="0" marL="0">
-              <a:lnSpc>
-                <a:spcPct val="110000"/>
-              </a:lnSpc>
-              <a:buNone/>
-            </a:pPr>
-            <a:r>
-              <a:rPr lang="en-US" sz="1100" dirty="0">
-                <a:solidFill>
-                  <a:schemeClr val="bg1"/>
-                </a:solidFill>
-                <a:latin typeface="Courier New" pitchFamily="34" charset="0"/>
-                <a:ea typeface="Courier New" pitchFamily="34" charset="-122"/>
-                <a:cs typeface="Courier New" pitchFamily="34" charset="-120"/>
-              </a:rPr>
-              <a:t>distances, indices = index.search(t, 3)</a:t>
-            </a:r>
-            <a:endParaRPr lang="en-US" sz="1100" dirty="0"/>
-          </a:p>
-        </p:txBody>
-      </p:sp>
-      <p:sp>
-        <p:nvSpPr>
-          <p:cNvPr id="5" name="text-415"/>
+              <a:t>probs = torch.sigmoid(outputs.logits_per_image)</a:t>
+            </a:r>
+            <a:endParaRPr lang="en-US" sz="1200" dirty="0"/>
+          </a:p>
+        </p:txBody>
+      </p:sp>
+      <p:sp>
+        <p:nvSpPr>
+          <p:cNvPr id="5" name="text-418"/>
           <p:cNvSpPr txBox="1"/>
           <p:nvPr/>
         </p:nvSpPr>
         <p:spPr>
           <a:xfrm>
-            <a:off x="640080" y="5989320"/>
+            <a:off x="640080" y="4846320"/>
             <a:ext cx="7315200" cy="292608"/>
           </a:xfrm>
           <a:prstGeom prst="rect">
@@ -15213,7 +14801,7 @@
                   </a:extLst>
                 </a:hlinkClick>
               </a:rPr>
-              <a:t>smol-vision Image Search 노트북을 SigLIP용으로 바꿈</a:t>
+              <a:t>Inference with (multilingual) SigLIP 노트북 · 직접 실행 (base-patch16-224)</a:t>
             </a:r>
             <a:endParaRPr lang="en-US" sz="1100" dirty="0"/>
           </a:p>
@@ -15221,14 +14809,14 @@
       </p:sp>
       <p:sp>
         <p:nvSpPr>
-          <p:cNvPr id="6" name="text-416"/>
+          <p:cNvPr id="6" name="text-419"/>
           <p:cNvSpPr txBox="1"/>
           <p:nvPr/>
         </p:nvSpPr>
         <p:spPr>
           <a:xfrm>
-            <a:off x="8412480" y="1234440"/>
-            <a:ext cx="3108960" cy="411480"/>
+            <a:off x="7955280" y="1325880"/>
+            <a:ext cx="3566160" cy="347472"/>
           </a:xfrm>
           <a:prstGeom prst="rect">
             <a:avLst/>
@@ -15244,32 +14832,30 @@
               <a:buNone/>
             </a:pPr>
             <a:r>
-              <a:rPr lang="en-US" sz="1600" b="1" dirty="0">
-                <a:solidFill>
-                  <a:schemeClr val="accent3"/>
-                </a:solidFill>
-              </a:rPr>
-              <a:t>원본(MetaCLIP2)에서 바꾼 곳</a:t>
-            </a:r>
-            <a:endParaRPr lang="en-US" sz="1600" dirty="0"/>
-          </a:p>
-        </p:txBody>
-      </p:sp>
-      <p:sp>
-        <p:nvSpPr>
-          <p:cNvPr id="7" name="card-417"/>
+              <a:rPr lang="en-US" sz="1500" b="1" dirty="0">
+                <a:solidFill>
+                  <a:schemeClr val="tx1"/>
+                </a:solidFill>
+              </a:rPr>
+              <a:t>une photo de 2 chats</a:t>
+            </a:r>
+            <a:endParaRPr lang="en-US" sz="1500" dirty="0"/>
+          </a:p>
+        </p:txBody>
+      </p:sp>
+      <p:sp>
+        <p:nvSpPr>
+          <p:cNvPr id="7" name="bar-bg-420"/>
           <p:cNvSpPr/>
           <p:nvPr/>
         </p:nvSpPr>
         <p:spPr>
           <a:xfrm>
-            <a:off x="8412480" y="1737360"/>
-            <a:ext cx="3108960" cy="749808"/>
-          </a:xfrm>
-          <a:prstGeom prst="roundRect">
-            <a:avLst>
-              <a:gd name="adj" fmla="val 17073"/>
-            </a:avLst>
+            <a:off x="7955280" y="1709928"/>
+            <a:ext cx="2651760" cy="274320"/>
+          </a:xfrm>
+          <a:prstGeom prst="rect">
+            <a:avLst/>
           </a:prstGeom>
           <a:solidFill>
             <a:schemeClr val="bg2"/>
@@ -15279,91 +14865,109 @@
       </p:sp>
       <p:sp>
         <p:nvSpPr>
-          <p:cNvPr id="8" name="text-418"/>
+          <p:cNvPr id="8" name="bar-421"/>
+          <p:cNvSpPr/>
+          <p:nvPr/>
+        </p:nvSpPr>
+        <p:spPr>
+          <a:xfrm>
+            <a:off x="7955280" y="1709928"/>
+            <a:ext cx="782269" cy="274320"/>
+          </a:xfrm>
+          <a:prstGeom prst="rect">
+            <a:avLst/>
+          </a:prstGeom>
+          <a:solidFill>
+            <a:schemeClr val="accent5"/>
+          </a:solidFill>
+          <a:ln/>
+        </p:spPr>
+      </p:sp>
+      <p:sp>
+        <p:nvSpPr>
+          <p:cNvPr id="9" name="text-422"/>
           <p:cNvSpPr txBox="1"/>
           <p:nvPr/>
         </p:nvSpPr>
         <p:spPr>
           <a:xfrm>
-            <a:off x="8549640" y="1737360"/>
-            <a:ext cx="868680" cy="749808"/>
-          </a:xfrm>
-          <a:prstGeom prst="rect">
-            <a:avLst/>
-          </a:prstGeom>
-          <a:noFill/>
-          <a:ln/>
-        </p:spPr>
-        <p:txBody>
-          <a:bodyPr wrap="square" lIns="0" tIns="0" rIns="0" bIns="0" rtlCol="0" anchor="ctr"/>
-          <a:lstStyle/>
-          <a:p>
-            <a:pPr indent="0" marL="0">
-              <a:buNone/>
-            </a:pPr>
-            <a:r>
-              <a:rPr lang="en-US" sz="1300" b="1" dirty="0">
-                <a:solidFill>
-                  <a:schemeClr val="accent3"/>
-                </a:solidFill>
-              </a:rPr>
-              <a:t>모델</a:t>
-            </a:r>
-            <a:endParaRPr lang="en-US" sz="1300" dirty="0"/>
-          </a:p>
-        </p:txBody>
-      </p:sp>
-      <p:sp>
-        <p:nvSpPr>
-          <p:cNvPr id="9" name="text-419"/>
+            <a:off x="10652760" y="1618488"/>
+            <a:ext cx="868680" cy="457200"/>
+          </a:xfrm>
+          <a:prstGeom prst="rect">
+            <a:avLst/>
+          </a:prstGeom>
+          <a:noFill/>
+          <a:ln/>
+        </p:spPr>
+        <p:txBody>
+          <a:bodyPr wrap="square" lIns="0" tIns="0" rIns="0" bIns="0" rtlCol="0" anchor="t"/>
+          <a:lstStyle/>
+          <a:p>
+            <a:pPr algn="r" indent="0" marL="0">
+              <a:buNone/>
+            </a:pPr>
+            <a:r>
+              <a:rPr lang="en-US" sz="1600" b="1" dirty="0">
+                <a:solidFill>
+                  <a:schemeClr val="accent5"/>
+                </a:solidFill>
+              </a:rPr>
+              <a:t>29.5%</a:t>
+            </a:r>
+            <a:endParaRPr lang="en-US" sz="1600" dirty="0"/>
+          </a:p>
+        </p:txBody>
+      </p:sp>
+      <p:sp>
+        <p:nvSpPr>
+          <p:cNvPr id="10" name="text-423"/>
           <p:cNvSpPr txBox="1"/>
           <p:nvPr/>
         </p:nvSpPr>
         <p:spPr>
           <a:xfrm>
-            <a:off x="9418320" y="1737360"/>
-            <a:ext cx="2057400" cy="749808"/>
-          </a:xfrm>
-          <a:prstGeom prst="rect">
-            <a:avLst/>
-          </a:prstGeom>
-          <a:noFill/>
-          <a:ln/>
-        </p:spPr>
-        <p:txBody>
-          <a:bodyPr wrap="square" lIns="0" tIns="0" rIns="0" bIns="0" rtlCol="0" anchor="ctr"/>
-          <a:lstStyle/>
-          <a:p>
-            <a:pPr indent="0" marL="0">
-              <a:buNone/>
-            </a:pPr>
-            <a:r>
-              <a:rPr lang="en-US" sz="1200" dirty="0">
+            <a:off x="7955280" y="2103120"/>
+            <a:ext cx="3566160" cy="347472"/>
+          </a:xfrm>
+          <a:prstGeom prst="rect">
+            <a:avLst/>
+          </a:prstGeom>
+          <a:noFill/>
+          <a:ln/>
+        </p:spPr>
+        <p:txBody>
+          <a:bodyPr wrap="square" lIns="0" tIns="0" rIns="0" bIns="0" rtlCol="0" anchor="t"/>
+          <a:lstStyle/>
+          <a:p>
+            <a:pPr indent="0" marL="0">
+              <a:buNone/>
+            </a:pPr>
+            <a:r>
+              <a:rPr lang="en-US" sz="1500" dirty="0">
                 <a:solidFill>
                   <a:schemeClr val="tx1"/>
                 </a:solidFill>
               </a:rPr>
-              <a:t>SigLIP, 차원 768</a:t>
-            </a:r>
-            <a:endParaRPr lang="en-US" sz="1200" dirty="0"/>
-          </a:p>
-        </p:txBody>
-      </p:sp>
-      <p:sp>
-        <p:nvSpPr>
-          <p:cNvPr id="10" name="card-420"/>
+              <a:t>een foto met een hond</a:t>
+            </a:r>
+            <a:endParaRPr lang="en-US" sz="1500" dirty="0"/>
+          </a:p>
+        </p:txBody>
+      </p:sp>
+      <p:sp>
+        <p:nvSpPr>
+          <p:cNvPr id="11" name="bar-bg-424"/>
           <p:cNvSpPr/>
           <p:nvPr/>
         </p:nvSpPr>
         <p:spPr>
           <a:xfrm>
-            <a:off x="8412480" y="2606040"/>
-            <a:ext cx="3108960" cy="749808"/>
-          </a:xfrm>
-          <a:prstGeom prst="roundRect">
-            <a:avLst>
-              <a:gd name="adj" fmla="val 17073"/>
-            </a:avLst>
+            <a:off x="7955280" y="2487168"/>
+            <a:ext cx="2651760" cy="274320"/>
+          </a:xfrm>
+          <a:prstGeom prst="rect">
+            <a:avLst/>
           </a:prstGeom>
           <a:solidFill>
             <a:schemeClr val="bg2"/>
@@ -15373,91 +14977,109 @@
       </p:sp>
       <p:sp>
         <p:nvSpPr>
-          <p:cNvPr id="11" name="text-421"/>
+          <p:cNvPr id="12" name="bar-425"/>
+          <p:cNvSpPr/>
+          <p:nvPr/>
+        </p:nvSpPr>
+        <p:spPr>
+          <a:xfrm>
+            <a:off x="7955280" y="2487168"/>
+            <a:ext cx="36576" cy="274320"/>
+          </a:xfrm>
+          <a:prstGeom prst="rect">
+            <a:avLst/>
+          </a:prstGeom>
+          <a:solidFill>
+            <a:schemeClr val="accent6"/>
+          </a:solidFill>
+          <a:ln/>
+        </p:spPr>
+      </p:sp>
+      <p:sp>
+        <p:nvSpPr>
+          <p:cNvPr id="13" name="text-426"/>
           <p:cNvSpPr txBox="1"/>
           <p:nvPr/>
         </p:nvSpPr>
         <p:spPr>
           <a:xfrm>
-            <a:off x="8549640" y="2606040"/>
-            <a:ext cx="868680" cy="749808"/>
-          </a:xfrm>
-          <a:prstGeom prst="rect">
-            <a:avLst/>
-          </a:prstGeom>
-          <a:noFill/>
-          <a:ln/>
-        </p:spPr>
-        <p:txBody>
-          <a:bodyPr wrap="square" lIns="0" tIns="0" rIns="0" bIns="0" rtlCol="0" anchor="ctr"/>
-          <a:lstStyle/>
-          <a:p>
-            <a:pPr indent="0" marL="0">
-              <a:buNone/>
-            </a:pPr>
-            <a:r>
-              <a:rPr lang="en-US" sz="1300" b="1" dirty="0">
-                <a:solidFill>
-                  <a:schemeClr val="accent3"/>
-                </a:solidFill>
-              </a:rPr>
-              <a:t>텍스트</a:t>
-            </a:r>
-            <a:endParaRPr lang="en-US" sz="1300" dirty="0"/>
-          </a:p>
-        </p:txBody>
-      </p:sp>
-      <p:sp>
-        <p:nvSpPr>
-          <p:cNvPr id="12" name="text-422"/>
+            <a:off x="10652760" y="2395728"/>
+            <a:ext cx="868680" cy="457200"/>
+          </a:xfrm>
+          <a:prstGeom prst="rect">
+            <a:avLst/>
+          </a:prstGeom>
+          <a:noFill/>
+          <a:ln/>
+        </p:spPr>
+        <p:txBody>
+          <a:bodyPr wrap="square" lIns="0" tIns="0" rIns="0" bIns="0" rtlCol="0" anchor="t"/>
+          <a:lstStyle/>
+          <a:p>
+            <a:pPr algn="r" indent="0" marL="0">
+              <a:buNone/>
+            </a:pPr>
+            <a:r>
+              <a:rPr lang="en-US" sz="1600" b="1" dirty="0">
+                <a:solidFill>
+                  <a:schemeClr val="tx2"/>
+                </a:solidFill>
+              </a:rPr>
+              <a:t>0.0%</a:t>
+            </a:r>
+            <a:endParaRPr lang="en-US" sz="1600" dirty="0"/>
+          </a:p>
+        </p:txBody>
+      </p:sp>
+      <p:sp>
+        <p:nvSpPr>
+          <p:cNvPr id="14" name="text-427"/>
           <p:cNvSpPr txBox="1"/>
           <p:nvPr/>
         </p:nvSpPr>
         <p:spPr>
           <a:xfrm>
-            <a:off x="9418320" y="2606040"/>
-            <a:ext cx="2057400" cy="749808"/>
-          </a:xfrm>
-          <a:prstGeom prst="rect">
-            <a:avLst/>
-          </a:prstGeom>
-          <a:noFill/>
-          <a:ln/>
-        </p:spPr>
-        <p:txBody>
-          <a:bodyPr wrap="square" lIns="0" tIns="0" rIns="0" bIns="0" rtlCol="0" anchor="ctr"/>
-          <a:lstStyle/>
-          <a:p>
-            <a:pPr indent="0" marL="0">
-              <a:buNone/>
-            </a:pPr>
-            <a:r>
-              <a:rPr lang="en-US" sz="1200" dirty="0">
+            <a:off x="7955280" y="2880360"/>
+            <a:ext cx="3566160" cy="347472"/>
+          </a:xfrm>
+          <a:prstGeom prst="rect">
+            <a:avLst/>
+          </a:prstGeom>
+          <a:noFill/>
+          <a:ln/>
+        </p:spPr>
+        <p:txBody>
+          <a:bodyPr wrap="square" lIns="0" tIns="0" rIns="0" bIns="0" rtlCol="0" anchor="t"/>
+          <a:lstStyle/>
+          <a:p>
+            <a:pPr indent="0" marL="0">
+              <a:buNone/>
+            </a:pPr>
+            <a:r>
+              <a:rPr lang="en-US" sz="1500" dirty="0">
                 <a:solidFill>
                   <a:schemeClr val="tx1"/>
                 </a:solidFill>
               </a:rPr>
-              <a:t>padding="max_length" 추가</a:t>
-            </a:r>
-            <a:endParaRPr lang="en-US" sz="1200" dirty="0"/>
-          </a:p>
-        </p:txBody>
-      </p:sp>
-      <p:sp>
-        <p:nvSpPr>
-          <p:cNvPr id="13" name="card-423"/>
+              <a:t>ein Bild von einem Auto</a:t>
+            </a:r>
+            <a:endParaRPr lang="en-US" sz="1500" dirty="0"/>
+          </a:p>
+        </p:txBody>
+      </p:sp>
+      <p:sp>
+        <p:nvSpPr>
+          <p:cNvPr id="15" name="bar-bg-428"/>
           <p:cNvSpPr/>
           <p:nvPr/>
         </p:nvSpPr>
         <p:spPr>
           <a:xfrm>
-            <a:off x="8412480" y="3474720"/>
-            <a:ext cx="3108960" cy="749808"/>
-          </a:xfrm>
-          <a:prstGeom prst="roundRect">
-            <a:avLst>
-              <a:gd name="adj" fmla="val 17073"/>
-            </a:avLst>
+            <a:off x="7955280" y="3264408"/>
+            <a:ext cx="2651760" cy="274320"/>
+          </a:xfrm>
+          <a:prstGeom prst="rect">
+            <a:avLst/>
           </a:prstGeom>
           <a:solidFill>
             <a:schemeClr val="bg2"/>
@@ -15467,90 +15089,205 @@
       </p:sp>
       <p:sp>
         <p:nvSpPr>
-          <p:cNvPr id="14" name="text-424"/>
+          <p:cNvPr id="16" name="bar-429"/>
+          <p:cNvSpPr/>
+          <p:nvPr/>
+        </p:nvSpPr>
+        <p:spPr>
+          <a:xfrm>
+            <a:off x="7955280" y="3264408"/>
+            <a:ext cx="36576" cy="274320"/>
+          </a:xfrm>
+          <a:prstGeom prst="rect">
+            <a:avLst/>
+          </a:prstGeom>
+          <a:solidFill>
+            <a:schemeClr val="accent6"/>
+          </a:solidFill>
+          <a:ln/>
+        </p:spPr>
+      </p:sp>
+      <p:sp>
+        <p:nvSpPr>
+          <p:cNvPr id="17" name="text-430"/>
           <p:cNvSpPr txBox="1"/>
           <p:nvPr/>
         </p:nvSpPr>
         <p:spPr>
           <a:xfrm>
-            <a:off x="8549640" y="3474720"/>
-            <a:ext cx="868680" cy="749808"/>
-          </a:xfrm>
-          <a:prstGeom prst="rect">
-            <a:avLst/>
-          </a:prstGeom>
-          <a:noFill/>
-          <a:ln/>
-        </p:spPr>
-        <p:txBody>
-          <a:bodyPr wrap="square" lIns="0" tIns="0" rIns="0" bIns="0" rtlCol="0" anchor="ctr"/>
-          <a:lstStyle/>
-          <a:p>
-            <a:pPr indent="0" marL="0">
-              <a:buNone/>
-            </a:pPr>
-            <a:r>
-              <a:rPr lang="en-US" sz="1300" b="1" dirty="0">
-                <a:solidFill>
-                  <a:schemeClr val="accent3"/>
-                </a:solidFill>
-              </a:rPr>
-              <a:t>인덱스</a:t>
-            </a:r>
-            <a:endParaRPr lang="en-US" sz="1300" dirty="0"/>
-          </a:p>
-        </p:txBody>
-      </p:sp>
-      <p:sp>
-        <p:nvSpPr>
-          <p:cNvPr id="15" name="text-425"/>
-          <p:cNvSpPr txBox="1"/>
-          <p:nvPr/>
-        </p:nvSpPr>
-        <p:spPr>
-          <a:xfrm>
-            <a:off x="9418320" y="3474720"/>
-            <a:ext cx="2057400" cy="749808"/>
-          </a:xfrm>
-          <a:prstGeom prst="rect">
-            <a:avLst/>
-          </a:prstGeom>
-          <a:noFill/>
-          <a:ln/>
-        </p:spPr>
-        <p:txBody>
-          <a:bodyPr wrap="square" lIns="0" tIns="0" rIns="0" bIns="0" rtlCol="0" anchor="ctr"/>
-          <a:lstStyle/>
-          <a:p>
-            <a:pPr indent="0" marL="0">
-              <a:buNone/>
-            </a:pPr>
-            <a:r>
-              <a:rPr lang="en-US" sz="1200" dirty="0">
-                <a:solidFill>
-                  <a:schemeClr val="tx1"/>
-                </a:solidFill>
-              </a:rPr>
-              <a:t>IndexFlatIP (정규화 후 내적 = 코사인)</a:t>
-            </a:r>
-            <a:endParaRPr lang="en-US" sz="1200" dirty="0"/>
-          </a:p>
-        </p:txBody>
-      </p:sp>
-      <p:sp>
-        <p:nvSpPr>
-          <p:cNvPr id="16" name="card-426"/>
+            <a:off x="10652760" y="3172968"/>
+            <a:ext cx="868680" cy="457200"/>
+          </a:xfrm>
+          <a:prstGeom prst="rect">
+            <a:avLst/>
+          </a:prstGeom>
+          <a:noFill/>
+          <a:ln/>
+        </p:spPr>
+        <p:txBody>
+          <a:bodyPr wrap="square" lIns="0" tIns="0" rIns="0" bIns="0" rtlCol="0" anchor="t"/>
+          <a:lstStyle/>
+          <a:p>
+            <a:pPr algn="r" indent="0" marL="0">
+              <a:buNone/>
+            </a:pPr>
+            <a:r>
+              <a:rPr lang="en-US" sz="1600" b="1" dirty="0">
+                <a:solidFill>
+                  <a:schemeClr val="tx2"/>
+                </a:solidFill>
+              </a:rPr>
+              <a:t>0.0%</a:t>
+            </a:r>
+            <a:endParaRPr lang="en-US" sz="1600" dirty="0"/>
+          </a:p>
+        </p:txBody>
+      </p:sp>
+      <p:sp>
+        <p:nvSpPr>
+          <p:cNvPr id="18" name="card-431"/>
           <p:cNvSpPr/>
           <p:nvPr/>
         </p:nvSpPr>
         <p:spPr>
           <a:xfrm>
-            <a:off x="8412480" y="4343400"/>
-            <a:ext cx="3108960" cy="749808"/>
+            <a:off x="640080" y="5257800"/>
+            <a:ext cx="10881360" cy="822960"/>
           </a:xfrm>
           <a:prstGeom prst="roundRect">
             <a:avLst>
-              <a:gd name="adj" fmla="val 17073"/>
+              <a:gd name="adj" fmla="val 15556"/>
+            </a:avLst>
+          </a:prstGeom>
+          <a:solidFill>
+            <a:schemeClr val="accent4">
+              <a:alpha val="8000"/>
+            </a:schemeClr>
+          </a:solidFill>
+          <a:ln/>
+        </p:spPr>
+      </p:sp>
+      <p:sp>
+        <p:nvSpPr>
+          <p:cNvPr id="19" name="circle-432"/>
+          <p:cNvSpPr/>
+          <p:nvPr/>
+        </p:nvSpPr>
+        <p:spPr>
+          <a:xfrm>
+            <a:off x="868680" y="5413248"/>
+            <a:ext cx="512064" cy="512064"/>
+          </a:xfrm>
+          <a:prstGeom prst="ellipse">
+            <a:avLst/>
+          </a:prstGeom>
+          <a:solidFill>
+            <a:schemeClr val="accent4"/>
+          </a:solidFill>
+          <a:ln/>
+        </p:spPr>
+      </p:sp>
+      <p:pic>
+        <p:nvPicPr>
+          <p:cNvPr id="20" name="icon-FaExclamationTriangle-433" descr="FaExclamationTriangle">    </p:cNvPr>
+          <p:cNvPicPr>
+            <a:picLocks noChangeAspect="1"/>
+          </p:cNvPicPr>
+          <p:nvPr/>
+        </p:nvPicPr>
+        <p:blipFill>
+          <a:blip r:embed="rId2"/>
+          <a:stretch>
+            <a:fillRect/>
+          </a:stretch>
+        </p:blipFill>
+        <p:spPr>
+          <a:xfrm>
+            <a:off x="1001817" y="5546385"/>
+            <a:ext cx="245791" cy="245791"/>
+          </a:xfrm>
+          <a:prstGeom prst="rect">
+            <a:avLst/>
+          </a:prstGeom>
+        </p:spPr>
+      </p:pic>
+      <p:sp>
+        <p:nvSpPr>
+          <p:cNvPr id="21" name="text-434"/>
+          <p:cNvSpPr txBox="1"/>
+          <p:nvPr/>
+        </p:nvSpPr>
+        <p:spPr>
+          <a:xfrm>
+            <a:off x="1554480" y="5257800"/>
+            <a:ext cx="9875520" cy="822960"/>
+          </a:xfrm>
+          <a:prstGeom prst="rect">
+            <a:avLst/>
+          </a:prstGeom>
+          <a:noFill/>
+          <a:ln/>
+        </p:spPr>
+        <p:txBody>
+          <a:bodyPr wrap="square" lIns="0" tIns="0" rIns="0" bIns="0" rtlCol="0" anchor="ctr"/>
+          <a:lstStyle/>
+          <a:p>
+            <a:pPr indent="0" marL="0">
+              <a:buNone/>
+            </a:pPr>
+            <a:r>
+              <a:rPr lang="en-US" sz="1400" b="1" dirty="0">
+                <a:solidFill>
+                  <a:schemeClr val="accent4"/>
+                </a:solidFill>
+              </a:rPr>
+              <a:t>모델 로드가 주석 처리 → 이 결과는 영어 base 모델로 나온 값.  </a:t>
+            </a:r>
+            <a:r>
+              <a:rPr lang="en-US" sz="1400" dirty="0">
+                <a:solidFill>
+                  <a:schemeClr val="tx1"/>
+                </a:solidFill>
+              </a:rPr>
+              <a:t>제대로 하려면 </a:t>
+            </a:r>
+            <a:r>
+              <a:rPr lang="en-US" sz="1400" b="1" dirty="0">
+                <a:solidFill>
+                  <a:schemeClr val="tx1"/>
+                </a:solidFill>
+                <a:latin typeface="Courier New" pitchFamily="34" charset="0"/>
+                <a:ea typeface="Courier New" pitchFamily="34" charset="-122"/>
+                <a:cs typeface="Courier New" pitchFamily="34" charset="-120"/>
+              </a:rPr>
+              <a:t>google/siglip-base-patch16-256-multilingual</a:t>
+            </a:r>
+            <a:r>
+              <a:rPr lang="en-US" sz="1400" dirty="0">
+                <a:solidFill>
+                  <a:schemeClr val="tx1"/>
+                </a:solidFill>
+              </a:rPr>
+              <a:t> 로 다시 실행</a:t>
+            </a:r>
+            <a:endParaRPr lang="en-US" sz="1400" dirty="0"/>
+          </a:p>
+        </p:txBody>
+      </p:sp>
+      <p:sp>
+        <p:nvSpPr>
+          <p:cNvPr id="22" name="card-435"/>
+          <p:cNvSpPr/>
+          <p:nvPr/>
+        </p:nvSpPr>
+        <p:spPr>
+          <a:xfrm>
+            <a:off x="7955280" y="3794760"/>
+            <a:ext cx="3566160" cy="1234440"/>
+          </a:xfrm>
+          <a:prstGeom prst="roundRect">
+            <a:avLst>
+              <a:gd name="adj" fmla="val 10370"/>
             </a:avLst>
           </a:prstGeom>
           <a:solidFill>
@@ -15561,14 +15298,14 @@
       </p:sp>
       <p:sp>
         <p:nvSpPr>
-          <p:cNvPr id="17" name="text-427"/>
+          <p:cNvPr id="23" name="text-436"/>
           <p:cNvSpPr txBox="1"/>
           <p:nvPr/>
         </p:nvSpPr>
         <p:spPr>
           <a:xfrm>
-            <a:off x="8549640" y="4343400"/>
-            <a:ext cx="868680" cy="749808"/>
+            <a:off x="8138160" y="3794760"/>
+            <a:ext cx="3246120" cy="1234440"/>
           </a:xfrm>
           <a:prstGeom prst="rect">
             <a:avLst/>
@@ -15584,108 +15321,14 @@
               <a:buNone/>
             </a:pPr>
             <a:r>
-              <a:rPr lang="en-US" sz="1300" b="1" dirty="0">
-                <a:solidFill>
-                  <a:schemeClr val="accent3"/>
-                </a:solidFill>
-              </a:rPr>
-              <a:t>5.x 대응</a:t>
+              <a:rPr lang="en-US" sz="1300" dirty="0">
+                <a:solidFill>
+                  <a:schemeClr val="tx1"/>
+                </a:solidFill>
+              </a:rPr>
+              <a:t>다국어 모델(mSigLIP): 영어로 거르지 않은 WebLI 데이터, 어휘 25만 토큰 → 한국어 질문 실험용</a:t>
             </a:r>
             <a:endParaRPr lang="en-US" sz="1300" dirty="0"/>
-          </a:p>
-        </p:txBody>
-      </p:sp>
-      <p:sp>
-        <p:nvSpPr>
-          <p:cNvPr id="18" name="text-428"/>
-          <p:cNvSpPr txBox="1"/>
-          <p:nvPr/>
-        </p:nvSpPr>
-        <p:spPr>
-          <a:xfrm>
-            <a:off x="9418320" y="4343400"/>
-            <a:ext cx="2057400" cy="749808"/>
-          </a:xfrm>
-          <a:prstGeom prst="rect">
-            <a:avLst/>
-          </a:prstGeom>
-          <a:noFill/>
-          <a:ln/>
-        </p:spPr>
-        <p:txBody>
-          <a:bodyPr wrap="square" lIns="0" tIns="0" rIns="0" bIns="0" rtlCol="0" anchor="ctr"/>
-          <a:lstStyle/>
-          <a:p>
-            <a:pPr indent="0" marL="0">
-              <a:buNone/>
-            </a:pPr>
-            <a:r>
-              <a:rPr lang="en-US" sz="1200" dirty="0">
-                <a:solidFill>
-                  <a:schemeClr val="tx1"/>
-                </a:solidFill>
-              </a:rPr>
-              <a:t>pooler_output 꺼내기</a:t>
-            </a:r>
-            <a:endParaRPr lang="en-US" sz="1200" dirty="0"/>
-          </a:p>
-        </p:txBody>
-      </p:sp>
-      <p:sp>
-        <p:nvSpPr>
-          <p:cNvPr id="19" name="box-429"/>
-          <p:cNvSpPr/>
-          <p:nvPr/>
-        </p:nvSpPr>
-        <p:spPr>
-          <a:xfrm>
-            <a:off x="8412480" y="5303520"/>
-            <a:ext cx="3108960" cy="640080"/>
-          </a:xfrm>
-          <a:prstGeom prst="roundRect">
-            <a:avLst>
-              <a:gd name="adj" fmla="val 14286"/>
-            </a:avLst>
-          </a:prstGeom>
-          <a:solidFill>
-            <a:schemeClr val="accent3"/>
-          </a:solidFill>
-          <a:ln/>
-        </p:spPr>
-      </p:sp>
-      <p:sp>
-        <p:nvSpPr>
-          <p:cNvPr id="20" name="text-430"/>
-          <p:cNvSpPr txBox="1"/>
-          <p:nvPr/>
-        </p:nvSpPr>
-        <p:spPr>
-          <a:xfrm>
-            <a:off x="8412480" y="5303520"/>
-            <a:ext cx="3108960" cy="640080"/>
-          </a:xfrm>
-          <a:prstGeom prst="rect">
-            <a:avLst/>
-          </a:prstGeom>
-          <a:noFill/>
-          <a:ln/>
-        </p:spPr>
-        <p:txBody>
-          <a:bodyPr wrap="square" lIns="0" tIns="0" rIns="0" bIns="0" rtlCol="0" anchor="ctr"/>
-          <a:lstStyle/>
-          <a:p>
-            <a:pPr algn="ctr" indent="0" marL="0">
-              <a:buNone/>
-            </a:pPr>
-            <a:r>
-              <a:rPr lang="en-US" sz="1400" b="1" dirty="0">
-                <a:solidFill>
-                  <a:schemeClr val="bg1"/>
-                </a:solidFill>
-              </a:rPr>
-              <a:t>5주차: 이 인덱스로 검색 데모</a:t>
-            </a:r>
-            <a:endParaRPr lang="en-US" sz="1400" dirty="0"/>
           </a:p>
         </p:txBody>
       </p:sp>
@@ -15769,8 +15412,8 @@
         </p:nvSpPr>
         <p:spPr>
           <a:xfrm>
-            <a:off x="640080" y="411480"/>
-            <a:ext cx="10881360" cy="822960"/>
+            <a:off x="640080" y="365760"/>
+            <a:ext cx="10881360" cy="777240"/>
           </a:xfrm>
           <a:prstGeom prst="rect">
             <a:avLst/>
@@ -15786,71 +15429,385 @@
               <a:buNone/>
             </a:pPr>
             <a:r>
-              <a:rPr lang="en-US" sz="3200" b="1" dirty="0">
+              <a:rPr lang="en-US" sz="3000" b="1" dirty="0">
+                <a:solidFill>
+                  <a:schemeClr val="tx1"/>
+                </a:solidFill>
+              </a:rPr>
+              <a:t>실습 ⑤ Pipeline으로 한 줄에</a:t>
+            </a:r>
+            <a:endParaRPr lang="en-US" sz="3000" dirty="0"/>
+          </a:p>
+        </p:txBody>
+      </p:sp>
+      <p:sp>
+        <p:nvSpPr>
+          <p:cNvPr id="3" name="codebg-437"/>
+          <p:cNvSpPr/>
+          <p:nvPr/>
+        </p:nvSpPr>
+        <p:spPr>
+          <a:xfrm>
+            <a:off x="640080" y="1325880"/>
+            <a:ext cx="6949440" cy="3108960"/>
+          </a:xfrm>
+          <a:prstGeom prst="roundRect">
+            <a:avLst>
+              <a:gd name="adj" fmla="val 3529"/>
+            </a:avLst>
+          </a:prstGeom>
+          <a:solidFill>
+            <a:schemeClr val="tx1"/>
+          </a:solidFill>
+          <a:ln/>
+        </p:spPr>
+      </p:sp>
+      <p:sp>
+        <p:nvSpPr>
+          <p:cNvPr id="4" name="text-438"/>
+          <p:cNvSpPr txBox="1"/>
+          <p:nvPr/>
+        </p:nvSpPr>
+        <p:spPr>
+          <a:xfrm>
+            <a:off x="914400" y="1554480"/>
+            <a:ext cx="6400800" cy="2651760"/>
+          </a:xfrm>
+          <a:prstGeom prst="rect">
+            <a:avLst/>
+          </a:prstGeom>
+          <a:noFill/>
+          <a:ln/>
+        </p:spPr>
+        <p:txBody>
+          <a:bodyPr wrap="square" lIns="0" tIns="0" rIns="0" bIns="0" rtlCol="0" anchor="t"/>
+          <a:lstStyle/>
+          <a:p>
+            <a:pPr indent="0" marL="0">
+              <a:lnSpc>
+                <a:spcPct val="110000"/>
+              </a:lnSpc>
+              <a:buNone/>
+            </a:pPr>
+            <a:r>
+              <a:rPr lang="en-US" sz="1200" dirty="0">
                 <a:solidFill>
                   <a:schemeClr val="bg1"/>
                 </a:solidFill>
-              </a:rPr>
-              <a:t>핵심 3줄 요약</a:t>
-            </a:r>
-            <a:endParaRPr lang="en-US" sz="3200" dirty="0"/>
-          </a:p>
-        </p:txBody>
-      </p:sp>
-      <p:sp>
-        <p:nvSpPr>
-          <p:cNvPr id="3" name="circle-431"/>
+                <a:latin typeface="Courier New" pitchFamily="34" charset="0"/>
+                <a:ea typeface="Courier New" pitchFamily="34" charset="-122"/>
+                <a:cs typeface="Courier New" pitchFamily="34" charset="-120"/>
+              </a:rPr>
+              <a:t>from transformers import pipeline</a:t>
+            </a:r>
+            <a:endParaRPr lang="en-US" sz="1200" dirty="0"/>
+          </a:p>
+          <a:p>
+            <a:pPr indent="0" marL="0">
+              <a:lnSpc>
+                <a:spcPct val="110000"/>
+              </a:lnSpc>
+              <a:buNone/>
+            </a:pPr>
+            <a:r>
+              <a:rPr lang="en-US" sz="1200" dirty="0">
+                <a:solidFill>
+                  <a:schemeClr val="bg1"/>
+                </a:solidFill>
+                <a:latin typeface="Courier New" pitchFamily="34" charset="0"/>
+                <a:ea typeface="Courier New" pitchFamily="34" charset="-122"/>
+                <a:cs typeface="Courier New" pitchFamily="34" charset="-120"/>
+              </a:rPr>
+              <a:t> </a:t>
+            </a:r>
+            <a:endParaRPr lang="en-US" sz="1200" dirty="0"/>
+          </a:p>
+          <a:p>
+            <a:pPr indent="0" marL="0">
+              <a:lnSpc>
+                <a:spcPct val="110000"/>
+              </a:lnSpc>
+              <a:buNone/>
+            </a:pPr>
+            <a:r>
+              <a:rPr lang="en-US" sz="1200" dirty="0">
+                <a:solidFill>
+                  <a:srgbClr val="FBBF24"/>
+                </a:solidFill>
+                <a:latin typeface="Courier New" pitchFamily="34" charset="0"/>
+                <a:ea typeface="Courier New" pitchFamily="34" charset="-122"/>
+                <a:cs typeface="Courier New" pitchFamily="34" charset="-120"/>
+              </a:rPr>
+              <a:t># load pipe</a:t>
+            </a:r>
+            <a:endParaRPr lang="en-US" sz="1200" dirty="0"/>
+          </a:p>
+          <a:p>
+            <a:pPr indent="0" marL="0">
+              <a:lnSpc>
+                <a:spcPct val="110000"/>
+              </a:lnSpc>
+              <a:buNone/>
+            </a:pPr>
+            <a:r>
+              <a:rPr lang="en-US" sz="1200" dirty="0">
+                <a:solidFill>
+                  <a:schemeClr val="bg1"/>
+                </a:solidFill>
+                <a:latin typeface="Courier New" pitchFamily="34" charset="0"/>
+                <a:ea typeface="Courier New" pitchFamily="34" charset="-122"/>
+                <a:cs typeface="Courier New" pitchFamily="34" charset="-120"/>
+              </a:rPr>
+              <a:t>image_classifier = pipeline(</a:t>
+            </a:r>
+            <a:endParaRPr lang="en-US" sz="1200" dirty="0"/>
+          </a:p>
+          <a:p>
+            <a:pPr indent="0" marL="0">
+              <a:lnSpc>
+                <a:spcPct val="110000"/>
+              </a:lnSpc>
+              <a:buNone/>
+            </a:pPr>
+            <a:r>
+              <a:rPr lang="en-US" sz="1200" dirty="0">
+                <a:solidFill>
+                  <a:schemeClr val="bg1"/>
+                </a:solidFill>
+                <a:latin typeface="Courier New" pitchFamily="34" charset="0"/>
+                <a:ea typeface="Courier New" pitchFamily="34" charset="-122"/>
+                <a:cs typeface="Courier New" pitchFamily="34" charset="-120"/>
+              </a:rPr>
+              <a:t>    task="zero-shot-image-classification",</a:t>
+            </a:r>
+            <a:endParaRPr lang="en-US" sz="1200" dirty="0"/>
+          </a:p>
+          <a:p>
+            <a:pPr indent="0" marL="0">
+              <a:lnSpc>
+                <a:spcPct val="110000"/>
+              </a:lnSpc>
+              <a:buNone/>
+            </a:pPr>
+            <a:r>
+              <a:rPr lang="en-US" sz="1200" dirty="0">
+                <a:solidFill>
+                  <a:schemeClr val="bg1"/>
+                </a:solidFill>
+                <a:latin typeface="Courier New" pitchFamily="34" charset="0"/>
+                <a:ea typeface="Courier New" pitchFamily="34" charset="-122"/>
+                <a:cs typeface="Courier New" pitchFamily="34" charset="-120"/>
+              </a:rPr>
+              <a:t>    model="google/siglip-base-patch16-224")</a:t>
+            </a:r>
+            <a:endParaRPr lang="en-US" sz="1200" dirty="0"/>
+          </a:p>
+          <a:p>
+            <a:pPr indent="0" marL="0">
+              <a:lnSpc>
+                <a:spcPct val="110000"/>
+              </a:lnSpc>
+              <a:buNone/>
+            </a:pPr>
+            <a:r>
+              <a:rPr lang="en-US" sz="1200" dirty="0">
+                <a:solidFill>
+                  <a:schemeClr val="bg1"/>
+                </a:solidFill>
+                <a:latin typeface="Courier New" pitchFamily="34" charset="0"/>
+                <a:ea typeface="Courier New" pitchFamily="34" charset="-122"/>
+                <a:cs typeface="Courier New" pitchFamily="34" charset="-120"/>
+              </a:rPr>
+              <a:t> </a:t>
+            </a:r>
+            <a:endParaRPr lang="en-US" sz="1200" dirty="0"/>
+          </a:p>
+          <a:p>
+            <a:pPr indent="0" marL="0">
+              <a:lnSpc>
+                <a:spcPct val="110000"/>
+              </a:lnSpc>
+              <a:buNone/>
+            </a:pPr>
+            <a:r>
+              <a:rPr lang="en-US" sz="1200" dirty="0">
+                <a:solidFill>
+                  <a:srgbClr val="FBBF24"/>
+                </a:solidFill>
+                <a:latin typeface="Courier New" pitchFamily="34" charset="0"/>
+                <a:ea typeface="Courier New" pitchFamily="34" charset="-122"/>
+                <a:cs typeface="Courier New" pitchFamily="34" charset="-120"/>
+              </a:rPr>
+              <a:t># inference</a:t>
+            </a:r>
+            <a:endParaRPr lang="en-US" sz="1200" dirty="0"/>
+          </a:p>
+          <a:p>
+            <a:pPr indent="0" marL="0">
+              <a:lnSpc>
+                <a:spcPct val="110000"/>
+              </a:lnSpc>
+              <a:buNone/>
+            </a:pPr>
+            <a:r>
+              <a:rPr lang="en-US" sz="1200" dirty="0">
+                <a:solidFill>
+                  <a:schemeClr val="bg1"/>
+                </a:solidFill>
+                <a:latin typeface="Courier New" pitchFamily="34" charset="0"/>
+                <a:ea typeface="Courier New" pitchFamily="34" charset="-122"/>
+                <a:cs typeface="Courier New" pitchFamily="34" charset="-120"/>
+              </a:rPr>
+              <a:t>outputs = image_classifier(</a:t>
+            </a:r>
+            <a:endParaRPr lang="en-US" sz="1200" dirty="0"/>
+          </a:p>
+          <a:p>
+            <a:pPr indent="0" marL="0">
+              <a:lnSpc>
+                <a:spcPct val="110000"/>
+              </a:lnSpc>
+              <a:buNone/>
+            </a:pPr>
+            <a:r>
+              <a:rPr lang="en-US" sz="1200" dirty="0">
+                <a:solidFill>
+                  <a:schemeClr val="bg1"/>
+                </a:solidFill>
+                <a:latin typeface="Courier New" pitchFamily="34" charset="0"/>
+                <a:ea typeface="Courier New" pitchFamily="34" charset="-122"/>
+                <a:cs typeface="Courier New" pitchFamily="34" charset="-120"/>
+              </a:rPr>
+              <a:t>    image, candidate_labels=["2 cats", "a plane", "a remote"])</a:t>
+            </a:r>
+            <a:endParaRPr lang="en-US" sz="1200" dirty="0"/>
+          </a:p>
+        </p:txBody>
+      </p:sp>
+      <p:sp>
+        <p:nvSpPr>
+          <p:cNvPr id="5" name="outbg-439"/>
           <p:cNvSpPr/>
           <p:nvPr/>
         </p:nvSpPr>
         <p:spPr>
           <a:xfrm>
-            <a:off x="822960" y="1600200"/>
-            <a:ext cx="914400" cy="914400"/>
-          </a:xfrm>
-          <a:prstGeom prst="ellipse">
-            <a:avLst/>
+            <a:off x="640080" y="4572000"/>
+            <a:ext cx="6949440" cy="1188720"/>
+          </a:xfrm>
+          <a:prstGeom prst="roundRect">
+            <a:avLst>
+              <a:gd name="adj" fmla="val 6154"/>
+            </a:avLst>
           </a:prstGeom>
           <a:solidFill>
-            <a:schemeClr val="accent3"/>
+            <a:schemeClr val="bg2"/>
           </a:solidFill>
-          <a:ln/>
-        </p:spPr>
-      </p:sp>
-      <p:pic>
-        <p:nvPicPr>
-          <p:cNvPr id="4" name="icon-FaToggleOn-432" descr="FaToggleOn">    </p:cNvPr>
-          <p:cNvPicPr>
-            <a:picLocks noChangeAspect="1"/>
-          </p:cNvPicPr>
-          <p:nvPr/>
-        </p:nvPicPr>
-        <p:blipFill>
-          <a:blip r:embed="rId1"/>
-          <a:stretch>
-            <a:fillRect/>
-          </a:stretch>
-        </p:blipFill>
-        <p:spPr>
-          <a:xfrm>
-            <a:off x="1060704" y="1837944"/>
-            <a:ext cx="438912" cy="438912"/>
-          </a:xfrm>
-          <a:prstGeom prst="rect">
-            <a:avLst/>
-          </a:prstGeom>
-        </p:spPr>
-      </p:pic>
-      <p:sp>
-        <p:nvSpPr>
-          <p:cNvPr id="5" name="text-433"/>
+          <a:ln w="12700">
+            <a:solidFill>
+              <a:schemeClr val="accent6"/>
+            </a:solidFill>
+            <a:prstDash val="solid"/>
+          </a:ln>
+        </p:spPr>
+      </p:sp>
+      <p:sp>
+        <p:nvSpPr>
+          <p:cNvPr id="6" name="text-440"/>
           <p:cNvSpPr txBox="1"/>
           <p:nvPr/>
         </p:nvSpPr>
         <p:spPr>
           <a:xfrm>
-            <a:off x="2011680" y="1554480"/>
-            <a:ext cx="9509760" cy="594360"/>
+            <a:off x="822960" y="4663440"/>
+            <a:ext cx="6583680" cy="1005840"/>
+          </a:xfrm>
+          <a:prstGeom prst="rect">
+            <a:avLst/>
+          </a:prstGeom>
+          <a:noFill/>
+          <a:ln/>
+        </p:spPr>
+        <p:txBody>
+          <a:bodyPr wrap="square" lIns="0" tIns="0" rIns="0" bIns="0" rtlCol="0" anchor="ctr"/>
+          <a:lstStyle/>
+          <a:p>
+            <a:pPr indent="0" marL="0">
+              <a:buNone/>
+            </a:pPr>
+            <a:r>
+              <a:rPr lang="en-US" sz="1100" b="1" dirty="0">
+                <a:solidFill>
+                  <a:schemeClr val="tx2"/>
+                </a:solidFill>
+              </a:rPr>
+              <a:t>출력</a:t>
+            </a:r>
+            <a:endParaRPr lang="en-US" sz="1300" dirty="0"/>
+          </a:p>
+          <a:p>
+            <a:pPr indent="0" marL="0">
+              <a:buNone/>
+            </a:pPr>
+            <a:r>
+              <a:rPr lang="en-US" sz="1300" dirty="0">
+                <a:solidFill>
+                  <a:schemeClr val="tx1"/>
+                </a:solidFill>
+                <a:latin typeface="Courier New" pitchFamily="34" charset="0"/>
+                <a:ea typeface="Courier New" pitchFamily="34" charset="-122"/>
+                <a:cs typeface="Courier New" pitchFamily="34" charset="-120"/>
+              </a:rPr>
+              <a:t>[{'score': 0.1983, 'label': '2 cats'},</a:t>
+            </a:r>
+            <a:endParaRPr lang="en-US" sz="1300" dirty="0"/>
+          </a:p>
+          <a:p>
+            <a:pPr indent="0" marL="0">
+              <a:buNone/>
+            </a:pPr>
+            <a:r>
+              <a:rPr lang="en-US" sz="1300" dirty="0">
+                <a:solidFill>
+                  <a:schemeClr val="tx1"/>
+                </a:solidFill>
+                <a:latin typeface="Courier New" pitchFamily="34" charset="0"/>
+                <a:ea typeface="Courier New" pitchFamily="34" charset="-122"/>
+                <a:cs typeface="Courier New" pitchFamily="34" charset="-120"/>
+              </a:rPr>
+              <a:t> {'score': 0.0, 'label': 'a remote'},</a:t>
+            </a:r>
+            <a:endParaRPr lang="en-US" sz="1300" dirty="0"/>
+          </a:p>
+          <a:p>
+            <a:pPr indent="0" marL="0">
+              <a:buNone/>
+            </a:pPr>
+            <a:r>
+              <a:rPr lang="en-US" sz="1300" dirty="0">
+                <a:solidFill>
+                  <a:schemeClr val="tx1"/>
+                </a:solidFill>
+                <a:latin typeface="Courier New" pitchFamily="34" charset="0"/>
+                <a:ea typeface="Courier New" pitchFamily="34" charset="-122"/>
+                <a:cs typeface="Courier New" pitchFamily="34" charset="-120"/>
+              </a:rPr>
+              <a:t> {'score': 0.0, 'label': 'a plane'}]</a:t>
+            </a:r>
+            <a:endParaRPr lang="en-US" sz="1300" dirty="0"/>
+          </a:p>
+        </p:txBody>
+      </p:sp>
+      <p:sp>
+        <p:nvSpPr>
+          <p:cNvPr id="7" name="text-441"/>
+          <p:cNvSpPr txBox="1"/>
+          <p:nvPr/>
+        </p:nvSpPr>
+        <p:spPr>
+          <a:xfrm>
+            <a:off x="640080" y="5870448"/>
+            <a:ext cx="7315200" cy="292608"/>
           </a:xfrm>
           <a:prstGeom prst="rect">
             <a:avLst/>
@@ -15866,27 +15823,42 @@
               <a:buNone/>
             </a:pPr>
             <a:r>
-              <a:rPr lang="en-US" sz="2600" b="1" dirty="0">
-                <a:solidFill>
-                  <a:schemeClr val="bg1"/>
-                </a:solidFill>
-              </a:rPr>
-              <a:t>SigLIP = CLIP 구조 + 객관식 대신 O/X 퀴즈</a:t>
-            </a:r>
-            <a:endParaRPr lang="en-US" sz="2600" dirty="0"/>
-          </a:p>
-        </p:txBody>
-      </p:sp>
-      <p:sp>
-        <p:nvSpPr>
-          <p:cNvPr id="6" name="text-434"/>
+              <a:rPr lang="en-US" sz="1100" dirty="0">
+                <a:solidFill>
+                  <a:schemeClr val="tx2"/>
+                </a:solidFill>
+              </a:rPr>
+              <a:t>출처: </a:t>
+            </a:r>
+            <a:r>
+              <a:rPr lang="en-US" sz="1100" u="sng" dirty="0">
+                <a:solidFill>
+                  <a:schemeClr val="tx2"/>
+                </a:solidFill>
+                <a:hlinkClick r:id="rId1" invalidUrl="" action="" tgtFrame="" tooltip="" history="1" highlightClick="0" endSnd="0">
+                  <a:extLst>
+                    <a:ext uri="{A12FA001-AC4F-418D-AE19-62706E023703}">
+                      <ahyp:hlinkClr xmlns:ahyp="http://schemas.microsoft.com/office/drawing/2018/hyperlinkcolor" val="tx"/>
+                    </a:ext>
+                  </a:extLst>
+                </a:hlinkClick>
+              </a:rPr>
+              <a:t>Inference with (multilingual) SigLIP 노트북 · 직접 실행 (base-patch16-224)</a:t>
+            </a:r>
+            <a:endParaRPr lang="en-US" sz="1100" dirty="0"/>
+          </a:p>
+        </p:txBody>
+      </p:sp>
+      <p:sp>
+        <p:nvSpPr>
+          <p:cNvPr id="8" name="text-442"/>
           <p:cNvSpPr txBox="1"/>
           <p:nvPr/>
         </p:nvSpPr>
         <p:spPr>
           <a:xfrm>
-            <a:off x="2011680" y="2194560"/>
-            <a:ext cx="9509760" cy="457200"/>
+            <a:off x="7955280" y="1325880"/>
+            <a:ext cx="3566160" cy="347472"/>
           </a:xfrm>
           <a:prstGeom prst="rect">
             <a:avLst/>
@@ -15902,71 +15874,67 @@
               <a:buNone/>
             </a:pPr>
             <a:r>
-              <a:rPr lang="en-US" sz="1900" dirty="0">
-                <a:solidFill>
-                  <a:schemeClr val="accent6"/>
-                </a:solidFill>
-              </a:rPr>
-              <a:t>Softmax → Sigmoid</a:t>
-            </a:r>
-            <a:endParaRPr lang="en-US" sz="1900" dirty="0"/>
-          </a:p>
-        </p:txBody>
-      </p:sp>
-      <p:sp>
-        <p:nvSpPr>
-          <p:cNvPr id="7" name="circle-435"/>
+              <a:rPr lang="en-US" sz="1500" b="1" dirty="0">
+                <a:solidFill>
+                  <a:schemeClr val="tx1"/>
+                </a:solidFill>
+              </a:rPr>
+              <a:t>2 cats</a:t>
+            </a:r>
+            <a:endParaRPr lang="en-US" sz="1500" dirty="0"/>
+          </a:p>
+        </p:txBody>
+      </p:sp>
+      <p:sp>
+        <p:nvSpPr>
+          <p:cNvPr id="9" name="bar-bg-443"/>
           <p:cNvSpPr/>
           <p:nvPr/>
         </p:nvSpPr>
         <p:spPr>
           <a:xfrm>
-            <a:off x="822960" y="3154680"/>
-            <a:ext cx="914400" cy="914400"/>
-          </a:xfrm>
-          <a:prstGeom prst="ellipse">
+            <a:off x="7955280" y="1709928"/>
+            <a:ext cx="2651760" cy="274320"/>
+          </a:xfrm>
+          <a:prstGeom prst="rect">
             <a:avLst/>
           </a:prstGeom>
           <a:solidFill>
-            <a:schemeClr val="accent1"/>
+            <a:schemeClr val="bg2"/>
           </a:solidFill>
           <a:ln/>
         </p:spPr>
       </p:sp>
-      <p:pic>
-        <p:nvPicPr>
-          <p:cNvPr id="8" name="icon-FaMemory-436" descr="FaMemory">    </p:cNvPr>
-          <p:cNvPicPr>
-            <a:picLocks noChangeAspect="1"/>
-          </p:cNvPicPr>
-          <p:nvPr/>
-        </p:nvPicPr>
-        <p:blipFill>
-          <a:blip r:embed="rId2"/>
-          <a:stretch>
-            <a:fillRect/>
-          </a:stretch>
-        </p:blipFill>
-        <p:spPr>
-          <a:xfrm>
-            <a:off x="1060704" y="3392424"/>
-            <a:ext cx="438912" cy="438912"/>
-          </a:xfrm>
-          <a:prstGeom prst="rect">
-            <a:avLst/>
-          </a:prstGeom>
-        </p:spPr>
-      </p:pic>
-      <p:sp>
-        <p:nvSpPr>
-          <p:cNvPr id="9" name="text-437"/>
+      <p:sp>
+        <p:nvSpPr>
+          <p:cNvPr id="10" name="bar-444"/>
+          <p:cNvSpPr/>
+          <p:nvPr/>
+        </p:nvSpPr>
+        <p:spPr>
+          <a:xfrm>
+            <a:off x="7955280" y="1709928"/>
+            <a:ext cx="525844" cy="274320"/>
+          </a:xfrm>
+          <a:prstGeom prst="rect">
+            <a:avLst/>
+          </a:prstGeom>
+          <a:solidFill>
+            <a:schemeClr val="accent5"/>
+          </a:solidFill>
+          <a:ln/>
+        </p:spPr>
+      </p:sp>
+      <p:sp>
+        <p:nvSpPr>
+          <p:cNvPr id="11" name="text-445"/>
           <p:cNvSpPr txBox="1"/>
           <p:nvPr/>
         </p:nvSpPr>
         <p:spPr>
           <a:xfrm>
-            <a:off x="2011680" y="3108960"/>
-            <a:ext cx="9509760" cy="594360"/>
+            <a:off x="10652760" y="1618488"/>
+            <a:ext cx="868680" cy="457200"/>
           </a:xfrm>
           <a:prstGeom prst="rect">
             <a:avLst/>
@@ -15978,31 +15946,31 @@
           <a:bodyPr wrap="square" lIns="0" tIns="0" rIns="0" bIns="0" rtlCol="0" anchor="t"/>
           <a:lstStyle/>
           <a:p>
-            <a:pPr indent="0" marL="0">
-              <a:buNone/>
-            </a:pPr>
-            <a:r>
-              <a:rPr lang="en-US" sz="2600" b="1" dirty="0">
-                <a:solidFill>
-                  <a:schemeClr val="bg1"/>
-                </a:solidFill>
-              </a:rPr>
-              <a:t>배치 전체를 모을 필요가 사라짐</a:t>
-            </a:r>
-            <a:endParaRPr lang="en-US" sz="2600" dirty="0"/>
-          </a:p>
-        </p:txBody>
-      </p:sp>
-      <p:sp>
-        <p:nvSpPr>
-          <p:cNvPr id="10" name="text-438"/>
+            <a:pPr algn="r" indent="0" marL="0">
+              <a:buNone/>
+            </a:pPr>
+            <a:r>
+              <a:rPr lang="en-US" sz="1600" b="1" dirty="0">
+                <a:solidFill>
+                  <a:schemeClr val="accent5"/>
+                </a:solidFill>
+              </a:rPr>
+              <a:t>19.8%</a:t>
+            </a:r>
+            <a:endParaRPr lang="en-US" sz="1600" dirty="0"/>
+          </a:p>
+        </p:txBody>
+      </p:sp>
+      <p:sp>
+        <p:nvSpPr>
+          <p:cNvPr id="12" name="text-446"/>
           <p:cNvSpPr txBox="1"/>
           <p:nvPr/>
         </p:nvSpPr>
         <p:spPr>
           <a:xfrm>
-            <a:off x="2011680" y="3749040"/>
-            <a:ext cx="9509760" cy="457200"/>
+            <a:off x="7955280" y="2057400"/>
+            <a:ext cx="3566160" cy="347472"/>
           </a:xfrm>
           <a:prstGeom prst="rect">
             <a:avLst/>
@@ -16018,71 +15986,67 @@
               <a:buNone/>
             </a:pPr>
             <a:r>
-              <a:rPr lang="en-US" sz="1900" dirty="0">
-                <a:solidFill>
-                  <a:schemeClr val="accent6"/>
-                </a:solidFill>
-              </a:rPr>
-              <a:t>메모리 ↓ · 작은 배치에 강함 · 노이즈에 강함</a:t>
-            </a:r>
-            <a:endParaRPr lang="en-US" sz="1900" dirty="0"/>
-          </a:p>
-        </p:txBody>
-      </p:sp>
-      <p:sp>
-        <p:nvSpPr>
-          <p:cNvPr id="11" name="circle-439"/>
+              <a:rPr lang="en-US" sz="1500" dirty="0">
+                <a:solidFill>
+                  <a:schemeClr val="tx1"/>
+                </a:solidFill>
+              </a:rPr>
+              <a:t>a remote</a:t>
+            </a:r>
+            <a:endParaRPr lang="en-US" sz="1500" dirty="0"/>
+          </a:p>
+        </p:txBody>
+      </p:sp>
+      <p:sp>
+        <p:nvSpPr>
+          <p:cNvPr id="13" name="bar-bg-447"/>
           <p:cNvSpPr/>
           <p:nvPr/>
         </p:nvSpPr>
         <p:spPr>
           <a:xfrm>
-            <a:off x="822960" y="4709160"/>
-            <a:ext cx="914400" cy="914400"/>
-          </a:xfrm>
-          <a:prstGeom prst="ellipse">
+            <a:off x="7955280" y="2441448"/>
+            <a:ext cx="2651760" cy="274320"/>
+          </a:xfrm>
+          <a:prstGeom prst="rect">
             <a:avLst/>
           </a:prstGeom>
           <a:solidFill>
-            <a:schemeClr val="accent2"/>
+            <a:schemeClr val="bg2"/>
           </a:solidFill>
           <a:ln/>
         </p:spPr>
       </p:sp>
-      <p:pic>
-        <p:nvPicPr>
-          <p:cNvPr id="12" name="icon-FaSearch-440" descr="FaSearch">    </p:cNvPr>
-          <p:cNvPicPr>
-            <a:picLocks noChangeAspect="1"/>
-          </p:cNvPicPr>
-          <p:nvPr/>
-        </p:nvPicPr>
-        <p:blipFill>
-          <a:blip r:embed="rId3"/>
-          <a:stretch>
-            <a:fillRect/>
-          </a:stretch>
-        </p:blipFill>
-        <p:spPr>
-          <a:xfrm>
-            <a:off x="1060704" y="4946904"/>
-            <a:ext cx="438912" cy="438912"/>
-          </a:xfrm>
-          <a:prstGeom prst="rect">
-            <a:avLst/>
-          </a:prstGeom>
-        </p:spPr>
-      </p:pic>
-      <p:sp>
-        <p:nvSpPr>
-          <p:cNvPr id="13" name="text-441"/>
+      <p:sp>
+        <p:nvSpPr>
+          <p:cNvPr id="14" name="bar-448"/>
+          <p:cNvSpPr/>
+          <p:nvPr/>
+        </p:nvSpPr>
+        <p:spPr>
+          <a:xfrm>
+            <a:off x="7955280" y="2441448"/>
+            <a:ext cx="36576" cy="274320"/>
+          </a:xfrm>
+          <a:prstGeom prst="rect">
+            <a:avLst/>
+          </a:prstGeom>
+          <a:solidFill>
+            <a:schemeClr val="accent6"/>
+          </a:solidFill>
+          <a:ln/>
+        </p:spPr>
+      </p:sp>
+      <p:sp>
+        <p:nvSpPr>
+          <p:cNvPr id="15" name="text-449"/>
           <p:cNvSpPr txBox="1"/>
           <p:nvPr/>
         </p:nvSpPr>
         <p:spPr>
           <a:xfrm>
-            <a:off x="2011680" y="4663440"/>
-            <a:ext cx="9509760" cy="594360"/>
+            <a:off x="10652760" y="2350008"/>
+            <a:ext cx="868680" cy="457200"/>
           </a:xfrm>
           <a:prstGeom prst="rect">
             <a:avLst/>
@@ -16094,31 +16058,31 @@
           <a:bodyPr wrap="square" lIns="0" tIns="0" rIns="0" bIns="0" rtlCol="0" anchor="t"/>
           <a:lstStyle/>
           <a:p>
-            <a:pPr indent="0" marL="0">
-              <a:buNone/>
-            </a:pPr>
-            <a:r>
-              <a:rPr lang="en-US" sz="2600" b="1" dirty="0">
-                <a:solidFill>
-                  <a:schemeClr val="bg1"/>
-                </a:solidFill>
-              </a:rPr>
-              <a:t>듀얼 인코더 + 공동 임베딩 공간</a:t>
-            </a:r>
-            <a:endParaRPr lang="en-US" sz="2600" dirty="0"/>
-          </a:p>
-        </p:txBody>
-      </p:sp>
-      <p:sp>
-        <p:nvSpPr>
-          <p:cNvPr id="14" name="text-442"/>
+            <a:pPr algn="r" indent="0" marL="0">
+              <a:buNone/>
+            </a:pPr>
+            <a:r>
+              <a:rPr lang="en-US" sz="1600" b="1" dirty="0">
+                <a:solidFill>
+                  <a:schemeClr val="tx2"/>
+                </a:solidFill>
+              </a:rPr>
+              <a:t>0.0%</a:t>
+            </a:r>
+            <a:endParaRPr lang="en-US" sz="1600" dirty="0"/>
+          </a:p>
+        </p:txBody>
+      </p:sp>
+      <p:sp>
+        <p:nvSpPr>
+          <p:cNvPr id="16" name="text-450"/>
           <p:cNvSpPr txBox="1"/>
           <p:nvPr/>
         </p:nvSpPr>
         <p:spPr>
           <a:xfrm>
-            <a:off x="2011680" y="5303520"/>
-            <a:ext cx="9509760" cy="457200"/>
+            <a:off x="7955280" y="2788920"/>
+            <a:ext cx="3566160" cy="347472"/>
           </a:xfrm>
           <a:prstGeom prst="rect">
             <a:avLst/>
@@ -16134,14 +16098,164 @@
               <a:buNone/>
             </a:pPr>
             <a:r>
-              <a:rPr lang="en-US" sz="1900" dirty="0">
-                <a:solidFill>
-                  <a:schemeClr val="accent6"/>
-                </a:solidFill>
-              </a:rPr>
-              <a:t>사진은 미리, 질문만 그때그때 → 대규모 검색에 적합</a:t>
-            </a:r>
-            <a:endParaRPr lang="en-US" sz="1900" dirty="0"/>
+              <a:rPr lang="en-US" sz="1500" dirty="0">
+                <a:solidFill>
+                  <a:schemeClr val="tx1"/>
+                </a:solidFill>
+              </a:rPr>
+              <a:t>a plane</a:t>
+            </a:r>
+            <a:endParaRPr lang="en-US" sz="1500" dirty="0"/>
+          </a:p>
+        </p:txBody>
+      </p:sp>
+      <p:sp>
+        <p:nvSpPr>
+          <p:cNvPr id="17" name="bar-bg-451"/>
+          <p:cNvSpPr/>
+          <p:nvPr/>
+        </p:nvSpPr>
+        <p:spPr>
+          <a:xfrm>
+            <a:off x="7955280" y="3172968"/>
+            <a:ext cx="2651760" cy="274320"/>
+          </a:xfrm>
+          <a:prstGeom prst="rect">
+            <a:avLst/>
+          </a:prstGeom>
+          <a:solidFill>
+            <a:schemeClr val="bg2"/>
+          </a:solidFill>
+          <a:ln/>
+        </p:spPr>
+      </p:sp>
+      <p:sp>
+        <p:nvSpPr>
+          <p:cNvPr id="18" name="bar-452"/>
+          <p:cNvSpPr/>
+          <p:nvPr/>
+        </p:nvSpPr>
+        <p:spPr>
+          <a:xfrm>
+            <a:off x="7955280" y="3172968"/>
+            <a:ext cx="36576" cy="274320"/>
+          </a:xfrm>
+          <a:prstGeom prst="rect">
+            <a:avLst/>
+          </a:prstGeom>
+          <a:solidFill>
+            <a:schemeClr val="accent6"/>
+          </a:solidFill>
+          <a:ln/>
+        </p:spPr>
+      </p:sp>
+      <p:sp>
+        <p:nvSpPr>
+          <p:cNvPr id="19" name="text-453"/>
+          <p:cNvSpPr txBox="1"/>
+          <p:nvPr/>
+        </p:nvSpPr>
+        <p:spPr>
+          <a:xfrm>
+            <a:off x="10652760" y="3081528"/>
+            <a:ext cx="868680" cy="457200"/>
+          </a:xfrm>
+          <a:prstGeom prst="rect">
+            <a:avLst/>
+          </a:prstGeom>
+          <a:noFill/>
+          <a:ln/>
+        </p:spPr>
+        <p:txBody>
+          <a:bodyPr wrap="square" lIns="0" tIns="0" rIns="0" bIns="0" rtlCol="0" anchor="t"/>
+          <a:lstStyle/>
+          <a:p>
+            <a:pPr algn="r" indent="0" marL="0">
+              <a:buNone/>
+            </a:pPr>
+            <a:r>
+              <a:rPr lang="en-US" sz="1600" b="1" dirty="0">
+                <a:solidFill>
+                  <a:schemeClr val="tx2"/>
+                </a:solidFill>
+              </a:rPr>
+              <a:t>0.0%</a:t>
+            </a:r>
+            <a:endParaRPr lang="en-US" sz="1600" dirty="0"/>
+          </a:p>
+        </p:txBody>
+      </p:sp>
+      <p:sp>
+        <p:nvSpPr>
+          <p:cNvPr id="20" name="card-454"/>
+          <p:cNvSpPr/>
+          <p:nvPr/>
+        </p:nvSpPr>
+        <p:spPr>
+          <a:xfrm>
+            <a:off x="7955280" y="3703320"/>
+            <a:ext cx="3566160" cy="2331720"/>
+          </a:xfrm>
+          <a:prstGeom prst="roundRect">
+            <a:avLst>
+              <a:gd name="adj" fmla="val 5490"/>
+            </a:avLst>
+          </a:prstGeom>
+          <a:solidFill>
+            <a:schemeClr val="accent3">
+              <a:alpha val="10000"/>
+            </a:schemeClr>
+          </a:solidFill>
+          <a:ln/>
+        </p:spPr>
+      </p:sp>
+      <p:sp>
+        <p:nvSpPr>
+          <p:cNvPr id="21" name="text-455"/>
+          <p:cNvSpPr txBox="1"/>
+          <p:nvPr/>
+        </p:nvSpPr>
+        <p:spPr>
+          <a:xfrm>
+            <a:off x="8138160" y="3703320"/>
+            <a:ext cx="3246120" cy="2331720"/>
+          </a:xfrm>
+          <a:prstGeom prst="rect">
+            <a:avLst/>
+          </a:prstGeom>
+          <a:noFill/>
+          <a:ln/>
+        </p:spPr>
+        <p:txBody>
+          <a:bodyPr wrap="square" lIns="0" tIns="0" rIns="0" bIns="0" rtlCol="0" anchor="ctr"/>
+          <a:lstStyle/>
+          <a:p>
+            <a:pPr indent="0" marL="0">
+              <a:buNone/>
+            </a:pPr>
+            <a:r>
+              <a:rPr lang="en-US" sz="1600" b="1" dirty="0">
+                <a:solidFill>
+                  <a:schemeClr val="accent3"/>
+                </a:solidFill>
+              </a:rPr>
+              <a:t>직접 계산(32%)과 왜 다를까?</a:t>
+            </a:r>
+            <a:endParaRPr lang="en-US" sz="1600" dirty="0"/>
+          </a:p>
+          <a:p>
+            <a:pPr indent="0" marL="0">
+              <a:buNone/>
+            </a:pPr>
+            <a:r>
+              <a:rPr lang="en-US" sz="1400" dirty="0">
+                <a:solidFill>
+                  <a:schemeClr val="tx1"/>
+                </a:solidFill>
+              </a:rPr>
+              <a:t>pipeline은 라벨을 “This is a photo of 라벨.” 문장으로 바꿔서 넣음 → 문장 표현이 점수를 바꾼다</a:t>
+            </a:r>
+            <a:endParaRPr lang="en-US" sz="1600" dirty="0"/>
           </a:p>
         </p:txBody>
       </p:sp>
@@ -16225,8 +16339,8 @@
         </p:nvSpPr>
         <p:spPr>
           <a:xfrm>
-            <a:off x="640080" y="365760"/>
-            <a:ext cx="10881360" cy="777240"/>
+            <a:off x="640080" y="411480"/>
+            <a:ext cx="10881360" cy="822960"/>
           </a:xfrm>
           <a:prstGeom prst="rect">
             <a:avLst/>
@@ -16242,49 +16356,27 @@
               <a:buNone/>
             </a:pPr>
             <a:r>
-              <a:rPr lang="en-US" sz="3000" b="1" dirty="0">
-                <a:solidFill>
-                  <a:schemeClr val="tx1"/>
-                </a:solidFill>
-              </a:rPr>
-              <a:t>함께 생각해 볼 질문</a:t>
-            </a:r>
-            <a:endParaRPr lang="en-US" sz="3000" dirty="0"/>
-          </a:p>
-        </p:txBody>
-      </p:sp>
-      <p:sp>
-        <p:nvSpPr>
-          <p:cNvPr id="3" name="card-443"/>
+              <a:rPr lang="en-US" sz="3200" b="1" dirty="0">
+                <a:solidFill>
+                  <a:schemeClr val="bg1"/>
+                </a:solidFill>
+              </a:rPr>
+              <a:t>핵심 3줄 요약</a:t>
+            </a:r>
+            <a:endParaRPr lang="en-US" sz="3200" dirty="0"/>
+          </a:p>
+        </p:txBody>
+      </p:sp>
+      <p:sp>
+        <p:nvSpPr>
+          <p:cNvPr id="3" name="circle-456"/>
           <p:cNvSpPr/>
           <p:nvPr/>
         </p:nvSpPr>
         <p:spPr>
           <a:xfrm>
-            <a:off x="640080" y="1417320"/>
-            <a:ext cx="5349240" cy="2057400"/>
-          </a:xfrm>
-          <a:prstGeom prst="roundRect">
-            <a:avLst>
-              <a:gd name="adj" fmla="val 6222"/>
-            </a:avLst>
-          </a:prstGeom>
-          <a:solidFill>
-            <a:schemeClr val="bg2"/>
-          </a:solidFill>
-          <a:ln/>
-        </p:spPr>
-      </p:sp>
-      <p:sp>
-        <p:nvSpPr>
-          <p:cNvPr id="4" name="circle-444"/>
-          <p:cNvSpPr/>
-          <p:nvPr/>
-        </p:nvSpPr>
-        <p:spPr>
-          <a:xfrm>
-            <a:off x="960120" y="1783080"/>
-            <a:ext cx="777240" cy="777240"/>
+            <a:off x="822960" y="1600200"/>
+            <a:ext cx="914400" cy="914400"/>
           </a:xfrm>
           <a:prstGeom prst="ellipse">
             <a:avLst/>
@@ -16297,7 +16389,7 @@
       </p:sp>
       <p:pic>
         <p:nvPicPr>
-          <p:cNvPr id="5" name="icon-FaComments-445" descr="FaComments">    </p:cNvPr>
+          <p:cNvPr id="4" name="icon-FaToggleOn-457" descr="FaToggleOn">    </p:cNvPr>
           <p:cNvPicPr>
             <a:picLocks noChangeAspect="1"/>
           </p:cNvPicPr>
@@ -16311,8 +16403,8 @@
         </p:blipFill>
         <p:spPr>
           <a:xfrm>
-            <a:off x="1162202" y="1985162"/>
-            <a:ext cx="373075" cy="373075"/>
+            <a:off x="1060704" y="1837944"/>
+            <a:ext cx="438912" cy="438912"/>
           </a:xfrm>
           <a:prstGeom prst="rect">
             <a:avLst/>
@@ -16321,14 +16413,14 @@
       </p:pic>
       <p:sp>
         <p:nvSpPr>
-          <p:cNvPr id="6" name="text-446"/>
+          <p:cNvPr id="5" name="text-458"/>
           <p:cNvSpPr txBox="1"/>
           <p:nvPr/>
         </p:nvSpPr>
         <p:spPr>
           <a:xfrm>
-            <a:off x="1965960" y="1737360"/>
-            <a:ext cx="914400" cy="411480"/>
+            <a:off x="2011680" y="1554480"/>
+            <a:ext cx="9509760" cy="594360"/>
           </a:xfrm>
           <a:prstGeom prst="rect">
             <a:avLst/>
@@ -16344,27 +16436,27 @@
               <a:buNone/>
             </a:pPr>
             <a:r>
-              <a:rPr lang="en-US" sz="1800" b="1" dirty="0">
-                <a:solidFill>
-                  <a:schemeClr val="accent3"/>
-                </a:solidFill>
-              </a:rPr>
-              <a:t>Q1</a:t>
-            </a:r>
-            <a:endParaRPr lang="en-US" sz="1800" dirty="0"/>
-          </a:p>
-        </p:txBody>
-      </p:sp>
-      <p:sp>
-        <p:nvSpPr>
-          <p:cNvPr id="7" name="text-447"/>
+              <a:rPr lang="en-US" sz="2600" b="1" dirty="0">
+                <a:solidFill>
+                  <a:schemeClr val="bg1"/>
+                </a:solidFill>
+              </a:rPr>
+              <a:t>SigLIP = CLIP 구조 + 객관식 대신 O/X 퀴즈</a:t>
+            </a:r>
+            <a:endParaRPr lang="en-US" sz="2600" dirty="0"/>
+          </a:p>
+        </p:txBody>
+      </p:sp>
+      <p:sp>
+        <p:nvSpPr>
+          <p:cNvPr id="6" name="text-459"/>
           <p:cNvSpPr txBox="1"/>
           <p:nvPr/>
         </p:nvSpPr>
         <p:spPr>
           <a:xfrm>
-            <a:off x="1965960" y="2194560"/>
-            <a:ext cx="3794760" cy="1143000"/>
+            <a:off x="2011680" y="2194560"/>
+            <a:ext cx="9509760" cy="457200"/>
           </a:xfrm>
           <a:prstGeom prst="rect">
             <a:avLst/>
@@ -16380,62 +16472,40 @@
               <a:buNone/>
             </a:pPr>
             <a:r>
-              <a:rPr lang="en-US" sz="1800" dirty="0">
-                <a:solidFill>
-                  <a:schemeClr val="tx1"/>
-                </a:solidFill>
-              </a:rPr>
-              <a:t>정답 캡션이 40.5%로 나왔다. 검색 필터 임계값은 몇으로 잡아야 할까?</a:t>
-            </a:r>
-            <a:endParaRPr lang="en-US" sz="1800" dirty="0"/>
-          </a:p>
-        </p:txBody>
-      </p:sp>
-      <p:sp>
-        <p:nvSpPr>
-          <p:cNvPr id="8" name="card-448"/>
+              <a:rPr lang="en-US" sz="1900" dirty="0">
+                <a:solidFill>
+                  <a:schemeClr val="accent6"/>
+                </a:solidFill>
+              </a:rPr>
+              <a:t>Softmax → Sigmoid</a:t>
+            </a:r>
+            <a:endParaRPr lang="en-US" sz="1900" dirty="0"/>
+          </a:p>
+        </p:txBody>
+      </p:sp>
+      <p:sp>
+        <p:nvSpPr>
+          <p:cNvPr id="7" name="circle-460"/>
           <p:cNvSpPr/>
           <p:nvPr/>
         </p:nvSpPr>
         <p:spPr>
           <a:xfrm>
-            <a:off x="6172200" y="1417320"/>
-            <a:ext cx="5349240" cy="2057400"/>
-          </a:xfrm>
-          <a:prstGeom prst="roundRect">
-            <a:avLst>
-              <a:gd name="adj" fmla="val 6222"/>
-            </a:avLst>
+            <a:off x="822960" y="3154680"/>
+            <a:ext cx="914400" cy="914400"/>
+          </a:xfrm>
+          <a:prstGeom prst="ellipse">
+            <a:avLst/>
           </a:prstGeom>
           <a:solidFill>
-            <a:schemeClr val="bg2"/>
-          </a:solidFill>
-          <a:ln/>
-        </p:spPr>
-      </p:sp>
-      <p:sp>
-        <p:nvSpPr>
-          <p:cNvPr id="9" name="circle-449"/>
-          <p:cNvSpPr/>
-          <p:nvPr/>
-        </p:nvSpPr>
-        <p:spPr>
-          <a:xfrm>
-            <a:off x="6492240" y="1783080"/>
-            <a:ext cx="777240" cy="777240"/>
-          </a:xfrm>
-          <a:prstGeom prst="ellipse">
-            <a:avLst/>
-          </a:prstGeom>
-          <a:solidFill>
-            <a:schemeClr val="accent3"/>
+            <a:schemeClr val="accent1"/>
           </a:solidFill>
           <a:ln/>
         </p:spPr>
       </p:sp>
       <p:pic>
         <p:nvPicPr>
-          <p:cNvPr id="10" name="icon-FaComments-450" descr="FaComments">    </p:cNvPr>
+          <p:cNvPr id="8" name="icon-FaMemory-461" descr="FaMemory">    </p:cNvPr>
           <p:cNvPicPr>
             <a:picLocks noChangeAspect="1"/>
           </p:cNvPicPr>
@@ -16449,8 +16519,8 @@
         </p:blipFill>
         <p:spPr>
           <a:xfrm>
-            <a:off x="6694322" y="1985162"/>
-            <a:ext cx="373075" cy="373075"/>
+            <a:off x="1060704" y="3392424"/>
+            <a:ext cx="438912" cy="438912"/>
           </a:xfrm>
           <a:prstGeom prst="rect">
             <a:avLst/>
@@ -16459,14 +16529,14 @@
       </p:pic>
       <p:sp>
         <p:nvSpPr>
-          <p:cNvPr id="11" name="text-451"/>
+          <p:cNvPr id="9" name="text-462"/>
           <p:cNvSpPr txBox="1"/>
           <p:nvPr/>
         </p:nvSpPr>
         <p:spPr>
           <a:xfrm>
-            <a:off x="7498080" y="1737360"/>
-            <a:ext cx="914400" cy="411480"/>
+            <a:off x="2011680" y="3108960"/>
+            <a:ext cx="9509760" cy="594360"/>
           </a:xfrm>
           <a:prstGeom prst="rect">
             <a:avLst/>
@@ -16482,27 +16552,27 @@
               <a:buNone/>
             </a:pPr>
             <a:r>
-              <a:rPr lang="en-US" sz="1800" b="1" dirty="0">
-                <a:solidFill>
-                  <a:schemeClr val="accent3"/>
-                </a:solidFill>
-              </a:rPr>
-              <a:t>Q2</a:t>
-            </a:r>
-            <a:endParaRPr lang="en-US" sz="1800" dirty="0"/>
-          </a:p>
-        </p:txBody>
-      </p:sp>
-      <p:sp>
-        <p:nvSpPr>
-          <p:cNvPr id="12" name="text-452"/>
+              <a:rPr lang="en-US" sz="2600" b="1" dirty="0">
+                <a:solidFill>
+                  <a:schemeClr val="bg1"/>
+                </a:solidFill>
+              </a:rPr>
+              <a:t>배치 전체를 모을 필요가 사라짐</a:t>
+            </a:r>
+            <a:endParaRPr lang="en-US" sz="2600" dirty="0"/>
+          </a:p>
+        </p:txBody>
+      </p:sp>
+      <p:sp>
+        <p:nvSpPr>
+          <p:cNvPr id="10" name="text-463"/>
           <p:cNvSpPr txBox="1"/>
           <p:nvPr/>
         </p:nvSpPr>
         <p:spPr>
           <a:xfrm>
-            <a:off x="7498080" y="2194560"/>
-            <a:ext cx="3794760" cy="1143000"/>
+            <a:off x="2011680" y="3749040"/>
+            <a:ext cx="9509760" cy="457200"/>
           </a:xfrm>
           <a:prstGeom prst="rect">
             <a:avLst/>
@@ -16518,62 +16588,40 @@
               <a:buNone/>
             </a:pPr>
             <a:r>
-              <a:rPr lang="en-US" sz="1800" dirty="0">
-                <a:solidFill>
-                  <a:schemeClr val="tx1"/>
-                </a:solidFill>
-              </a:rPr>
-              <a:t>한국어 질문: 영어로 번역 vs 다국어 모델, 각자 돌려본 결과는?</a:t>
-            </a:r>
-            <a:endParaRPr lang="en-US" sz="1800" dirty="0"/>
-          </a:p>
-        </p:txBody>
-      </p:sp>
-      <p:sp>
-        <p:nvSpPr>
-          <p:cNvPr id="13" name="card-453"/>
+              <a:rPr lang="en-US" sz="1900" dirty="0">
+                <a:solidFill>
+                  <a:schemeClr val="accent6"/>
+                </a:solidFill>
+              </a:rPr>
+              <a:t>메모리 ↓ · 작은 배치에 강함 · 노이즈에 강함</a:t>
+            </a:r>
+            <a:endParaRPr lang="en-US" sz="1900" dirty="0"/>
+          </a:p>
+        </p:txBody>
+      </p:sp>
+      <p:sp>
+        <p:nvSpPr>
+          <p:cNvPr id="11" name="circle-464"/>
           <p:cNvSpPr/>
           <p:nvPr/>
         </p:nvSpPr>
         <p:spPr>
           <a:xfrm>
-            <a:off x="640080" y="3749040"/>
-            <a:ext cx="5349240" cy="2057400"/>
-          </a:xfrm>
-          <a:prstGeom prst="roundRect">
-            <a:avLst>
-              <a:gd name="adj" fmla="val 6222"/>
-            </a:avLst>
+            <a:off x="822960" y="4709160"/>
+            <a:ext cx="914400" cy="914400"/>
+          </a:xfrm>
+          <a:prstGeom prst="ellipse">
+            <a:avLst/>
           </a:prstGeom>
           <a:solidFill>
-            <a:schemeClr val="bg2"/>
-          </a:solidFill>
-          <a:ln/>
-        </p:spPr>
-      </p:sp>
-      <p:sp>
-        <p:nvSpPr>
-          <p:cNvPr id="14" name="circle-454"/>
-          <p:cNvSpPr/>
-          <p:nvPr/>
-        </p:nvSpPr>
-        <p:spPr>
-          <a:xfrm>
-            <a:off x="960120" y="4114800"/>
-            <a:ext cx="777240" cy="777240"/>
-          </a:xfrm>
-          <a:prstGeom prst="ellipse">
-            <a:avLst/>
-          </a:prstGeom>
-          <a:solidFill>
-            <a:schemeClr val="accent3"/>
+            <a:schemeClr val="accent2"/>
           </a:solidFill>
           <a:ln/>
         </p:spPr>
       </p:sp>
       <p:pic>
         <p:nvPicPr>
-          <p:cNvPr id="15" name="icon-FaComments-455" descr="FaComments">    </p:cNvPr>
+          <p:cNvPr id="12" name="icon-FaSearch-465" descr="FaSearch">    </p:cNvPr>
           <p:cNvPicPr>
             <a:picLocks noChangeAspect="1"/>
           </p:cNvPicPr>
@@ -16587,8 +16635,8 @@
         </p:blipFill>
         <p:spPr>
           <a:xfrm>
-            <a:off x="1162202" y="4316882"/>
-            <a:ext cx="373075" cy="373075"/>
+            <a:off x="1060704" y="4946904"/>
+            <a:ext cx="438912" cy="438912"/>
           </a:xfrm>
           <a:prstGeom prst="rect">
             <a:avLst/>
@@ -16597,14 +16645,14 @@
       </p:pic>
       <p:sp>
         <p:nvSpPr>
-          <p:cNvPr id="16" name="text-456"/>
+          <p:cNvPr id="13" name="text-466"/>
           <p:cNvSpPr txBox="1"/>
           <p:nvPr/>
         </p:nvSpPr>
         <p:spPr>
           <a:xfrm>
-            <a:off x="1965960" y="4069080"/>
-            <a:ext cx="914400" cy="411480"/>
+            <a:off x="2011680" y="4663440"/>
+            <a:ext cx="9509760" cy="594360"/>
           </a:xfrm>
           <a:prstGeom prst="rect">
             <a:avLst/>
@@ -16620,27 +16668,27 @@
               <a:buNone/>
             </a:pPr>
             <a:r>
-              <a:rPr lang="en-US" sz="1800" b="1" dirty="0">
-                <a:solidFill>
-                  <a:schemeClr val="accent3"/>
-                </a:solidFill>
-              </a:rPr>
-              <a:t>Q3</a:t>
-            </a:r>
-            <a:endParaRPr lang="en-US" sz="1800" dirty="0"/>
-          </a:p>
-        </p:txBody>
-      </p:sp>
-      <p:sp>
-        <p:nvSpPr>
-          <p:cNvPr id="17" name="text-457"/>
+              <a:rPr lang="en-US" sz="2600" b="1" dirty="0">
+                <a:solidFill>
+                  <a:schemeClr val="bg1"/>
+                </a:solidFill>
+              </a:rPr>
+              <a:t>듀얼 인코더 + 공동 임베딩 공간</a:t>
+            </a:r>
+            <a:endParaRPr lang="en-US" sz="2600" dirty="0"/>
+          </a:p>
+        </p:txBody>
+      </p:sp>
+      <p:sp>
+        <p:nvSpPr>
+          <p:cNvPr id="14" name="text-467"/>
           <p:cNvSpPr txBox="1"/>
           <p:nvPr/>
         </p:nvSpPr>
         <p:spPr>
           <a:xfrm>
-            <a:off x="1965960" y="4526280"/>
-            <a:ext cx="3794760" cy="1143000"/>
+            <a:off x="2011680" y="5303520"/>
+            <a:ext cx="9509760" cy="457200"/>
           </a:xfrm>
           <a:prstGeom prst="rect">
             <a:avLst/>
@@ -16656,152 +16704,14 @@
               <a:buNone/>
             </a:pPr>
             <a:r>
-              <a:rPr lang="en-US" sz="1800" dirty="0">
-                <a:solidFill>
-                  <a:schemeClr val="tx1"/>
-                </a:solidFill>
-              </a:rPr>
-              <a:t>이미지 검색에도 재정렬 단계를 붙인다면 무엇을? (예: 생성형 VLM)</a:t>
-            </a:r>
-            <a:endParaRPr lang="en-US" sz="1800" dirty="0"/>
-          </a:p>
-        </p:txBody>
-      </p:sp>
-      <p:sp>
-        <p:nvSpPr>
-          <p:cNvPr id="18" name="card-458"/>
-          <p:cNvSpPr/>
-          <p:nvPr/>
-        </p:nvSpPr>
-        <p:spPr>
-          <a:xfrm>
-            <a:off x="6172200" y="3749040"/>
-            <a:ext cx="5349240" cy="2057400"/>
-          </a:xfrm>
-          <a:prstGeom prst="roundRect">
-            <a:avLst>
-              <a:gd name="adj" fmla="val 6222"/>
-            </a:avLst>
-          </a:prstGeom>
-          <a:solidFill>
-            <a:schemeClr val="bg2"/>
-          </a:solidFill>
-          <a:ln/>
-        </p:spPr>
-      </p:sp>
-      <p:sp>
-        <p:nvSpPr>
-          <p:cNvPr id="19" name="circle-459"/>
-          <p:cNvSpPr/>
-          <p:nvPr/>
-        </p:nvSpPr>
-        <p:spPr>
-          <a:xfrm>
-            <a:off x="6492240" y="4114800"/>
-            <a:ext cx="777240" cy="777240"/>
-          </a:xfrm>
-          <a:prstGeom prst="ellipse">
-            <a:avLst/>
-          </a:prstGeom>
-          <a:solidFill>
-            <a:schemeClr val="accent3"/>
-          </a:solidFill>
-          <a:ln/>
-        </p:spPr>
-      </p:sp>
-      <p:pic>
-        <p:nvPicPr>
-          <p:cNvPr id="20" name="icon-FaComments-460" descr="FaComments">    </p:cNvPr>
-          <p:cNvPicPr>
-            <a:picLocks noChangeAspect="1"/>
-          </p:cNvPicPr>
-          <p:nvPr/>
-        </p:nvPicPr>
-        <p:blipFill>
-          <a:blip r:embed="rId4"/>
-          <a:stretch>
-            <a:fillRect/>
-          </a:stretch>
-        </p:blipFill>
-        <p:spPr>
-          <a:xfrm>
-            <a:off x="6694322" y="4316882"/>
-            <a:ext cx="373075" cy="373075"/>
-          </a:xfrm>
-          <a:prstGeom prst="rect">
-            <a:avLst/>
-          </a:prstGeom>
-        </p:spPr>
-      </p:pic>
-      <p:sp>
-        <p:nvSpPr>
-          <p:cNvPr id="21" name="text-461"/>
-          <p:cNvSpPr txBox="1"/>
-          <p:nvPr/>
-        </p:nvSpPr>
-        <p:spPr>
-          <a:xfrm>
-            <a:off x="7498080" y="4069080"/>
-            <a:ext cx="914400" cy="411480"/>
-          </a:xfrm>
-          <a:prstGeom prst="rect">
-            <a:avLst/>
-          </a:prstGeom>
-          <a:noFill/>
-          <a:ln/>
-        </p:spPr>
-        <p:txBody>
-          <a:bodyPr wrap="square" lIns="0" tIns="0" rIns="0" bIns="0" rtlCol="0" anchor="t"/>
-          <a:lstStyle/>
-          <a:p>
-            <a:pPr indent="0" marL="0">
-              <a:buNone/>
-            </a:pPr>
-            <a:r>
-              <a:rPr lang="en-US" sz="1800" b="1" dirty="0">
-                <a:solidFill>
-                  <a:schemeClr val="accent3"/>
-                </a:solidFill>
-              </a:rPr>
-              <a:t>Q4</a:t>
-            </a:r>
-            <a:endParaRPr lang="en-US" sz="1800" dirty="0"/>
-          </a:p>
-        </p:txBody>
-      </p:sp>
-      <p:sp>
-        <p:nvSpPr>
-          <p:cNvPr id="22" name="text-462"/>
-          <p:cNvSpPr txBox="1"/>
-          <p:nvPr/>
-        </p:nvSpPr>
-        <p:spPr>
-          <a:xfrm>
-            <a:off x="7498080" y="4526280"/>
-            <a:ext cx="3794760" cy="1143000"/>
-          </a:xfrm>
-          <a:prstGeom prst="rect">
-            <a:avLst/>
-          </a:prstGeom>
-          <a:noFill/>
-          <a:ln/>
-        </p:spPr>
-        <p:txBody>
-          <a:bodyPr wrap="square" lIns="0" tIns="0" rIns="0" bIns="0" rtlCol="0" anchor="t"/>
-          <a:lstStyle/>
-          <a:p>
-            <a:pPr indent="0" marL="0">
-              <a:buNone/>
-            </a:pPr>
-            <a:r>
-              <a:rPr lang="en-US" sz="1800" dirty="0">
-                <a:solidFill>
-                  <a:schemeClr val="tx1"/>
-                </a:solidFill>
-              </a:rPr>
-              <a:t>32k에서 포화된다는 결과는 우리 파인튜닝에 어떤 의미일까?</a:t>
-            </a:r>
-            <a:endParaRPr lang="en-US" sz="1800" dirty="0"/>
+              <a:rPr lang="en-US" sz="1900" dirty="0">
+                <a:solidFill>
+                  <a:schemeClr val="accent6"/>
+                </a:solidFill>
+              </a:rPr>
+              <a:t>사진은 미리, 질문만 그때그때 → 대규모 검색에 적합</a:t>
+            </a:r>
+            <a:endParaRPr lang="en-US" sz="1900" dirty="0"/>
           </a:p>
         </p:txBody>
       </p:sp>
@@ -16915,7 +16825,7 @@
       </p:sp>
       <p:sp>
         <p:nvSpPr>
-          <p:cNvPr id="3" name="text-463"/>
+          <p:cNvPr id="3" name="text-468"/>
           <p:cNvSpPr txBox="1"/>
           <p:nvPr/>
         </p:nvSpPr>
@@ -16951,7 +16861,7 @@
       </p:sp>
       <p:sp>
         <p:nvSpPr>
-          <p:cNvPr id="4" name="text-464"/>
+          <p:cNvPr id="4" name="text-469"/>
           <p:cNvSpPr txBox="1"/>
           <p:nvPr/>
         </p:nvSpPr>
@@ -16994,7 +16904,7 @@
       </p:sp>
       <p:sp>
         <p:nvSpPr>
-          <p:cNvPr id="5" name="text-465"/>
+          <p:cNvPr id="5" name="text-470"/>
           <p:cNvSpPr txBox="1"/>
           <p:nvPr/>
         </p:nvSpPr>
@@ -17030,7 +16940,7 @@
       </p:sp>
       <p:sp>
         <p:nvSpPr>
-          <p:cNvPr id="6" name="text-466"/>
+          <p:cNvPr id="6" name="text-471"/>
           <p:cNvSpPr txBox="1"/>
           <p:nvPr/>
         </p:nvSpPr>
@@ -17073,7 +16983,7 @@
       </p:sp>
       <p:sp>
         <p:nvSpPr>
-          <p:cNvPr id="7" name="text-467"/>
+          <p:cNvPr id="7" name="text-472"/>
           <p:cNvSpPr txBox="1"/>
           <p:nvPr/>
         </p:nvSpPr>
@@ -17109,7 +17019,7 @@
       </p:sp>
       <p:sp>
         <p:nvSpPr>
-          <p:cNvPr id="8" name="text-468"/>
+          <p:cNvPr id="8" name="text-473"/>
           <p:cNvSpPr txBox="1"/>
           <p:nvPr/>
         </p:nvSpPr>
@@ -17152,7 +17062,7 @@
       </p:sp>
       <p:sp>
         <p:nvSpPr>
-          <p:cNvPr id="9" name="text-469"/>
+          <p:cNvPr id="9" name="text-474"/>
           <p:cNvSpPr txBox="1"/>
           <p:nvPr/>
         </p:nvSpPr>
@@ -17188,7 +17098,7 @@
       </p:sp>
       <p:sp>
         <p:nvSpPr>
-          <p:cNvPr id="10" name="text-470"/>
+          <p:cNvPr id="10" name="text-475"/>
           <p:cNvSpPr txBox="1"/>
           <p:nvPr/>
         </p:nvSpPr>
@@ -17231,7 +17141,7 @@
       </p:sp>
       <p:sp>
         <p:nvSpPr>
-          <p:cNvPr id="11" name="text-471"/>
+          <p:cNvPr id="11" name="text-476"/>
           <p:cNvSpPr txBox="1"/>
           <p:nvPr/>
         </p:nvSpPr>
@@ -17267,7 +17177,7 @@
       </p:sp>
       <p:sp>
         <p:nvSpPr>
-          <p:cNvPr id="12" name="text-472"/>
+          <p:cNvPr id="12" name="text-477"/>
           <p:cNvSpPr txBox="1"/>
           <p:nvPr/>
         </p:nvSpPr>
@@ -17310,7 +17220,7 @@
       </p:sp>
       <p:sp>
         <p:nvSpPr>
-          <p:cNvPr id="13" name="text-473"/>
+          <p:cNvPr id="13" name="text-478"/>
           <p:cNvSpPr txBox="1"/>
           <p:nvPr/>
         </p:nvSpPr>
@@ -17346,7 +17256,7 @@
       </p:sp>
       <p:sp>
         <p:nvSpPr>
-          <p:cNvPr id="14" name="text-474"/>
+          <p:cNvPr id="14" name="text-479"/>
           <p:cNvSpPr txBox="1"/>
           <p:nvPr/>
         </p:nvSpPr>
@@ -17389,7 +17299,7 @@
       </p:sp>
       <p:sp>
         <p:nvSpPr>
-          <p:cNvPr id="15" name="card-475"/>
+          <p:cNvPr id="15" name="card-480"/>
           <p:cNvSpPr/>
           <p:nvPr/>
         </p:nvSpPr>
@@ -17411,7 +17321,7 @@
       </p:sp>
       <p:sp>
         <p:nvSpPr>
-          <p:cNvPr id="16" name="text-476"/>
+          <p:cNvPr id="16" name="text-481"/>
           <p:cNvSpPr txBox="1"/>
           <p:nvPr/>
         </p:nvSpPr>
@@ -17439,7 +17349,7 @@
                   <a:schemeClr val="tx2"/>
                 </a:solidFill>
               </a:rPr>
-              <a:t>사진: scikit-image 샘플 — 고양이(Stefan van der Walt, CC0), 커피(Rachel Michetti, CC0), 로켓(SpaceX, 퍼블릭 도메인), 우주비행사(NASA, 퍼블릭 도메인) · 아이콘: Font Awesome</a:t>
+              <a:t>사진: scikit-image 샘플 — 고양이(Stefan van der Walt, CC0), 커피(Rachel Michetti, CC0), 로켓(SpaceX, PD), 우주비행사(NASA, PD) · 실습 사진: COCO val2017 #39769 · 아이콘: Font Awesome</a:t>
             </a:r>
             <a:endParaRPr lang="en-US" sz="1200" dirty="0"/>
           </a:p>
@@ -17485,666 +17395,6 @@
             <a:fld id="{F7021451-1387-4CA6-816F-3879F97B5CBC}" type="slidenum">
               <a:rPr b="0" lang="en-US"/>
               <a:t>24</a:t>
-            </a:fld>
-            <a:endParaRPr lang="en-US"/>
-          </a:p>
-        </p:txBody>
-      </p:sp>
-    </p:spTree>
-  </p:cSld>
-  <p:clrMapOvr>
-    <a:masterClrMapping/>
-  </p:clrMapOvr>
-</p:sld>
-</file>
-
-<file path=ppt/slides/slide25.xml><?xml version="1.0" encoding="utf-8"?>
-<p:sld xmlns:a="http://schemas.openxmlformats.org/drawingml/2006/main" xmlns:r="http://schemas.openxmlformats.org/officeDocument/2006/relationships" xmlns:p="http://schemas.openxmlformats.org/presentationml/2006/main">
-  <p:cSld name="Slide 25">
-    <p:spTree>
-      <p:nvGrpSpPr>
-        <p:cNvPr id="1" name=""/>
-        <p:cNvGrpSpPr/>
-        <p:nvPr/>
-      </p:nvGrpSpPr>
-      <p:grpSpPr>
-        <a:xfrm>
-          <a:off x="0" y="0"/>
-          <a:ext cx="0" cy="0"/>
-          <a:chOff x="0" y="0"/>
-          <a:chExt cx="0" cy="0"/>
-        </a:xfrm>
-      </p:grpSpPr>
-      <p:sp>
-        <p:nvSpPr>
-          <p:cNvPr id="2" name="Text 0"/>
-          <p:cNvSpPr/>
-          <p:nvPr>
-            <p:ph idx="100" type="title" hasCustomPrompt="1"/>
-          </p:nvPr>
-        </p:nvSpPr>
-        <p:spPr>
-          <a:xfrm>
-            <a:off x="640080" y="365760"/>
-            <a:ext cx="10881360" cy="777240"/>
-          </a:xfrm>
-          <a:prstGeom prst="rect">
-            <a:avLst/>
-          </a:prstGeom>
-          <a:noFill/>
-          <a:ln/>
-        </p:spPr>
-        <p:txBody>
-          <a:bodyPr wrap="square" lIns="0" tIns="0" rIns="0" bIns="0" rtlCol="0" anchor="ctr"/>
-          <a:lstStyle/>
-          <a:p>
-            <a:pPr indent="0" marL="0">
-              <a:buNone/>
-            </a:pPr>
-            <a:r>
-              <a:rPr lang="en-US" sz="3000" b="1" dirty="0">
-                <a:solidFill>
-                  <a:schemeClr val="tx1"/>
-                </a:solidFill>
-              </a:rPr>
-              <a:t>부록 — 예상 질문</a:t>
-            </a:r>
-            <a:endParaRPr lang="en-US" sz="3000" dirty="0"/>
-          </a:p>
-        </p:txBody>
-      </p:sp>
-      <p:sp>
-        <p:nvSpPr>
-          <p:cNvPr id="3" name="card-477"/>
-          <p:cNvSpPr/>
-          <p:nvPr/>
-        </p:nvSpPr>
-        <p:spPr>
-          <a:xfrm>
-            <a:off x="640080" y="1371600"/>
-            <a:ext cx="5349240" cy="2148840"/>
-          </a:xfrm>
-          <a:prstGeom prst="roundRect">
-            <a:avLst>
-              <a:gd name="adj" fmla="val 5957"/>
-            </a:avLst>
-          </a:prstGeom>
-          <a:solidFill>
-            <a:schemeClr val="bg2"/>
-          </a:solidFill>
-          <a:ln/>
-        </p:spPr>
-      </p:sp>
-      <p:sp>
-        <p:nvSpPr>
-          <p:cNvPr id="4" name="circle-478"/>
-          <p:cNvSpPr/>
-          <p:nvPr/>
-        </p:nvSpPr>
-        <p:spPr>
-          <a:xfrm>
-            <a:off x="914400" y="1645920"/>
-            <a:ext cx="548640" cy="548640"/>
-          </a:xfrm>
-          <a:prstGeom prst="ellipse">
-            <a:avLst/>
-          </a:prstGeom>
-          <a:solidFill>
-            <a:schemeClr val="accent3"/>
-          </a:solidFill>
-          <a:ln/>
-        </p:spPr>
-      </p:sp>
-      <p:pic>
-        <p:nvPicPr>
-          <p:cNvPr id="5" name="icon-FaQuestion-479" descr="FaQuestion">    </p:cNvPr>
-          <p:cNvPicPr>
-            <a:picLocks noChangeAspect="1"/>
-          </p:cNvPicPr>
-          <p:nvPr/>
-        </p:nvPicPr>
-        <p:blipFill>
-          <a:blip r:embed="rId1"/>
-          <a:stretch>
-            <a:fillRect/>
-          </a:stretch>
-        </p:blipFill>
-        <p:spPr>
-          <a:xfrm>
-            <a:off x="1057046" y="1788566"/>
-            <a:ext cx="263347" cy="263347"/>
-          </a:xfrm>
-          <a:prstGeom prst="rect">
-            <a:avLst/>
-          </a:prstGeom>
-        </p:spPr>
-      </p:pic>
-      <p:sp>
-        <p:nvSpPr>
-          <p:cNvPr id="6" name="text-480"/>
-          <p:cNvSpPr txBox="1"/>
-          <p:nvPr/>
-        </p:nvSpPr>
-        <p:spPr>
-          <a:xfrm>
-            <a:off x="1645920" y="1627632"/>
-            <a:ext cx="4160520" cy="640080"/>
-          </a:xfrm>
-          <a:prstGeom prst="rect">
-            <a:avLst/>
-          </a:prstGeom>
-          <a:noFill/>
-          <a:ln/>
-        </p:spPr>
-        <p:txBody>
-          <a:bodyPr wrap="square" lIns="0" tIns="0" rIns="0" bIns="0" rtlCol="0" anchor="t"/>
-          <a:lstStyle/>
-          <a:p>
-            <a:pPr indent="0" marL="0">
-              <a:buNone/>
-            </a:pPr>
-            <a:r>
-              <a:rPr lang="en-US" sz="1700" b="1" dirty="0">
-                <a:solidFill>
-                  <a:schemeClr val="tx1"/>
-                </a:solidFill>
-              </a:rPr>
-              <a:t>구조가 같은데 왜 SigLIP이 더 좋나요?</a:t>
-            </a:r>
-            <a:endParaRPr lang="en-US" sz="1700" dirty="0"/>
-          </a:p>
-        </p:txBody>
-      </p:sp>
-      <p:sp>
-        <p:nvSpPr>
-          <p:cNvPr id="7" name="text-481"/>
-          <p:cNvSpPr txBox="1"/>
-          <p:nvPr/>
-        </p:nvSpPr>
-        <p:spPr>
-          <a:xfrm>
-            <a:off x="1645920" y="2286000"/>
-            <a:ext cx="4160520" cy="1097280"/>
-          </a:xfrm>
-          <a:prstGeom prst="rect">
-            <a:avLst/>
-          </a:prstGeom>
-          <a:noFill/>
-          <a:ln/>
-        </p:spPr>
-        <p:txBody>
-          <a:bodyPr wrap="square" lIns="0" tIns="0" rIns="0" bIns="0" rtlCol="0" anchor="t"/>
-          <a:lstStyle/>
-          <a:p>
-            <a:pPr indent="0" marL="0">
-              <a:buNone/>
-            </a:pPr>
-            <a:r>
-              <a:rPr lang="en-US" sz="1500" dirty="0">
-                <a:solidFill>
-                  <a:schemeClr val="tx2"/>
-                </a:solidFill>
-              </a:rPr>
-              <a:t>Softmax는 작은 배치에서 비교할 보기가 부족해 신호가 약함. Sigmoid는 모든 쌍에 독립 신호 → 작은 배치에 강함.</a:t>
-            </a:r>
-            <a:endParaRPr lang="en-US" sz="1500" dirty="0"/>
-          </a:p>
-        </p:txBody>
-      </p:sp>
-      <p:sp>
-        <p:nvSpPr>
-          <p:cNvPr id="8" name="card-482"/>
-          <p:cNvSpPr/>
-          <p:nvPr/>
-        </p:nvSpPr>
-        <p:spPr>
-          <a:xfrm>
-            <a:off x="6172200" y="1371600"/>
-            <a:ext cx="5349240" cy="2148840"/>
-          </a:xfrm>
-          <a:prstGeom prst="roundRect">
-            <a:avLst>
-              <a:gd name="adj" fmla="val 5957"/>
-            </a:avLst>
-          </a:prstGeom>
-          <a:solidFill>
-            <a:schemeClr val="bg2"/>
-          </a:solidFill>
-          <a:ln/>
-        </p:spPr>
-      </p:sp>
-      <p:sp>
-        <p:nvSpPr>
-          <p:cNvPr id="9" name="circle-483"/>
-          <p:cNvSpPr/>
-          <p:nvPr/>
-        </p:nvSpPr>
-        <p:spPr>
-          <a:xfrm>
-            <a:off x="6446520" y="1645920"/>
-            <a:ext cx="548640" cy="548640"/>
-          </a:xfrm>
-          <a:prstGeom prst="ellipse">
-            <a:avLst/>
-          </a:prstGeom>
-          <a:solidFill>
-            <a:schemeClr val="accent3"/>
-          </a:solidFill>
-          <a:ln/>
-        </p:spPr>
-      </p:sp>
-      <p:pic>
-        <p:nvPicPr>
-          <p:cNvPr id="10" name="icon-FaQuestion-484" descr="FaQuestion">    </p:cNvPr>
-          <p:cNvPicPr>
-            <a:picLocks noChangeAspect="1"/>
-          </p:cNvPicPr>
-          <p:nvPr/>
-        </p:nvPicPr>
-        <p:blipFill>
-          <a:blip r:embed="rId2"/>
-          <a:stretch>
-            <a:fillRect/>
-          </a:stretch>
-        </p:blipFill>
-        <p:spPr>
-          <a:xfrm>
-            <a:off x="6589166" y="1788566"/>
-            <a:ext cx="263347" cy="263347"/>
-          </a:xfrm>
-          <a:prstGeom prst="rect">
-            <a:avLst/>
-          </a:prstGeom>
-        </p:spPr>
-      </p:pic>
-      <p:sp>
-        <p:nvSpPr>
-          <p:cNvPr id="11" name="text-485"/>
-          <p:cNvSpPr txBox="1"/>
-          <p:nvPr/>
-        </p:nvSpPr>
-        <p:spPr>
-          <a:xfrm>
-            <a:off x="7178040" y="1627632"/>
-            <a:ext cx="4160520" cy="640080"/>
-          </a:xfrm>
-          <a:prstGeom prst="rect">
-            <a:avLst/>
-          </a:prstGeom>
-          <a:noFill/>
-          <a:ln/>
-        </p:spPr>
-        <p:txBody>
-          <a:bodyPr wrap="square" lIns="0" tIns="0" rIns="0" bIns="0" rtlCol="0" anchor="t"/>
-          <a:lstStyle/>
-          <a:p>
-            <a:pPr indent="0" marL="0">
-              <a:buNone/>
-            </a:pPr>
-            <a:r>
-              <a:rPr lang="en-US" sz="1700" b="1" dirty="0">
-                <a:solidFill>
-                  <a:schemeClr val="tx1"/>
-                </a:solidFill>
-              </a:rPr>
-              <a:t>가짜 짝이 압도적으로 많은데 괜찮나요?</a:t>
-            </a:r>
-            <a:endParaRPr lang="en-US" sz="1700" dirty="0"/>
-          </a:p>
-        </p:txBody>
-      </p:sp>
-      <p:sp>
-        <p:nvSpPr>
-          <p:cNvPr id="12" name="text-486"/>
-          <p:cNvSpPr txBox="1"/>
-          <p:nvPr/>
-        </p:nvSpPr>
-        <p:spPr>
-          <a:xfrm>
-            <a:off x="7178040" y="2286000"/>
-            <a:ext cx="4160520" cy="1097280"/>
-          </a:xfrm>
-          <a:prstGeom prst="rect">
-            <a:avLst/>
-          </a:prstGeom>
-          <a:noFill/>
-          <a:ln/>
-        </p:spPr>
-        <p:txBody>
-          <a:bodyPr wrap="square" lIns="0" tIns="0" rIns="0" bIns="0" rtlCol="0" anchor="t"/>
-          <a:lstStyle/>
-          <a:p>
-            <a:pPr indent="0" marL="0">
-              <a:buNone/>
-            </a:pPr>
-            <a:r>
-              <a:rPr lang="en-US" sz="1500" dirty="0">
-                <a:solidFill>
-                  <a:schemeClr val="tx2"/>
-                </a:solidFill>
-              </a:rPr>
-              <a:t>바이어스 b를 −10에서 시작해 “대부분 짝 아님”에서 출발 → 초반 손실 폭주를 막음.</a:t>
-            </a:r>
-            <a:endParaRPr lang="en-US" sz="1500" dirty="0"/>
-          </a:p>
-        </p:txBody>
-      </p:sp>
-      <p:sp>
-        <p:nvSpPr>
-          <p:cNvPr id="13" name="card-487"/>
-          <p:cNvSpPr/>
-          <p:nvPr/>
-        </p:nvSpPr>
-        <p:spPr>
-          <a:xfrm>
-            <a:off x="640080" y="3749040"/>
-            <a:ext cx="5349240" cy="2148840"/>
-          </a:xfrm>
-          <a:prstGeom prst="roundRect">
-            <a:avLst>
-              <a:gd name="adj" fmla="val 5957"/>
-            </a:avLst>
-          </a:prstGeom>
-          <a:solidFill>
-            <a:schemeClr val="bg2"/>
-          </a:solidFill>
-          <a:ln/>
-        </p:spPr>
-      </p:sp>
-      <p:sp>
-        <p:nvSpPr>
-          <p:cNvPr id="14" name="circle-488"/>
-          <p:cNvSpPr/>
-          <p:nvPr/>
-        </p:nvSpPr>
-        <p:spPr>
-          <a:xfrm>
-            <a:off x="914400" y="4023360"/>
-            <a:ext cx="548640" cy="548640"/>
-          </a:xfrm>
-          <a:prstGeom prst="ellipse">
-            <a:avLst/>
-          </a:prstGeom>
-          <a:solidFill>
-            <a:schemeClr val="accent3"/>
-          </a:solidFill>
-          <a:ln/>
-        </p:spPr>
-      </p:sp>
-      <p:pic>
-        <p:nvPicPr>
-          <p:cNvPr id="15" name="icon-FaQuestion-489" descr="FaQuestion">    </p:cNvPr>
-          <p:cNvPicPr>
-            <a:picLocks noChangeAspect="1"/>
-          </p:cNvPicPr>
-          <p:nvPr/>
-        </p:nvPicPr>
-        <p:blipFill>
-          <a:blip r:embed="rId3"/>
-          <a:stretch>
-            <a:fillRect/>
-          </a:stretch>
-        </p:blipFill>
-        <p:spPr>
-          <a:xfrm>
-            <a:off x="1057046" y="4166006"/>
-            <a:ext cx="263347" cy="263347"/>
-          </a:xfrm>
-          <a:prstGeom prst="rect">
-            <a:avLst/>
-          </a:prstGeom>
-        </p:spPr>
-      </p:pic>
-      <p:sp>
-        <p:nvSpPr>
-          <p:cNvPr id="16" name="text-490"/>
-          <p:cNvSpPr txBox="1"/>
-          <p:nvPr/>
-        </p:nvSpPr>
-        <p:spPr>
-          <a:xfrm>
-            <a:off x="1645920" y="4005072"/>
-            <a:ext cx="4160520" cy="640080"/>
-          </a:xfrm>
-          <a:prstGeom prst="rect">
-            <a:avLst/>
-          </a:prstGeom>
-          <a:noFill/>
-          <a:ln/>
-        </p:spPr>
-        <p:txBody>
-          <a:bodyPr wrap="square" lIns="0" tIns="0" rIns="0" bIns="0" rtlCol="0" anchor="t"/>
-          <a:lstStyle/>
-          <a:p>
-            <a:pPr indent="0" marL="0">
-              <a:buNone/>
-            </a:pPr>
-            <a:r>
-              <a:rPr lang="en-US" sz="1700" b="1" dirty="0">
-                <a:solidFill>
-                  <a:schemeClr val="tx1"/>
-                </a:solidFill>
-              </a:rPr>
-              <a:t>검색할 때도 sigmoid를 써야 하나요?</a:t>
-            </a:r>
-            <a:endParaRPr lang="en-US" sz="1700" dirty="0"/>
-          </a:p>
-        </p:txBody>
-      </p:sp>
-      <p:sp>
-        <p:nvSpPr>
-          <p:cNvPr id="17" name="text-491"/>
-          <p:cNvSpPr txBox="1"/>
-          <p:nvPr/>
-        </p:nvSpPr>
-        <p:spPr>
-          <a:xfrm>
-            <a:off x="1645920" y="4663440"/>
-            <a:ext cx="4160520" cy="1097280"/>
-          </a:xfrm>
-          <a:prstGeom prst="rect">
-            <a:avLst/>
-          </a:prstGeom>
-          <a:noFill/>
-          <a:ln/>
-        </p:spPr>
-        <p:txBody>
-          <a:bodyPr wrap="square" lIns="0" tIns="0" rIns="0" bIns="0" rtlCol="0" anchor="t"/>
-          <a:lstStyle/>
-          <a:p>
-            <a:pPr indent="0" marL="0">
-              <a:buNone/>
-            </a:pPr>
-            <a:r>
-              <a:rPr lang="en-US" sz="1500" dirty="0">
-                <a:solidFill>
-                  <a:schemeClr val="tx2"/>
-                </a:solidFill>
-              </a:rPr>
-              <a:t>순위만 필요하면 내적(코사인 유사도)으로 충분. 확률값이 필요할 때만 sigmoid(t·sim + b).</a:t>
-            </a:r>
-            <a:endParaRPr lang="en-US" sz="1500" dirty="0"/>
-          </a:p>
-        </p:txBody>
-      </p:sp>
-      <p:sp>
-        <p:nvSpPr>
-          <p:cNvPr id="18" name="card-492"/>
-          <p:cNvSpPr/>
-          <p:nvPr/>
-        </p:nvSpPr>
-        <p:spPr>
-          <a:xfrm>
-            <a:off x="6172200" y="3749040"/>
-            <a:ext cx="5349240" cy="2148840"/>
-          </a:xfrm>
-          <a:prstGeom prst="roundRect">
-            <a:avLst>
-              <a:gd name="adj" fmla="val 5957"/>
-            </a:avLst>
-          </a:prstGeom>
-          <a:solidFill>
-            <a:schemeClr val="bg2"/>
-          </a:solidFill>
-          <a:ln/>
-        </p:spPr>
-      </p:sp>
-      <p:sp>
-        <p:nvSpPr>
-          <p:cNvPr id="19" name="circle-493"/>
-          <p:cNvSpPr/>
-          <p:nvPr/>
-        </p:nvSpPr>
-        <p:spPr>
-          <a:xfrm>
-            <a:off x="6446520" y="4023360"/>
-            <a:ext cx="548640" cy="548640"/>
-          </a:xfrm>
-          <a:prstGeom prst="ellipse">
-            <a:avLst/>
-          </a:prstGeom>
-          <a:solidFill>
-            <a:schemeClr val="accent3"/>
-          </a:solidFill>
-          <a:ln/>
-        </p:spPr>
-      </p:sp>
-      <p:pic>
-        <p:nvPicPr>
-          <p:cNvPr id="20" name="icon-FaQuestion-494" descr="FaQuestion">    </p:cNvPr>
-          <p:cNvPicPr>
-            <a:picLocks noChangeAspect="1"/>
-          </p:cNvPicPr>
-          <p:nvPr/>
-        </p:nvPicPr>
-        <p:blipFill>
-          <a:blip r:embed="rId4"/>
-          <a:stretch>
-            <a:fillRect/>
-          </a:stretch>
-        </p:blipFill>
-        <p:spPr>
-          <a:xfrm>
-            <a:off x="6589166" y="4166006"/>
-            <a:ext cx="263347" cy="263347"/>
-          </a:xfrm>
-          <a:prstGeom prst="rect">
-            <a:avLst/>
-          </a:prstGeom>
-        </p:spPr>
-      </p:pic>
-      <p:sp>
-        <p:nvSpPr>
-          <p:cNvPr id="21" name="text-495"/>
-          <p:cNvSpPr txBox="1"/>
-          <p:nvPr/>
-        </p:nvSpPr>
-        <p:spPr>
-          <a:xfrm>
-            <a:off x="7178040" y="4005072"/>
-            <a:ext cx="4160520" cy="640080"/>
-          </a:xfrm>
-          <a:prstGeom prst="rect">
-            <a:avLst/>
-          </a:prstGeom>
-          <a:noFill/>
-          <a:ln/>
-        </p:spPr>
-        <p:txBody>
-          <a:bodyPr wrap="square" lIns="0" tIns="0" rIns="0" bIns="0" rtlCol="0" anchor="t"/>
-          <a:lstStyle/>
-          <a:p>
-            <a:pPr indent="0" marL="0">
-              <a:buNone/>
-            </a:pPr>
-            <a:r>
-              <a:rPr lang="en-US" sz="1700" b="1" dirty="0">
-                <a:solidFill>
-                  <a:schemeClr val="tx1"/>
-                </a:solidFill>
-              </a:rPr>
-              <a:t>padding="max_length"는 왜 필수인가요?</a:t>
-            </a:r>
-            <a:endParaRPr lang="en-US" sz="1700" dirty="0"/>
-          </a:p>
-        </p:txBody>
-      </p:sp>
-      <p:sp>
-        <p:nvSpPr>
-          <p:cNvPr id="22" name="text-496"/>
-          <p:cNvSpPr txBox="1"/>
-          <p:nvPr/>
-        </p:nvSpPr>
-        <p:spPr>
-          <a:xfrm>
-            <a:off x="7178040" y="4663440"/>
-            <a:ext cx="4160520" cy="1097280"/>
-          </a:xfrm>
-          <a:prstGeom prst="rect">
-            <a:avLst/>
-          </a:prstGeom>
-          <a:noFill/>
-          <a:ln/>
-        </p:spPr>
-        <p:txBody>
-          <a:bodyPr wrap="square" lIns="0" tIns="0" rIns="0" bIns="0" rtlCol="0" anchor="t"/>
-          <a:lstStyle/>
-          <a:p>
-            <a:pPr indent="0" marL="0">
-              <a:buNone/>
-            </a:pPr>
-            <a:r>
-              <a:rPr lang="en-US" sz="1500" dirty="0">
-                <a:solidFill>
-                  <a:schemeClr val="tx2"/>
-                </a:solidFill>
-              </a:rPr>
-              <a:t>학습할 때 항상 64토큰으로 패딩했기 때문. 다르게 하면 텍스트 임베딩이 달라짐.</a:t>
-            </a:r>
-            <a:endParaRPr lang="en-US" sz="1500" dirty="0"/>
-          </a:p>
-        </p:txBody>
-      </p:sp>
-      <p:sp>
-        <p:nvSpPr>
-          <p:cNvPr id="25" name="Slide Number Placeholder 0"/>
-          <p:cNvSpPr>
-            <a:spLocks noGrp="1"/>
-          </p:cNvSpPr>
-          <p:nvPr>
-            <p:ph type="sldNum" sz="quarter" idx="4294967295"/>
-          </p:nvPr>
-        </p:nvSpPr>
-        <p:spPr>
-          <a:xfrm>
-            <a:off x="11155680" y="6355080"/>
-            <a:ext cx="548640" cy="274320"/>
-          </a:xfrm>
-          <a:prstGeom prst="rect">
-            <a:avLst/>
-          </a:prstGeom>
-          <a:extLst>
-            <a:ext uri="{C572A759-6A51-4108-AA02-DFA0A04FC94B}">
-              <ma14:wrappingTextBoxFlag xmlns:ma14="http://schemas.microsoft.com/office/mac/drawingml/2011/main" val="0"/>
-            </a:ext>
-          </a:extLst>
-        </p:spPr>
-        <p:txBody>
-          <a:bodyPr/>
-          <a:lstStyle>
-            <a:lvl1pPr>
-              <a:defRPr sz="1000">
-                <a:solidFill>
-                  <a:schemeClr val="accent6"/>
-                </a:solidFill>
-              </a:defRPr>
-            </a:lvl1pPr>
-          </a:lstStyle>
-          <a:p>
-            <a:pPr algn="r"/>
-            <a:fld id="{F7021451-1387-4CA6-816F-3879F97B5CBC}" type="slidenum">
-              <a:rPr b="0" lang="en-US"/>
-              <a:t>25</a:t>
             </a:fld>
             <a:endParaRPr lang="en-US"/>
           </a:p>

--- a/week4-siglip/김가은/SigLIP_4주차_발표.pptx
+++ b/week4-siglip/김가은/SigLIP_4주차_발표.pptx
@@ -130,14 +130,14 @@
   <p:extLst>
     <p:ext uri="{521415D9-36F7-43E2-AB2F-B90AF26B5E84}">
       <p14:sectionLst xmlns:p14="http://schemas.microsoft.com/office/powerpoint/2010/main">
-        <p14:section name="도입" id="{39ae13d3-5ce1-8b69-2a31-19c9b2a9c01e}">
+        <p14:section name="도입" id="{5a4cbd6d-93d5-57af-b157-bcdb6717fa73}">
           <p14:sldIdLst>
             <p14:sldId id="256"/>
             <p14:sldId id="257"/>
             <p14:sldId id="258"/>
           </p14:sldIdLst>
         </p14:section>
-        <p14:section name="배경: 대조학습" id="{a4631b60-7256-86fd-fb77-9d30f9f396b2}">
+        <p14:section name="배경: 대조학습" id="{80d862f2-2d55-801b-5676-27e9bcd70a2e}">
           <p14:sldIdLst>
             <p14:sldId id="259"/>
             <p14:sldId id="260"/>
@@ -145,7 +145,7 @@
             <p14:sldId id="262"/>
           </p14:sldIdLst>
         </p14:section>
-        <p14:section name="SigLIP 핵심" id="{44ae4f9e-b9b8-591a-524f-c993ba4ab386}">
+        <p14:section name="SigLIP 핵심" id="{9c7f61d5-eac1-2c59-aaf5-c309fa575623}">
           <p14:sldIdLst>
             <p14:sldId id="263"/>
             <p14:sldId id="264"/>
@@ -156,13 +156,13 @@
             <p14:sldId id="269"/>
           </p14:sldIdLst>
         </p14:section>
-        <p14:section name="검색에 적합한 이유" id="{d7eaa629-3c75-4863-eab6-9e371012d33f}">
+        <p14:section name="검색에 적합한 이유" id="{fb2f7821-1607-f69b-8c58-dc0a43df6c1f}">
           <p14:sldIdLst>
             <p14:sldId id="270"/>
             <p14:sldId id="271"/>
           </p14:sldIdLst>
         </p14:section>
-        <p14:section name="실습" id="{1e873515-e7a1-f1ce-f320-4fd73ba0bfc6}">
+        <p14:section name="실습" id="{8ff9cedf-c4e1-1afc-3b8b-526d06890c45}">
           <p14:sldIdLst>
             <p14:sldId id="272"/>
             <p14:sldId id="273"/>
@@ -172,7 +172,7 @@
             <p14:sldId id="277"/>
           </p14:sldIdLst>
         </p14:section>
-        <p14:section name="마무리" id="{fea26faf-d0bc-3f19-8d5c-23b857d722f7}">
+        <p14:section name="마무리" id="{44060433-0d20-7a3c-a505-af45d446c4d0}">
           <p14:sldIdLst>
             <p14:sldId id="278"/>
             <p14:sldId id="279"/>
@@ -2425,10 +2425,11 @@
           <a:p>
             <a:r>
               <a:rPr lang="en-US" dirty="0"/>
-              <a:t>다음은 다국어 예제입니다. 프랑스어, 네덜란드어, 독일어 문장을 넣어 봤고, 프랑스어 '고양이 두 마리 사진'이 29.5%, 나머지는 0%가 나왔습니다.
-그런데 짚을 점이 하나 있어요. 노트북의 다국어 셀에서 모델을 새로 불러오는 부분이 주석 처리되어 있어서, 이 결과는 다국어 모델이 아니라 앞에서 불러온 영어 base 모델로 나온 겁니다.
-영어 모델인데도 프랑스어 문장을 어느 정도 맞힌 셈이에요.
-제대로 비교하려면 google/siglip-base-patch16-256-multilingual을 불러와서 다시 돌려야 하고, 한국어 질문도 이 모델로 실험해 보면 5주차에 바로 쓸 수 있습니다.</a:t>
+              <a:t>다음은 다국어 예제입니다. 이번에는 다국어 체크포인트인 siglip-base-patch16-256-multilingual을 불러왔습니다. 논문에서 mSigLIP이라고 부르는 모델로, 영어로 거르지 않은 데이터로 학습했고 어휘가 25만 토큰이라 한국어도 다룰 수 있습니다.
+제대로 불러왔는지는 출력으로 확인할 수 있어요. 이 모델은 입력 해상도가 256이라서 pixel_values가 256×256으로 나옵니다. 모델 이름의 256이 바로 이 숫자예요.
+프랑스어, 네덜란드어, 독일어 문장을 넣었더니 프랑스어 '고양이 두 마리 사진'이 19.2%, 강아지와 자동차는 0%가 나왔습니다.
+재미있는 건, 실수로 영어 모델에 같은 문장을 넣었을 때는 29.5%가 나왔다는 점이에요. 그럼 영어 모델이 더 좋은 걸까요? 그렇지는 않습니다. 모델마다 학습된 온도 t와 바이어스 b가 달라서 확률 크기 자체를 모델끼리 비교하면 안 돼요.
+중요한 건 정답 캡션만 높고 나머지는 0으로 확실히 구분했다는 점이고, 한국어 질문을 쓸 5주차에는 이 다국어 모델을 후보로 써 볼 수 있습니다.</a:t>
             </a:r>
             <a:endParaRPr lang="en-US" dirty="0"/>
           </a:p>
@@ -14446,7 +14447,7 @@
                   <a:schemeClr val="tx1"/>
                 </a:solidFill>
               </a:rPr>
-              <a:t>실습 ④ 다른 언어로 물어보기</a:t>
+              <a:t>실습 ④ 다국어 모델로 물어보기</a:t>
             </a:r>
             <a:endParaRPr lang="en-US" sz="3000" dirty="0"/>
           </a:p>
@@ -14461,11 +14462,11 @@
         <p:spPr>
           <a:xfrm>
             <a:off x="640080" y="1325880"/>
-            <a:ext cx="6949440" cy="3429000"/>
+            <a:ext cx="6949440" cy="3246120"/>
           </a:xfrm>
           <a:prstGeom prst="roundRect">
             <a:avLst>
-              <a:gd name="adj" fmla="val 3200"/>
+              <a:gd name="adj" fmla="val 3380"/>
             </a:avLst>
           </a:prstGeom>
           <a:solidFill>
@@ -14483,7 +14484,7 @@
         <p:spPr>
           <a:xfrm>
             <a:off x="914400" y="1554480"/>
-            <a:ext cx="6400800" cy="2971800"/>
+            <a:ext cx="6400800" cy="2788920"/>
           </a:xfrm>
           <a:prstGeom prst="rect">
             <a:avLst/>
@@ -14504,13 +14505,13 @@
             <a:r>
               <a:rPr lang="en-US" sz="1200" dirty="0">
                 <a:solidFill>
-                  <a:srgbClr val="FBBF24"/>
+                  <a:schemeClr val="bg1"/>
                 </a:solidFill>
                 <a:latin typeface="Courier New" pitchFamily="34" charset="0"/>
                 <a:ea typeface="Courier New" pitchFamily="34" charset="-122"/>
                 <a:cs typeface="Courier New" pitchFamily="34" charset="-120"/>
               </a:rPr>
-              <a:t># from transformers import AutoProcessor, AutoModel</a:t>
+              <a:t>from transformers import AutoProcessor, AutoModel</a:t>
             </a:r>
             <a:endParaRPr lang="en-US" sz="1200" dirty="0"/>
           </a:p>
@@ -14524,13 +14525,13 @@
             <a:r>
               <a:rPr lang="en-US" sz="1200" dirty="0">
                 <a:solidFill>
-                  <a:srgbClr val="FBBF24"/>
+                  <a:schemeClr val="bg1"/>
                 </a:solidFill>
                 <a:latin typeface="Courier New" pitchFamily="34" charset="0"/>
                 <a:ea typeface="Courier New" pitchFamily="34" charset="-122"/>
                 <a:cs typeface="Courier New" pitchFamily="34" charset="-120"/>
               </a:rPr>
-              <a:t># processor = AutoProcessor.from_pretrained(</a:t>
+              <a:t>ckpt = "google/siglip-base-patch16-256-multilingual"</a:t>
             </a:r>
             <a:endParaRPr lang="en-US" sz="1200" dirty="0"/>
           </a:p>
@@ -14544,13 +14545,13 @@
             <a:r>
               <a:rPr lang="en-US" sz="1200" dirty="0">
                 <a:solidFill>
-                  <a:srgbClr val="FBBF24"/>
+                  <a:schemeClr val="bg1"/>
                 </a:solidFill>
                 <a:latin typeface="Courier New" pitchFamily="34" charset="0"/>
                 <a:ea typeface="Courier New" pitchFamily="34" charset="-122"/>
                 <a:cs typeface="Courier New" pitchFamily="34" charset="-120"/>
               </a:rPr>
-              <a:t>#     "google/siglip-so400m-patch14-384")</a:t>
+              <a:t>processor = AutoProcessor.from_pretrained(ckpt)</a:t>
             </a:r>
             <a:endParaRPr lang="en-US" sz="1200" dirty="0"/>
           </a:p>
@@ -14564,13 +14565,13 @@
             <a:r>
               <a:rPr lang="en-US" sz="1200" dirty="0">
                 <a:solidFill>
-                  <a:srgbClr val="FBBF24"/>
+                  <a:schemeClr val="bg1"/>
                 </a:solidFill>
                 <a:latin typeface="Courier New" pitchFamily="34" charset="0"/>
                 <a:ea typeface="Courier New" pitchFamily="34" charset="-122"/>
                 <a:cs typeface="Courier New" pitchFamily="34" charset="-120"/>
               </a:rPr>
-              <a:t># model = AutoModel.from_pretrained(</a:t>
+              <a:t>model = AutoModel.from_pretrained(ckpt)</a:t>
             </a:r>
             <a:endParaRPr lang="en-US" sz="1200" dirty="0"/>
           </a:p>
@@ -14584,13 +14585,13 @@
             <a:r>
               <a:rPr lang="en-US" sz="1200" dirty="0">
                 <a:solidFill>
-                  <a:srgbClr val="FBBF24"/>
+                  <a:schemeClr val="bg1"/>
                 </a:solidFill>
                 <a:latin typeface="Courier New" pitchFamily="34" charset="0"/>
                 <a:ea typeface="Courier New" pitchFamily="34" charset="-122"/>
                 <a:cs typeface="Courier New" pitchFamily="34" charset="-120"/>
               </a:rPr>
-              <a:t>#     "google/siglip-so400m-patch14-384")</a:t>
+              <a:t> </a:t>
             </a:r>
             <a:endParaRPr lang="en-US" sz="1200" dirty="0"/>
           </a:p>
@@ -14610,7 +14611,7 @@
                 <a:ea typeface="Courier New" pitchFamily="34" charset="-122"/>
                 <a:cs typeface="Courier New" pitchFamily="34" charset="-120"/>
               </a:rPr>
-              <a:t> </a:t>
+              <a:t>texts = ["une photo de 2 chats", "een foto met een hond",</a:t>
             </a:r>
             <a:endParaRPr lang="en-US" sz="1200" dirty="0"/>
           </a:p>
@@ -14630,7 +14631,7 @@
                 <a:ea typeface="Courier New" pitchFamily="34" charset="-122"/>
                 <a:cs typeface="Courier New" pitchFamily="34" charset="-120"/>
               </a:rPr>
-              <a:t>texts = ["une photo de 2 chats", "een foto met een hond",</a:t>
+              <a:t>         "ein Bild von einem Auto"]</a:t>
             </a:r>
             <a:endParaRPr lang="en-US" sz="1200" dirty="0"/>
           </a:p>
@@ -14650,7 +14651,7 @@
                 <a:ea typeface="Courier New" pitchFamily="34" charset="-122"/>
                 <a:cs typeface="Courier New" pitchFamily="34" charset="-120"/>
               </a:rPr>
-              <a:t>         "ein Bild von einem Auto"]</a:t>
+              <a:t>inputs = processor(text=texts, images=image,</a:t>
             </a:r>
             <a:endParaRPr lang="en-US" sz="1200" dirty="0"/>
           </a:p>
@@ -14670,7 +14671,7 @@
                 <a:ea typeface="Courier New" pitchFamily="34" charset="-122"/>
                 <a:cs typeface="Courier New" pitchFamily="34" charset="-120"/>
               </a:rPr>
-              <a:t>inputs = processor(text=texts, images=image,</a:t>
+              <a:t>                   padding="max_length", return_tensors="pt")</a:t>
             </a:r>
             <a:endParaRPr lang="en-US" sz="1200" dirty="0"/>
           </a:p>
@@ -14690,7 +14691,7 @@
                 <a:ea typeface="Courier New" pitchFamily="34" charset="-122"/>
                 <a:cs typeface="Courier New" pitchFamily="34" charset="-120"/>
               </a:rPr>
-              <a:t>                   padding="max_length", return_tensors="pt")</a:t>
+              <a:t>with torch.no_grad():</a:t>
             </a:r>
             <a:endParaRPr lang="en-US" sz="1200" dirty="0"/>
           </a:p>
@@ -14710,7 +14711,7 @@
                 <a:ea typeface="Courier New" pitchFamily="34" charset="-122"/>
                 <a:cs typeface="Courier New" pitchFamily="34" charset="-120"/>
               </a:rPr>
-              <a:t>with torch.no_grad():</a:t>
+              <a:t>  outputs = model(**inputs)</a:t>
             </a:r>
             <a:endParaRPr lang="en-US" sz="1200" dirty="0"/>
           </a:p>
@@ -14730,41 +14731,118 @@
                 <a:ea typeface="Courier New" pitchFamily="34" charset="-122"/>
                 <a:cs typeface="Courier New" pitchFamily="34" charset="-120"/>
               </a:rPr>
-              <a:t>  outputs = model(**inputs)</a:t>
+              <a:t>probs = torch.sigmoid(outputs.logits_per_image)</a:t>
             </a:r>
             <a:endParaRPr lang="en-US" sz="1200" dirty="0"/>
           </a:p>
-          <a:p>
-            <a:pPr indent="0" marL="0">
-              <a:lnSpc>
-                <a:spcPct val="110000"/>
-              </a:lnSpc>
+        </p:txBody>
+      </p:sp>
+      <p:sp>
+        <p:nvSpPr>
+          <p:cNvPr id="5" name="outbg-418"/>
+          <p:cNvSpPr/>
+          <p:nvPr/>
+        </p:nvSpPr>
+        <p:spPr>
+          <a:xfrm>
+            <a:off x="640080" y="4663440"/>
+            <a:ext cx="6949440" cy="868680"/>
+          </a:xfrm>
+          <a:prstGeom prst="roundRect">
+            <a:avLst>
+              <a:gd name="adj" fmla="val 8421"/>
+            </a:avLst>
+          </a:prstGeom>
+          <a:solidFill>
+            <a:schemeClr val="bg2"/>
+          </a:solidFill>
+          <a:ln w="12700">
+            <a:solidFill>
+              <a:schemeClr val="accent6"/>
+            </a:solidFill>
+            <a:prstDash val="solid"/>
+          </a:ln>
+        </p:spPr>
+      </p:sp>
+      <p:sp>
+        <p:nvSpPr>
+          <p:cNvPr id="6" name="text-419"/>
+          <p:cNvSpPr txBox="1"/>
+          <p:nvPr/>
+        </p:nvSpPr>
+        <p:spPr>
+          <a:xfrm>
+            <a:off x="822960" y="4754880"/>
+            <a:ext cx="6583680" cy="685800"/>
+          </a:xfrm>
+          <a:prstGeom prst="rect">
+            <a:avLst/>
+          </a:prstGeom>
+          <a:noFill/>
+          <a:ln/>
+        </p:spPr>
+        <p:txBody>
+          <a:bodyPr wrap="square" lIns="0" tIns="0" rIns="0" bIns="0" rtlCol="0" anchor="ctr"/>
+          <a:lstStyle/>
+          <a:p>
+            <a:pPr indent="0" marL="0">
+              <a:buNone/>
+            </a:pPr>
+            <a:r>
+              <a:rPr lang="en-US" sz="1100" b="1" dirty="0">
+                <a:solidFill>
+                  <a:schemeClr val="tx2"/>
+                </a:solidFill>
+              </a:rPr>
+              <a:t>출력</a:t>
+            </a:r>
+            <a:endParaRPr lang="en-US" sz="1200" dirty="0"/>
+          </a:p>
+          <a:p>
+            <a:pPr indent="0" marL="0">
               <a:buNone/>
             </a:pPr>
             <a:r>
               <a:rPr lang="en-US" sz="1200" dirty="0">
                 <a:solidFill>
-                  <a:schemeClr val="bg1"/>
+                  <a:schemeClr val="tx1"/>
                 </a:solidFill>
                 <a:latin typeface="Courier New" pitchFamily="34" charset="0"/>
                 <a:ea typeface="Courier New" pitchFamily="34" charset="-122"/>
                 <a:cs typeface="Courier New" pitchFamily="34" charset="-120"/>
               </a:rPr>
-              <a:t>probs = torch.sigmoid(outputs.logits_per_image)</a:t>
+              <a:t>pixel_values torch.Size([1, 3, 256, 256])  ← 다국어 모델은 256</a:t>
             </a:r>
             <a:endParaRPr lang="en-US" sz="1200" dirty="0"/>
           </a:p>
-        </p:txBody>
-      </p:sp>
-      <p:sp>
-        <p:nvSpPr>
-          <p:cNvPr id="5" name="text-418"/>
+          <a:p>
+            <a:pPr indent="0" marL="0">
+              <a:buNone/>
+            </a:pPr>
+            <a:r>
+              <a:rPr lang="en-US" sz="1200" dirty="0">
+                <a:solidFill>
+                  <a:schemeClr val="tx1"/>
+                </a:solidFill>
+                <a:latin typeface="Courier New" pitchFamily="34" charset="0"/>
+                <a:ea typeface="Courier New" pitchFamily="34" charset="-122"/>
+                <a:cs typeface="Courier New" pitchFamily="34" charset="-120"/>
+              </a:rPr>
+              <a:t>19.2% that image 0 is 'une photo de 2 chats'</a:t>
+            </a:r>
+            <a:endParaRPr lang="en-US" sz="1200" dirty="0"/>
+          </a:p>
+        </p:txBody>
+      </p:sp>
+      <p:sp>
+        <p:nvSpPr>
+          <p:cNvPr id="7" name="text-420"/>
           <p:cNvSpPr txBox="1"/>
           <p:nvPr/>
         </p:nvSpPr>
         <p:spPr>
           <a:xfrm>
-            <a:off x="640080" y="4846320"/>
+            <a:off x="640080" y="5623560"/>
             <a:ext cx="7315200" cy="292608"/>
           </a:xfrm>
           <a:prstGeom prst="rect">
@@ -14801,7 +14879,7 @@
                   </a:extLst>
                 </a:hlinkClick>
               </a:rPr>
-              <a:t>Inference with (multilingual) SigLIP 노트북 · 직접 실행 (base-patch16-224)</a:t>
+              <a:t>Inference with (multilingual) SigLIP 노트북 · 직접 실행 (base-patch16-256-multilingual)</a:t>
             </a:r>
             <a:endParaRPr lang="en-US" sz="1100" dirty="0"/>
           </a:p>
@@ -14809,7 +14887,7 @@
       </p:sp>
       <p:sp>
         <p:nvSpPr>
-          <p:cNvPr id="6" name="text-419"/>
+          <p:cNvPr id="8" name="text-421"/>
           <p:cNvSpPr txBox="1"/>
           <p:nvPr/>
         </p:nvSpPr>
@@ -14845,7 +14923,7 @@
       </p:sp>
       <p:sp>
         <p:nvSpPr>
-          <p:cNvPr id="7" name="bar-bg-420"/>
+          <p:cNvPr id="9" name="bar-bg-422"/>
           <p:cNvSpPr/>
           <p:nvPr/>
         </p:nvSpPr>
@@ -14865,14 +14943,14 @@
       </p:sp>
       <p:sp>
         <p:nvSpPr>
-          <p:cNvPr id="8" name="bar-421"/>
+          <p:cNvPr id="10" name="bar-423"/>
           <p:cNvSpPr/>
           <p:nvPr/>
         </p:nvSpPr>
         <p:spPr>
           <a:xfrm>
             <a:off x="7955280" y="1709928"/>
-            <a:ext cx="782269" cy="274320"/>
+            <a:ext cx="509138" cy="274320"/>
           </a:xfrm>
           <a:prstGeom prst="rect">
             <a:avLst/>
@@ -14885,7 +14963,7 @@
       </p:sp>
       <p:sp>
         <p:nvSpPr>
-          <p:cNvPr id="9" name="text-422"/>
+          <p:cNvPr id="11" name="text-424"/>
           <p:cNvSpPr txBox="1"/>
           <p:nvPr/>
         </p:nvSpPr>
@@ -14913,7 +14991,7 @@
                   <a:schemeClr val="accent5"/>
                 </a:solidFill>
               </a:rPr>
-              <a:t>29.5%</a:t>
+              <a:t>19.2%</a:t>
             </a:r>
             <a:endParaRPr lang="en-US" sz="1600" dirty="0"/>
           </a:p>
@@ -14921,13 +14999,13 @@
       </p:sp>
       <p:sp>
         <p:nvSpPr>
-          <p:cNvPr id="10" name="text-423"/>
+          <p:cNvPr id="12" name="text-425"/>
           <p:cNvSpPr txBox="1"/>
           <p:nvPr/>
         </p:nvSpPr>
         <p:spPr>
           <a:xfrm>
-            <a:off x="7955280" y="2103120"/>
+            <a:off x="7955280" y="2057400"/>
             <a:ext cx="3566160" cy="347472"/>
           </a:xfrm>
           <a:prstGeom prst="rect">
@@ -14957,13 +15035,13 @@
       </p:sp>
       <p:sp>
         <p:nvSpPr>
-          <p:cNvPr id="11" name="bar-bg-424"/>
+          <p:cNvPr id="13" name="bar-bg-426"/>
           <p:cNvSpPr/>
           <p:nvPr/>
         </p:nvSpPr>
         <p:spPr>
           <a:xfrm>
-            <a:off x="7955280" y="2487168"/>
+            <a:off x="7955280" y="2441448"/>
             <a:ext cx="2651760" cy="274320"/>
           </a:xfrm>
           <a:prstGeom prst="rect">
@@ -14977,13 +15055,13 @@
       </p:sp>
       <p:sp>
         <p:nvSpPr>
-          <p:cNvPr id="12" name="bar-425"/>
+          <p:cNvPr id="14" name="bar-427"/>
           <p:cNvSpPr/>
           <p:nvPr/>
         </p:nvSpPr>
         <p:spPr>
           <a:xfrm>
-            <a:off x="7955280" y="2487168"/>
+            <a:off x="7955280" y="2441448"/>
             <a:ext cx="36576" cy="274320"/>
           </a:xfrm>
           <a:prstGeom prst="rect">
@@ -14997,13 +15075,13 @@
       </p:sp>
       <p:sp>
         <p:nvSpPr>
-          <p:cNvPr id="13" name="text-426"/>
+          <p:cNvPr id="15" name="text-428"/>
           <p:cNvSpPr txBox="1"/>
           <p:nvPr/>
         </p:nvSpPr>
         <p:spPr>
           <a:xfrm>
-            <a:off x="10652760" y="2395728"/>
+            <a:off x="10652760" y="2350008"/>
             <a:ext cx="868680" cy="457200"/>
           </a:xfrm>
           <a:prstGeom prst="rect">
@@ -15033,13 +15111,13 @@
       </p:sp>
       <p:sp>
         <p:nvSpPr>
-          <p:cNvPr id="14" name="text-427"/>
+          <p:cNvPr id="16" name="text-429"/>
           <p:cNvSpPr txBox="1"/>
           <p:nvPr/>
         </p:nvSpPr>
         <p:spPr>
           <a:xfrm>
-            <a:off x="7955280" y="2880360"/>
+            <a:off x="7955280" y="2788920"/>
             <a:ext cx="3566160" cy="347472"/>
           </a:xfrm>
           <a:prstGeom prst="rect">
@@ -15069,13 +15147,13 @@
       </p:sp>
       <p:sp>
         <p:nvSpPr>
-          <p:cNvPr id="15" name="bar-bg-428"/>
+          <p:cNvPr id="17" name="bar-bg-430"/>
           <p:cNvSpPr/>
           <p:nvPr/>
         </p:nvSpPr>
         <p:spPr>
           <a:xfrm>
-            <a:off x="7955280" y="3264408"/>
+            <a:off x="7955280" y="3172968"/>
             <a:ext cx="2651760" cy="274320"/>
           </a:xfrm>
           <a:prstGeom prst="rect">
@@ -15089,13 +15167,13 @@
       </p:sp>
       <p:sp>
         <p:nvSpPr>
-          <p:cNvPr id="16" name="bar-429"/>
+          <p:cNvPr id="18" name="bar-431"/>
           <p:cNvSpPr/>
           <p:nvPr/>
         </p:nvSpPr>
         <p:spPr>
           <a:xfrm>
-            <a:off x="7955280" y="3264408"/>
+            <a:off x="7955280" y="3172968"/>
             <a:ext cx="36576" cy="274320"/>
           </a:xfrm>
           <a:prstGeom prst="rect">
@@ -15109,13 +15187,13 @@
       </p:sp>
       <p:sp>
         <p:nvSpPr>
-          <p:cNvPr id="17" name="text-430"/>
+          <p:cNvPr id="19" name="text-432"/>
           <p:cNvSpPr txBox="1"/>
           <p:nvPr/>
         </p:nvSpPr>
         <p:spPr>
           <a:xfrm>
-            <a:off x="10652760" y="3172968"/>
+            <a:off x="10652760" y="3081528"/>
             <a:ext cx="868680" cy="457200"/>
           </a:xfrm>
           <a:prstGeom prst="rect">
@@ -15145,23 +15223,23 @@
       </p:sp>
       <p:sp>
         <p:nvSpPr>
-          <p:cNvPr id="18" name="card-431"/>
+          <p:cNvPr id="20" name="card-433"/>
           <p:cNvSpPr/>
           <p:nvPr/>
         </p:nvSpPr>
         <p:spPr>
           <a:xfrm>
-            <a:off x="640080" y="5257800"/>
-            <a:ext cx="10881360" cy="822960"/>
+            <a:off x="7955280" y="3657600"/>
+            <a:ext cx="3566160" cy="2377440"/>
           </a:xfrm>
           <a:prstGeom prst="roundRect">
             <a:avLst>
-              <a:gd name="adj" fmla="val 15556"/>
+              <a:gd name="adj" fmla="val 5385"/>
             </a:avLst>
           </a:prstGeom>
           <a:solidFill>
-            <a:schemeClr val="accent4">
-              <a:alpha val="8000"/>
+            <a:schemeClr val="accent3">
+              <a:alpha val="10000"/>
             </a:schemeClr>
           </a:solidFill>
           <a:ln/>
@@ -15169,58 +15247,14 @@
       </p:sp>
       <p:sp>
         <p:nvSpPr>
-          <p:cNvPr id="19" name="circle-432"/>
-          <p:cNvSpPr/>
-          <p:nvPr/>
-        </p:nvSpPr>
-        <p:spPr>
-          <a:xfrm>
-            <a:off x="868680" y="5413248"/>
-            <a:ext cx="512064" cy="512064"/>
-          </a:xfrm>
-          <a:prstGeom prst="ellipse">
-            <a:avLst/>
-          </a:prstGeom>
-          <a:solidFill>
-            <a:schemeClr val="accent4"/>
-          </a:solidFill>
-          <a:ln/>
-        </p:spPr>
-      </p:sp>
-      <p:pic>
-        <p:nvPicPr>
-          <p:cNvPr id="20" name="icon-FaExclamationTriangle-433" descr="FaExclamationTriangle">    </p:cNvPr>
-          <p:cNvPicPr>
-            <a:picLocks noChangeAspect="1"/>
-          </p:cNvPicPr>
-          <p:nvPr/>
-        </p:nvPicPr>
-        <p:blipFill>
-          <a:blip r:embed="rId2"/>
-          <a:stretch>
-            <a:fillRect/>
-          </a:stretch>
-        </p:blipFill>
-        <p:spPr>
-          <a:xfrm>
-            <a:off x="1001817" y="5546385"/>
-            <a:ext cx="245791" cy="245791"/>
-          </a:xfrm>
-          <a:prstGeom prst="rect">
-            <a:avLst/>
-          </a:prstGeom>
-        </p:spPr>
-      </p:pic>
-      <p:sp>
-        <p:nvSpPr>
           <p:cNvPr id="21" name="text-434"/>
           <p:cNvSpPr txBox="1"/>
           <p:nvPr/>
         </p:nvSpPr>
         <p:spPr>
           <a:xfrm>
-            <a:off x="1554480" y="5257800"/>
-            <a:ext cx="9875520" cy="822960"/>
+            <a:off x="8138160" y="3657600"/>
+            <a:ext cx="3246120" cy="2377440"/>
           </a:xfrm>
           <a:prstGeom prst="rect">
             <a:avLst/>
@@ -15236,99 +15270,28 @@
               <a:buNone/>
             </a:pPr>
             <a:r>
-              <a:rPr lang="en-US" sz="1400" b="1" dirty="0">
-                <a:solidFill>
-                  <a:schemeClr val="accent4"/>
-                </a:solidFill>
-              </a:rPr>
-              <a:t>모델 로드가 주석 처리 → 이 결과는 영어 base 모델로 나온 값.  </a:t>
-            </a:r>
+              <a:rPr lang="en-US" sz="1600" b="1" dirty="0">
+                <a:solidFill>
+                  <a:schemeClr val="accent3"/>
+                </a:solidFill>
+              </a:rPr>
+              <a:t>영어 29.5% vs 다국어 19.2%?</a:t>
+            </a:r>
+            <a:endParaRPr lang="en-US" sz="1600" dirty="0"/>
+          </a:p>
+          <a:p>
+            <a:pPr indent="0" marL="0">
+              <a:buNone/>
+            </a:pPr>
             <a:r>
               <a:rPr lang="en-US" sz="1400" dirty="0">
                 <a:solidFill>
                   <a:schemeClr val="tx1"/>
                 </a:solidFill>
               </a:rPr>
-              <a:t>제대로 하려면 </a:t>
-            </a:r>
-            <a:r>
-              <a:rPr lang="en-US" sz="1400" b="1" dirty="0">
-                <a:solidFill>
-                  <a:schemeClr val="tx1"/>
-                </a:solidFill>
-                <a:latin typeface="Courier New" pitchFamily="34" charset="0"/>
-                <a:ea typeface="Courier New" pitchFamily="34" charset="-122"/>
-                <a:cs typeface="Courier New" pitchFamily="34" charset="-120"/>
-              </a:rPr>
-              <a:t>google/siglip-base-patch16-256-multilingual</a:t>
-            </a:r>
-            <a:r>
-              <a:rPr lang="en-US" sz="1400" dirty="0">
-                <a:solidFill>
-                  <a:schemeClr val="tx1"/>
-                </a:solidFill>
-              </a:rPr>
-              <a:t> 로 다시 실행</a:t>
-            </a:r>
-            <a:endParaRPr lang="en-US" sz="1400" dirty="0"/>
-          </a:p>
-        </p:txBody>
-      </p:sp>
-      <p:sp>
-        <p:nvSpPr>
-          <p:cNvPr id="22" name="card-435"/>
-          <p:cNvSpPr/>
-          <p:nvPr/>
-        </p:nvSpPr>
-        <p:spPr>
-          <a:xfrm>
-            <a:off x="7955280" y="3794760"/>
-            <a:ext cx="3566160" cy="1234440"/>
-          </a:xfrm>
-          <a:prstGeom prst="roundRect">
-            <a:avLst>
-              <a:gd name="adj" fmla="val 10370"/>
-            </a:avLst>
-          </a:prstGeom>
-          <a:solidFill>
-            <a:schemeClr val="bg2"/>
-          </a:solidFill>
-          <a:ln/>
-        </p:spPr>
-      </p:sp>
-      <p:sp>
-        <p:nvSpPr>
-          <p:cNvPr id="23" name="text-436"/>
-          <p:cNvSpPr txBox="1"/>
-          <p:nvPr/>
-        </p:nvSpPr>
-        <p:spPr>
-          <a:xfrm>
-            <a:off x="8138160" y="3794760"/>
-            <a:ext cx="3246120" cy="1234440"/>
-          </a:xfrm>
-          <a:prstGeom prst="rect">
-            <a:avLst/>
-          </a:prstGeom>
-          <a:noFill/>
-          <a:ln/>
-        </p:spPr>
-        <p:txBody>
-          <a:bodyPr wrap="square" lIns="0" tIns="0" rIns="0" bIns="0" rtlCol="0" anchor="ctr"/>
-          <a:lstStyle/>
-          <a:p>
-            <a:pPr indent="0" marL="0">
-              <a:buNone/>
-            </a:pPr>
-            <a:r>
-              <a:rPr lang="en-US" sz="1300" dirty="0">
-                <a:solidFill>
-                  <a:schemeClr val="tx1"/>
-                </a:solidFill>
-              </a:rPr>
-              <a:t>다국어 모델(mSigLIP): 영어로 거르지 않은 WebLI 데이터, 어휘 25만 토큰 → 한국어 질문 실험용</a:t>
-            </a:r>
-            <a:endParaRPr lang="en-US" sz="1300" dirty="0"/>
+              <a:t>모델마다 학습된 온도 t·바이어스 b가 달라서 확률의 크기를 모델끼리 비교하면 안 됨. 정답만 높고 나머지는 0 → 구분은 잘 함</a:t>
+            </a:r>
+            <a:endParaRPr lang="en-US" sz="1600" dirty="0"/>
           </a:p>
         </p:txBody>
       </p:sp>
@@ -15442,7 +15405,7 @@
       </p:sp>
       <p:sp>
         <p:nvSpPr>
-          <p:cNvPr id="3" name="codebg-437"/>
+          <p:cNvPr id="3" name="codebg-435"/>
           <p:cNvSpPr/>
           <p:nvPr/>
         </p:nvSpPr>
@@ -15464,7 +15427,7 @@
       </p:sp>
       <p:sp>
         <p:nvSpPr>
-          <p:cNvPr id="4" name="text-438"/>
+          <p:cNvPr id="4" name="text-436"/>
           <p:cNvSpPr txBox="1"/>
           <p:nvPr/>
         </p:nvSpPr>
@@ -15686,7 +15649,7 @@
       </p:sp>
       <p:sp>
         <p:nvSpPr>
-          <p:cNvPr id="5" name="outbg-439"/>
+          <p:cNvPr id="5" name="outbg-437"/>
           <p:cNvSpPr/>
           <p:nvPr/>
         </p:nvSpPr>
@@ -15713,7 +15676,7 @@
       </p:sp>
       <p:sp>
         <p:nvSpPr>
-          <p:cNvPr id="6" name="text-440"/>
+          <p:cNvPr id="6" name="text-438"/>
           <p:cNvSpPr txBox="1"/>
           <p:nvPr/>
         </p:nvSpPr>
@@ -15800,7 +15763,7 @@
       </p:sp>
       <p:sp>
         <p:nvSpPr>
-          <p:cNvPr id="7" name="text-441"/>
+          <p:cNvPr id="7" name="text-439"/>
           <p:cNvSpPr txBox="1"/>
           <p:nvPr/>
         </p:nvSpPr>
@@ -15851,7 +15814,7 @@
       </p:sp>
       <p:sp>
         <p:nvSpPr>
-          <p:cNvPr id="8" name="text-442"/>
+          <p:cNvPr id="8" name="text-440"/>
           <p:cNvSpPr txBox="1"/>
           <p:nvPr/>
         </p:nvSpPr>
@@ -15887,7 +15850,7 @@
       </p:sp>
       <p:sp>
         <p:nvSpPr>
-          <p:cNvPr id="9" name="bar-bg-443"/>
+          <p:cNvPr id="9" name="bar-bg-441"/>
           <p:cNvSpPr/>
           <p:nvPr/>
         </p:nvSpPr>
@@ -15907,7 +15870,7 @@
       </p:sp>
       <p:sp>
         <p:nvSpPr>
-          <p:cNvPr id="10" name="bar-444"/>
+          <p:cNvPr id="10" name="bar-442"/>
           <p:cNvSpPr/>
           <p:nvPr/>
         </p:nvSpPr>
@@ -15927,7 +15890,7 @@
       </p:sp>
       <p:sp>
         <p:nvSpPr>
-          <p:cNvPr id="11" name="text-445"/>
+          <p:cNvPr id="11" name="text-443"/>
           <p:cNvSpPr txBox="1"/>
           <p:nvPr/>
         </p:nvSpPr>
@@ -15963,7 +15926,7 @@
       </p:sp>
       <p:sp>
         <p:nvSpPr>
-          <p:cNvPr id="12" name="text-446"/>
+          <p:cNvPr id="12" name="text-444"/>
           <p:cNvSpPr txBox="1"/>
           <p:nvPr/>
         </p:nvSpPr>
@@ -15999,7 +15962,7 @@
       </p:sp>
       <p:sp>
         <p:nvSpPr>
-          <p:cNvPr id="13" name="bar-bg-447"/>
+          <p:cNvPr id="13" name="bar-bg-445"/>
           <p:cNvSpPr/>
           <p:nvPr/>
         </p:nvSpPr>
@@ -16019,7 +15982,7 @@
       </p:sp>
       <p:sp>
         <p:nvSpPr>
-          <p:cNvPr id="14" name="bar-448"/>
+          <p:cNvPr id="14" name="bar-446"/>
           <p:cNvSpPr/>
           <p:nvPr/>
         </p:nvSpPr>
@@ -16039,7 +16002,7 @@
       </p:sp>
       <p:sp>
         <p:nvSpPr>
-          <p:cNvPr id="15" name="text-449"/>
+          <p:cNvPr id="15" name="text-447"/>
           <p:cNvSpPr txBox="1"/>
           <p:nvPr/>
         </p:nvSpPr>
@@ -16075,7 +16038,7 @@
       </p:sp>
       <p:sp>
         <p:nvSpPr>
-          <p:cNvPr id="16" name="text-450"/>
+          <p:cNvPr id="16" name="text-448"/>
           <p:cNvSpPr txBox="1"/>
           <p:nvPr/>
         </p:nvSpPr>
@@ -16111,7 +16074,7 @@
       </p:sp>
       <p:sp>
         <p:nvSpPr>
-          <p:cNvPr id="17" name="bar-bg-451"/>
+          <p:cNvPr id="17" name="bar-bg-449"/>
           <p:cNvSpPr/>
           <p:nvPr/>
         </p:nvSpPr>
@@ -16131,7 +16094,7 @@
       </p:sp>
       <p:sp>
         <p:nvSpPr>
-          <p:cNvPr id="18" name="bar-452"/>
+          <p:cNvPr id="18" name="bar-450"/>
           <p:cNvSpPr/>
           <p:nvPr/>
         </p:nvSpPr>
@@ -16151,7 +16114,7 @@
       </p:sp>
       <p:sp>
         <p:nvSpPr>
-          <p:cNvPr id="19" name="text-453"/>
+          <p:cNvPr id="19" name="text-451"/>
           <p:cNvSpPr txBox="1"/>
           <p:nvPr/>
         </p:nvSpPr>
@@ -16187,7 +16150,7 @@
       </p:sp>
       <p:sp>
         <p:nvSpPr>
-          <p:cNvPr id="20" name="card-454"/>
+          <p:cNvPr id="20" name="card-452"/>
           <p:cNvSpPr/>
           <p:nvPr/>
         </p:nvSpPr>
@@ -16211,7 +16174,7 @@
       </p:sp>
       <p:sp>
         <p:nvSpPr>
-          <p:cNvPr id="21" name="text-455"/>
+          <p:cNvPr id="21" name="text-453"/>
           <p:cNvSpPr txBox="1"/>
           <p:nvPr/>
         </p:nvSpPr>
@@ -16369,7 +16332,7 @@
       </p:sp>
       <p:sp>
         <p:nvSpPr>
-          <p:cNvPr id="3" name="circle-456"/>
+          <p:cNvPr id="3" name="circle-454"/>
           <p:cNvSpPr/>
           <p:nvPr/>
         </p:nvSpPr>
@@ -16389,7 +16352,7 @@
       </p:sp>
       <p:pic>
         <p:nvPicPr>
-          <p:cNvPr id="4" name="icon-FaToggleOn-457" descr="FaToggleOn">    </p:cNvPr>
+          <p:cNvPr id="4" name="icon-FaToggleOn-455" descr="FaToggleOn">    </p:cNvPr>
           <p:cNvPicPr>
             <a:picLocks noChangeAspect="1"/>
           </p:cNvPicPr>
@@ -16413,7 +16376,7 @@
       </p:pic>
       <p:sp>
         <p:nvSpPr>
-          <p:cNvPr id="5" name="text-458"/>
+          <p:cNvPr id="5" name="text-456"/>
           <p:cNvSpPr txBox="1"/>
           <p:nvPr/>
         </p:nvSpPr>
@@ -16449,7 +16412,7 @@
       </p:sp>
       <p:sp>
         <p:nvSpPr>
-          <p:cNvPr id="6" name="text-459"/>
+          <p:cNvPr id="6" name="text-457"/>
           <p:cNvSpPr txBox="1"/>
           <p:nvPr/>
         </p:nvSpPr>
@@ -16485,7 +16448,7 @@
       </p:sp>
       <p:sp>
         <p:nvSpPr>
-          <p:cNvPr id="7" name="circle-460"/>
+          <p:cNvPr id="7" name="circle-458"/>
           <p:cNvSpPr/>
           <p:nvPr/>
         </p:nvSpPr>
@@ -16505,7 +16468,7 @@
       </p:sp>
       <p:pic>
         <p:nvPicPr>
-          <p:cNvPr id="8" name="icon-FaMemory-461" descr="FaMemory">    </p:cNvPr>
+          <p:cNvPr id="8" name="icon-FaMemory-459" descr="FaMemory">    </p:cNvPr>
           <p:cNvPicPr>
             <a:picLocks noChangeAspect="1"/>
           </p:cNvPicPr>
@@ -16529,7 +16492,7 @@
       </p:pic>
       <p:sp>
         <p:nvSpPr>
-          <p:cNvPr id="9" name="text-462"/>
+          <p:cNvPr id="9" name="text-460"/>
           <p:cNvSpPr txBox="1"/>
           <p:nvPr/>
         </p:nvSpPr>
@@ -16565,7 +16528,7 @@
       </p:sp>
       <p:sp>
         <p:nvSpPr>
-          <p:cNvPr id="10" name="text-463"/>
+          <p:cNvPr id="10" name="text-461"/>
           <p:cNvSpPr txBox="1"/>
           <p:nvPr/>
         </p:nvSpPr>
@@ -16601,7 +16564,7 @@
       </p:sp>
       <p:sp>
         <p:nvSpPr>
-          <p:cNvPr id="11" name="circle-464"/>
+          <p:cNvPr id="11" name="circle-462"/>
           <p:cNvSpPr/>
           <p:nvPr/>
         </p:nvSpPr>
@@ -16621,7 +16584,7 @@
       </p:sp>
       <p:pic>
         <p:nvPicPr>
-          <p:cNvPr id="12" name="icon-FaSearch-465" descr="FaSearch">    </p:cNvPr>
+          <p:cNvPr id="12" name="icon-FaSearch-463" descr="FaSearch">    </p:cNvPr>
           <p:cNvPicPr>
             <a:picLocks noChangeAspect="1"/>
           </p:cNvPicPr>
@@ -16645,7 +16608,7 @@
       </p:pic>
       <p:sp>
         <p:nvSpPr>
-          <p:cNvPr id="13" name="text-466"/>
+          <p:cNvPr id="13" name="text-464"/>
           <p:cNvSpPr txBox="1"/>
           <p:nvPr/>
         </p:nvSpPr>
@@ -16681,7 +16644,7 @@
       </p:sp>
       <p:sp>
         <p:nvSpPr>
-          <p:cNvPr id="14" name="text-467"/>
+          <p:cNvPr id="14" name="text-465"/>
           <p:cNvSpPr txBox="1"/>
           <p:nvPr/>
         </p:nvSpPr>
@@ -16825,7 +16788,7 @@
       </p:sp>
       <p:sp>
         <p:nvSpPr>
-          <p:cNvPr id="3" name="text-468"/>
+          <p:cNvPr id="3" name="text-466"/>
           <p:cNvSpPr txBox="1"/>
           <p:nvPr/>
         </p:nvSpPr>
@@ -16861,7 +16824,7 @@
       </p:sp>
       <p:sp>
         <p:nvSpPr>
-          <p:cNvPr id="4" name="text-469"/>
+          <p:cNvPr id="4" name="text-467"/>
           <p:cNvSpPr txBox="1"/>
           <p:nvPr/>
         </p:nvSpPr>
@@ -16904,7 +16867,7 @@
       </p:sp>
       <p:sp>
         <p:nvSpPr>
-          <p:cNvPr id="5" name="text-470"/>
+          <p:cNvPr id="5" name="text-468"/>
           <p:cNvSpPr txBox="1"/>
           <p:nvPr/>
         </p:nvSpPr>
@@ -16940,7 +16903,7 @@
       </p:sp>
       <p:sp>
         <p:nvSpPr>
-          <p:cNvPr id="6" name="text-471"/>
+          <p:cNvPr id="6" name="text-469"/>
           <p:cNvSpPr txBox="1"/>
           <p:nvPr/>
         </p:nvSpPr>
@@ -16983,7 +16946,7 @@
       </p:sp>
       <p:sp>
         <p:nvSpPr>
-          <p:cNvPr id="7" name="text-472"/>
+          <p:cNvPr id="7" name="text-470"/>
           <p:cNvSpPr txBox="1"/>
           <p:nvPr/>
         </p:nvSpPr>
@@ -17019,7 +16982,7 @@
       </p:sp>
       <p:sp>
         <p:nvSpPr>
-          <p:cNvPr id="8" name="text-473"/>
+          <p:cNvPr id="8" name="text-471"/>
           <p:cNvSpPr txBox="1"/>
           <p:nvPr/>
         </p:nvSpPr>
@@ -17062,7 +17025,7 @@
       </p:sp>
       <p:sp>
         <p:nvSpPr>
-          <p:cNvPr id="9" name="text-474"/>
+          <p:cNvPr id="9" name="text-472"/>
           <p:cNvSpPr txBox="1"/>
           <p:nvPr/>
         </p:nvSpPr>
@@ -17098,7 +17061,7 @@
       </p:sp>
       <p:sp>
         <p:nvSpPr>
-          <p:cNvPr id="10" name="text-475"/>
+          <p:cNvPr id="10" name="text-473"/>
           <p:cNvSpPr txBox="1"/>
           <p:nvPr/>
         </p:nvSpPr>
@@ -17141,7 +17104,7 @@
       </p:sp>
       <p:sp>
         <p:nvSpPr>
-          <p:cNvPr id="11" name="text-476"/>
+          <p:cNvPr id="11" name="text-474"/>
           <p:cNvSpPr txBox="1"/>
           <p:nvPr/>
         </p:nvSpPr>
@@ -17177,7 +17140,7 @@
       </p:sp>
       <p:sp>
         <p:nvSpPr>
-          <p:cNvPr id="12" name="text-477"/>
+          <p:cNvPr id="12" name="text-475"/>
           <p:cNvSpPr txBox="1"/>
           <p:nvPr/>
         </p:nvSpPr>
@@ -17220,7 +17183,7 @@
       </p:sp>
       <p:sp>
         <p:nvSpPr>
-          <p:cNvPr id="13" name="text-478"/>
+          <p:cNvPr id="13" name="text-476"/>
           <p:cNvSpPr txBox="1"/>
           <p:nvPr/>
         </p:nvSpPr>
@@ -17256,7 +17219,7 @@
       </p:sp>
       <p:sp>
         <p:nvSpPr>
-          <p:cNvPr id="14" name="text-479"/>
+          <p:cNvPr id="14" name="text-477"/>
           <p:cNvSpPr txBox="1"/>
           <p:nvPr/>
         </p:nvSpPr>
@@ -17299,7 +17262,7 @@
       </p:sp>
       <p:sp>
         <p:nvSpPr>
-          <p:cNvPr id="15" name="card-480"/>
+          <p:cNvPr id="15" name="card-478"/>
           <p:cNvSpPr/>
           <p:nvPr/>
         </p:nvSpPr>
@@ -17321,7 +17284,7 @@
       </p:sp>
       <p:sp>
         <p:nvSpPr>
-          <p:cNvPr id="16" name="text-481"/>
+          <p:cNvPr id="16" name="text-479"/>
           <p:cNvSpPr txBox="1"/>
           <p:nvPr/>
         </p:nvSpPr>
